--- a/decks/day3/module-6-azure-devops-mcp.pptx
+++ b/decks/day3/module-6-azure-devops-mcp.pptx
@@ -19,9 +19,10 @@
     <p:sldId id="267" r:id="rId13"/>
     <p:sldId id="268" r:id="rId14"/>
     <p:sldId id="269" r:id="rId15"/>
+    <p:sldId id="270" r:id="rId16"/>
   </p:sldIdLst>
   <p:notesMasterIdLst>
-    <p:notesMasterId r:id="rId16"/>
+    <p:notesMasterId r:id="rId17"/>
   </p:notesMasterIdLst>
   <p:sldSz cx="9144000" cy="5143500"/>
   <p:notesSz cx="5143500" cy="9144000"/>
@@ -606,9 +607,9 @@
           <a:p>
             <a:r>
               <a:rPr lang="en-US" dirty="0"/>
-              <a:t>• Keep these as separate documented patterns. Foundry documents the Azure DevOps catalog path for Foundry agents. Separately, Toolbox documentation exposes an MCP endpoint that a MAF client can consume. Do not imply one portal wizard automatically produces the full local-MAF path.
-• GROUNDING SOURCE: https://learn.microsoft.com/en-us/azure/foundry/agents/how-to/tools/model-context-protocol
-• GROUNDING SOURCE: https://learn.microsoft.com/en-us/azure/foundry/agents/how-to/tools/toolbox</a:t>
+              <a:t>• This is the lab safety pattern, not a claim that the server automatically approves writes. First retrieve the current item. Then construct the proposed mutation. Show the exact tool and arguments. Execute only after an explicit approval path.
+• GROUNDING SOURCE: https://learn.microsoft.com/en-us/azure/devops/mcp-server/remote-mcp-server?view=azure-devops
+• GROUNDING SOURCE: https://learn.microsoft.com/en-us/agent-framework/agents/tools/tool-approval?tabs=python</a:t>
             </a:r>
             <a:endParaRPr lang="en-US" dirty="0"/>
           </a:p>
@@ -696,8 +697,9 @@
           <a:p>
             <a:r>
               <a:rPr lang="en-US" dirty="0"/>
-              <a:t>• The Foundry documentation explains project connections and an expected CONSENT_REQUIRED response for OAuth-backed toolbox connections. It does not document a complete direct local MAF OAuth flow to the Azure DevOps endpoint, so do not teach one.
-• GROUNDING SOURCE: https://learn.microsoft.com/en-us/azure/foundry/agents/how-to/tools/model-context-protocol</a:t>
+              <a:t>• Keep these as separate documented patterns. Foundry documents the Azure DevOps catalog path for Foundry agents. Separately, Toolbox documentation exposes an MCP endpoint that a MAF client can consume. Do not imply one portal wizard automatically produces the full local-MAF path.
+• GROUNDING SOURCE: https://learn.microsoft.com/en-us/azure/foundry/agents/how-to/tools/model-context-protocol
+• GROUNDING SOURCE: https://learn.microsoft.com/en-us/azure/foundry/agents/how-to/tools/toolbox</a:t>
             </a:r>
             <a:endParaRPr lang="en-US" dirty="0"/>
           </a:p>
@@ -785,9 +787,8 @@
           <a:p>
             <a:r>
               <a:rPr lang="en-US" dirty="0"/>
-              <a:t>• Diagnose in layers. Authentication failures differ from permission failures, discovery filters, and invalid consolidated actions. Avoid widening access until you know which layer failed.
-• GROUNDING SOURCE: https://learn.microsoft.com/en-us/azure/devops/mcp-server/remote-mcp-server?view=azure-devops
-• GROUNDING SOURCE: https://learn.microsoft.com/en-us/azure/devops/mcp-server/remote-mcp-server-troubleshooting?view=azure-devops</a:t>
+              <a:t>• The Foundry documentation explains project connections and an expected CONSENT_REQUIRED response for OAuth-backed toolbox connections. It does not document a complete direct local MAF OAuth flow to the Azure DevOps endpoint, so do not teach one.
+• GROUNDING SOURCE: https://learn.microsoft.com/en-us/azure/foundry/agents/how-to/tools/model-context-protocol</a:t>
             </a:r>
             <a:endParaRPr lang="en-US" dirty="0"/>
           </a:p>
@@ -875,9 +876,9 @@
           <a:p>
             <a:r>
               <a:rPr lang="en-US" dirty="0"/>
-              <a:t>• These are the guardrails the future lab will enforce. Use a disposable workshop project, start read-only, minimize tools, require approval for writes, and retain an audit trail.
+              <a:t>• Diagnose in layers. Authentication failures differ from permission failures, discovery filters, and invalid consolidated actions. Avoid widening access until you know which layer failed.
 • GROUNDING SOURCE: https://learn.microsoft.com/en-us/azure/devops/mcp-server/remote-mcp-server?view=azure-devops
-• GROUNDING SOURCE: https://learn.microsoft.com/en-us/azure/foundry/agents/how-to/tools/model-context-protocol</a:t>
+• GROUNDING SOURCE: https://learn.microsoft.com/en-us/azure/devops/mcp-server/remote-mcp-server-troubleshooting?view=azure-devops</a:t>
             </a:r>
             <a:endParaRPr lang="en-US" dirty="0"/>
           </a:p>
@@ -965,9 +966,9 @@
           <a:p>
             <a:r>
               <a:rPr lang="en-US" dirty="0"/>
-              <a:t>• Recap the exact facts. Transition to evaluation: the next module checks whether the agent chose wit_work_item or wit_work_item_write with the expected action and arguments.
-• GROUNDING SOURCE: https://learn.microsoft.com/en-us/azure/devops/release-notes/2026/sprint-278-update
-• GROUNDING SOURCE: https://learn.microsoft.com/en-us/azure/devops/mcp-server/remote-mcp-server?view=azure-devops</a:t>
+              <a:t>• These are the guardrails the future lab will enforce. Use a disposable workshop project, start read-only, minimize tools, require approval for writes, and retain an audit trail.
+• GROUNDING SOURCE: https://learn.microsoft.com/en-us/azure/devops/mcp-server/remote-mcp-server?view=azure-devops
+• GROUNDING SOURCE: https://learn.microsoft.com/en-us/azure/foundry/agents/how-to/tools/model-context-protocol</a:t>
             </a:r>
             <a:endParaRPr lang="en-US" dirty="0"/>
           </a:p>
@@ -991,6 +992,96 @@
             <a:fld id="{F7021451-1387-4CA6-816F-3879F97B5CBC}" type="slidenum">
               <a:rPr lang="en-US"/>
               <a:t>14</a:t>
+            </a:fld>
+            <a:endParaRPr lang="en-US"/>
+          </a:p>
+        </p:txBody>
+      </p:sp>
+    </p:spTree>
+    <p:extLst>
+      <p:ext uri="{BB962C8B-B14F-4D97-AF65-F5344CB8AC3E}">
+        <p14:creationId xmlns:p14="http://schemas.microsoft.com/office/powerpoint/2010/main" val="1024086991"/>
+      </p:ext>
+    </p:extLst>
+  </p:cSld>
+  <p:clrMapOvr>
+    <a:masterClrMapping/>
+  </p:clrMapOvr>
+</p:notes>
+</file>
+
+<file path=ppt/notesSlides/notesSlide15.xml><?xml version="1.0" encoding="utf-8"?>
+<p:notes xmlns:a="http://schemas.openxmlformats.org/drawingml/2006/main" xmlns:r="http://schemas.openxmlformats.org/officeDocument/2006/relationships" xmlns:p="http://schemas.openxmlformats.org/presentationml/2006/main">
+  <p:cSld>
+    <p:spTree>
+      <p:nvGrpSpPr>
+        <p:cNvPr id="1" name=""/>
+        <p:cNvGrpSpPr/>
+        <p:nvPr/>
+      </p:nvGrpSpPr>
+      <p:grpSpPr>
+        <a:xfrm>
+          <a:off x="0" y="0"/>
+          <a:ext cx="0" cy="0"/>
+          <a:chOff x="0" y="0"/>
+          <a:chExt cx="0" cy="0"/>
+        </a:xfrm>
+      </p:grpSpPr>
+      <p:sp>
+        <p:nvSpPr>
+          <p:cNvPr id="2" name="Slide Image Placeholder 1"/>
+          <p:cNvSpPr>
+            <a:spLocks noGrp="1" noRot="1" noChangeAspect="1"/>
+          </p:cNvSpPr>
+          <p:nvPr>
+            <p:ph type="sldImg"/>
+          </p:nvPr>
+        </p:nvSpPr>
+        <p:spPr/>
+      </p:sp>
+      <p:sp>
+        <p:nvSpPr>
+          <p:cNvPr id="3" name="Notes Placeholder 2"/>
+          <p:cNvSpPr>
+            <a:spLocks noGrp="1"/>
+          </p:cNvSpPr>
+          <p:nvPr>
+            <p:ph type="body" idx="1"/>
+          </p:nvPr>
+        </p:nvSpPr>
+        <p:spPr/>
+        <p:txBody>
+          <a:bodyPr/>
+          <a:lstStyle/>
+          <a:p>
+            <a:r>
+              <a:rPr lang="en-US" dirty="0"/>
+              <a:t>• Recap the exact facts. Transition to evaluation: the next module checks whether the agent chose wit_work_item or wit_work_item_write with the expected action and arguments.
+• GROUNDING SOURCE: https://learn.microsoft.com/en-us/azure/devops/release-notes/2026/sprint-278-update
+• GROUNDING SOURCE: https://learn.microsoft.com/en-us/azure/devops/mcp-server/remote-mcp-server?view=azure-devops</a:t>
+            </a:r>
+            <a:endParaRPr lang="en-US" dirty="0"/>
+          </a:p>
+        </p:txBody>
+      </p:sp>
+      <p:sp>
+        <p:nvSpPr>
+          <p:cNvPr id="4" name="Slide Number Placeholder 3"/>
+          <p:cNvSpPr>
+            <a:spLocks noGrp="1"/>
+          </p:cNvSpPr>
+          <p:nvPr>
+            <p:ph type="sldNum" sz="quarter" idx="10"/>
+          </p:nvPr>
+        </p:nvSpPr>
+        <p:spPr/>
+        <p:txBody>
+          <a:bodyPr/>
+          <a:lstStyle/>
+          <a:p>
+            <a:fld id="{F7021451-1387-4CA6-816F-3879F97B5CBC}" type="slidenum">
+              <a:rPr lang="en-US"/>
+              <a:t>15</a:t>
             </a:fld>
             <a:endParaRPr lang="en-US"/>
           </a:p>
@@ -1590,7 +1681,7 @@
           <a:p>
             <a:r>
               <a:rPr lang="en-US" dirty="0"/>
-              <a:t>• Use current exact names. Reads use wit_work_item with an action such as get, get_batch, my, or list_for_iteration. Creates and field updates use wit_work_item_write with create, update, update_batch, or add_child. Comments and links have separate write tools.
+              <a:t>• Placeholder marker slide — the runbook has full narration, setup, and fallback plan. No SDK sample exists for the GA remote server yet; grounded directly in the Learn doc's documented endpoint, headers, and consolidated tool names. Presenter substitutes their own Entra-backed Azure DevOps org before running.
 • GROUNDING SOURCE: https://learn.microsoft.com/en-us/azure/devops/mcp-server/remote-mcp-server?view=azure-devops</a:t>
             </a:r>
             <a:endParaRPr lang="en-US" dirty="0"/>
@@ -1679,9 +1770,8 @@
           <a:p>
             <a:r>
               <a:rPr lang="en-US" dirty="0"/>
-              <a:t>• This is the lab safety pattern, not a claim that the server automatically approves writes. First retrieve the current item. Then construct the proposed mutation. Show the exact tool and arguments. Execute only after an explicit approval path.
-• GROUNDING SOURCE: https://learn.microsoft.com/en-us/azure/devops/mcp-server/remote-mcp-server?view=azure-devops
-• GROUNDING SOURCE: https://learn.microsoft.com/en-us/agent-framework/agents/tools/tool-approval?tabs=python</a:t>
+              <a:t>• Use current exact names. Reads use wit_work_item with an action such as get, get_batch, my, or list_for_iteration. Creates and field updates use wit_work_item_write with create, update, update_batch, or add_child. Comments and links have separate write tools.
+• GROUNDING SOURCE: https://learn.microsoft.com/en-us/azure/devops/mcp-server/remote-mcp-server?view=azure-devops</a:t>
             </a:r>
             <a:endParaRPr lang="en-US" dirty="0"/>
           </a:p>
@@ -2402,7 +2492,7 @@
                 <a:ea typeface="Calibri" pitchFamily="34" charset="-122"/>
                 <a:cs typeface="Calibri" pitchFamily="34" charset="-120"/>
               </a:rPr>
-              <a:t>Two supported paths — not one wizard</a:t>
+              <a:t>Use a read-first, approved-write sequence</a:t>
             </a:r>
             <a:endParaRPr lang="en-US" sz="2500" dirty="0"/>
           </a:p>
@@ -2416,16 +2506,206 @@
         </p:nvSpPr>
         <p:spPr>
           <a:xfrm>
-            <a:off x="365760" y="1078992"/>
-            <a:ext cx="4114800" cy="3493008"/>
+            <a:off x="365760" y="1216152"/>
+            <a:ext cx="2633472" cy="1572768"/>
           </a:xfrm>
           <a:prstGeom prst="roundRect">
-            <a:avLst/>
+            <a:avLst>
+              <a:gd name="adj" fmla="val 3488"/>
+            </a:avLst>
+          </a:prstGeom>
+          <a:solidFill>
+            <a:srgbClr val="CADCFC"/>
+          </a:solidFill>
+          <a:ln w="10160">
+            <a:solidFill>
+              <a:srgbClr val="1E2761"/>
+            </a:solidFill>
+            <a:prstDash val="solid"/>
+          </a:ln>
+        </p:spPr>
+      </p:sp>
+      <p:sp>
+        <p:nvSpPr>
+          <p:cNvPr id="6" name="Shape 4"/>
+          <p:cNvSpPr/>
+          <p:nvPr/>
+        </p:nvSpPr>
+        <p:spPr>
+          <a:xfrm>
+            <a:off x="475488" y="1335024"/>
+            <a:ext cx="320040" cy="320040"/>
+          </a:xfrm>
+          <a:prstGeom prst="ellipse">
+            <a:avLst/>
+          </a:prstGeom>
+          <a:solidFill>
+            <a:srgbClr val="1E2761"/>
+          </a:solidFill>
+          <a:ln/>
+        </p:spPr>
+      </p:sp>
+      <p:sp>
+        <p:nvSpPr>
+          <p:cNvPr id="7" name="Text 5"/>
+          <p:cNvSpPr/>
+          <p:nvPr/>
+        </p:nvSpPr>
+        <p:spPr>
+          <a:xfrm>
+            <a:off x="475488" y="1385316"/>
+            <a:ext cx="320040" cy="146304"/>
+          </a:xfrm>
+          <a:prstGeom prst="rect">
+            <a:avLst/>
+          </a:prstGeom>
+          <a:noFill/>
+          <a:ln/>
+        </p:spPr>
+        <p:txBody>
+          <a:bodyPr wrap="square" lIns="0" tIns="0" rIns="0" bIns="0" rtlCol="0" anchor="ctr"/>
+          <a:lstStyle/>
+          <a:p>
+            <a:pPr algn="ctr" indent="0" marL="0">
+              <a:buNone/>
+            </a:pPr>
+            <a:r>
+              <a:rPr lang="en-US" sz="900" b="1" dirty="0">
+                <a:solidFill>
+                  <a:srgbClr val="FFFFFF"/>
+                </a:solidFill>
+                <a:latin typeface="Calibri" pitchFamily="34" charset="0"/>
+                <a:ea typeface="Calibri" pitchFamily="34" charset="-122"/>
+                <a:cs typeface="Calibri" pitchFamily="34" charset="-120"/>
+              </a:rPr>
+              <a:t>1</a:t>
+            </a:r>
+            <a:endParaRPr lang="en-US" sz="900" dirty="0"/>
+          </a:p>
+        </p:txBody>
+      </p:sp>
+      <p:sp>
+        <p:nvSpPr>
+          <p:cNvPr id="8" name="Text 6"/>
+          <p:cNvSpPr/>
+          <p:nvPr/>
+        </p:nvSpPr>
+        <p:spPr>
+          <a:xfrm>
+            <a:off x="896112" y="1335024"/>
+            <a:ext cx="1975104" cy="310896"/>
+          </a:xfrm>
+          <a:prstGeom prst="rect">
+            <a:avLst/>
+          </a:prstGeom>
+          <a:noFill/>
+          <a:ln/>
+        </p:spPr>
+        <p:txBody>
+          <a:bodyPr wrap="square" lIns="0" tIns="0" rIns="0" bIns="0" rtlCol="0" anchor="ctr">
+            <a:normAutofit/>
+          </a:bodyPr>
+          <a:lstStyle/>
+          <a:p>
+            <a:pPr indent="0" marL="0">
+              <a:buNone/>
+            </a:pPr>
+            <a:r>
+              <a:rPr lang="en-US" sz="1500" b="1" dirty="0">
+                <a:solidFill>
+                  <a:srgbClr val="1E2761"/>
+                </a:solidFill>
+                <a:latin typeface="Calibri" pitchFamily="34" charset="0"/>
+                <a:ea typeface="Calibri" pitchFamily="34" charset="-122"/>
+                <a:cs typeface="Calibri" pitchFamily="34" charset="-120"/>
+              </a:rPr>
+              <a:t>Read</a:t>
+            </a:r>
+            <a:endParaRPr lang="en-US" sz="1500" dirty="0"/>
+          </a:p>
+        </p:txBody>
+      </p:sp>
+      <p:sp>
+        <p:nvSpPr>
+          <p:cNvPr id="9" name="Text 7"/>
+          <p:cNvSpPr/>
+          <p:nvPr/>
+        </p:nvSpPr>
+        <p:spPr>
+          <a:xfrm>
+            <a:off x="512064" y="1719072"/>
+            <a:ext cx="2340864" cy="950976"/>
+          </a:xfrm>
+          <a:prstGeom prst="rect">
+            <a:avLst/>
+          </a:prstGeom>
+          <a:noFill/>
+          <a:ln/>
+        </p:spPr>
+        <p:txBody>
+          <a:bodyPr wrap="square" lIns="0" tIns="0" rIns="0" bIns="0" rtlCol="0" anchor="t">
+            <a:normAutofit/>
+          </a:bodyPr>
+          <a:lstStyle/>
+          <a:p>
+            <a:pPr indent="0" marL="0">
+              <a:buNone/>
+            </a:pPr>
+            <a:r>
+              <a:rPr lang="en-US" sz="1150" dirty="0">
+                <a:solidFill>
+                  <a:srgbClr val="212121"/>
+                </a:solidFill>
+                <a:latin typeface="Calibri" pitchFamily="34" charset="0"/>
+                <a:ea typeface="Calibri" pitchFamily="34" charset="-122"/>
+                <a:cs typeface="Calibri" pitchFamily="34" charset="-120"/>
+              </a:rPr>
+              <a:t>wit_work_item(action="get", ...)</a:t>
+            </a:r>
+            <a:endParaRPr lang="en-US" sz="1150" dirty="0"/>
+          </a:p>
+        </p:txBody>
+      </p:sp>
+      <p:sp>
+        <p:nvSpPr>
+          <p:cNvPr id="10" name="Shape 8"/>
+          <p:cNvSpPr/>
+          <p:nvPr/>
+        </p:nvSpPr>
+        <p:spPr>
+          <a:xfrm>
+            <a:off x="3035808" y="1892808"/>
+            <a:ext cx="164592" cy="219456"/>
+          </a:xfrm>
+          <a:prstGeom prst="chevron">
+            <a:avLst/>
+          </a:prstGeom>
+          <a:solidFill>
+            <a:srgbClr val="E8A87C"/>
+          </a:solidFill>
+          <a:ln/>
+        </p:spPr>
+      </p:sp>
+      <p:sp>
+        <p:nvSpPr>
+          <p:cNvPr id="11" name="Shape 9"/>
+          <p:cNvSpPr/>
+          <p:nvPr/>
+        </p:nvSpPr>
+        <p:spPr>
+          <a:xfrm>
+            <a:off x="3255264" y="1216152"/>
+            <a:ext cx="2633472" cy="1572768"/>
+          </a:xfrm>
+          <a:prstGeom prst="roundRect">
+            <a:avLst>
+              <a:gd name="adj" fmla="val 3488"/>
+            </a:avLst>
           </a:prstGeom>
           <a:solidFill>
             <a:srgbClr val="F3F4F6"/>
           </a:solidFill>
-          <a:ln w="11430">
+          <a:ln w="10160">
             <a:solidFill>
               <a:srgbClr val="D1D5DB"/>
             </a:solidFill>
@@ -2435,14 +2715,73 @@
       </p:sp>
       <p:sp>
         <p:nvSpPr>
-          <p:cNvPr id="6" name="Text 4"/>
-          <p:cNvSpPr/>
-          <p:nvPr/>
-        </p:nvSpPr>
-        <p:spPr>
-          <a:xfrm>
-            <a:off x="566928" y="1298448"/>
-            <a:ext cx="3712464" cy="411480"/>
+          <p:cNvPr id="12" name="Shape 10"/>
+          <p:cNvSpPr/>
+          <p:nvPr/>
+        </p:nvSpPr>
+        <p:spPr>
+          <a:xfrm>
+            <a:off x="3364992" y="1335024"/>
+            <a:ext cx="320040" cy="320040"/>
+          </a:xfrm>
+          <a:prstGeom prst="ellipse">
+            <a:avLst/>
+          </a:prstGeom>
+          <a:solidFill>
+            <a:srgbClr val="1E2761"/>
+          </a:solidFill>
+          <a:ln/>
+        </p:spPr>
+      </p:sp>
+      <p:sp>
+        <p:nvSpPr>
+          <p:cNvPr id="13" name="Text 11"/>
+          <p:cNvSpPr/>
+          <p:nvPr/>
+        </p:nvSpPr>
+        <p:spPr>
+          <a:xfrm>
+            <a:off x="3364992" y="1385316"/>
+            <a:ext cx="320040" cy="146304"/>
+          </a:xfrm>
+          <a:prstGeom prst="rect">
+            <a:avLst/>
+          </a:prstGeom>
+          <a:noFill/>
+          <a:ln/>
+        </p:spPr>
+        <p:txBody>
+          <a:bodyPr wrap="square" lIns="0" tIns="0" rIns="0" bIns="0" rtlCol="0" anchor="ctr"/>
+          <a:lstStyle/>
+          <a:p>
+            <a:pPr algn="ctr" indent="0" marL="0">
+              <a:buNone/>
+            </a:pPr>
+            <a:r>
+              <a:rPr lang="en-US" sz="900" b="1" dirty="0">
+                <a:solidFill>
+                  <a:srgbClr val="FFFFFF"/>
+                </a:solidFill>
+                <a:latin typeface="Calibri" pitchFamily="34" charset="0"/>
+                <a:ea typeface="Calibri" pitchFamily="34" charset="-122"/>
+                <a:cs typeface="Calibri" pitchFamily="34" charset="-120"/>
+              </a:rPr>
+              <a:t>2</a:t>
+            </a:r>
+            <a:endParaRPr lang="en-US" sz="900" dirty="0"/>
+          </a:p>
+        </p:txBody>
+      </p:sp>
+      <p:sp>
+        <p:nvSpPr>
+          <p:cNvPr id="14" name="Text 12"/>
+          <p:cNvSpPr/>
+          <p:nvPr/>
+        </p:nvSpPr>
+        <p:spPr>
+          <a:xfrm>
+            <a:off x="3785616" y="1335024"/>
+            <a:ext cx="1975104" cy="310896"/>
           </a:xfrm>
           <a:prstGeom prst="rect">
             <a:avLst/>
@@ -2460,7 +2799,7 @@
               <a:buNone/>
             </a:pPr>
             <a:r>
-              <a:rPr lang="en-US" sz="2000" b="1" dirty="0">
+              <a:rPr lang="en-US" sz="1500" b="1" dirty="0">
                 <a:solidFill>
                   <a:srgbClr val="1E2761"/>
                 </a:solidFill>
@@ -2468,41 +2807,40 @@
                 <a:ea typeface="Calibri" pitchFamily="34" charset="-122"/>
                 <a:cs typeface="Calibri" pitchFamily="34" charset="-120"/>
               </a:rPr>
-              <a:t>Foundry agent path</a:t>
-            </a:r>
-            <a:endParaRPr lang="en-US" sz="2000" dirty="0"/>
-          </a:p>
-        </p:txBody>
-      </p:sp>
-      <p:sp>
-        <p:nvSpPr>
-          <p:cNvPr id="7" name="Text 5"/>
-          <p:cNvSpPr/>
-          <p:nvPr/>
-        </p:nvSpPr>
-        <p:spPr>
-          <a:xfrm>
-            <a:off x="594360" y="1828800"/>
-            <a:ext cx="3639312" cy="2395728"/>
-          </a:xfrm>
-          <a:prstGeom prst="rect">
-            <a:avLst/>
-          </a:prstGeom>
-          <a:noFill/>
-          <a:ln/>
-        </p:spPr>
-        <p:txBody>
-          <a:bodyPr wrap="square" lIns="381" tIns="381" rIns="381" bIns="381" rtlCol="0" anchor="ctr">
+              <a:t>Compare</a:t>
+            </a:r>
+            <a:endParaRPr lang="en-US" sz="1500" dirty="0"/>
+          </a:p>
+        </p:txBody>
+      </p:sp>
+      <p:sp>
+        <p:nvSpPr>
+          <p:cNvPr id="15" name="Text 13"/>
+          <p:cNvSpPr/>
+          <p:nvPr/>
+        </p:nvSpPr>
+        <p:spPr>
+          <a:xfrm>
+            <a:off x="3401568" y="1719072"/>
+            <a:ext cx="2340864" cy="950976"/>
+          </a:xfrm>
+          <a:prstGeom prst="rect">
+            <a:avLst/>
+          </a:prstGeom>
+          <a:noFill/>
+          <a:ln/>
+        </p:spPr>
+        <p:txBody>
+          <a:bodyPr wrap="square" lIns="0" tIns="0" rIns="0" bIns="0" rtlCol="0" anchor="t">
             <a:normAutofit/>
           </a:bodyPr>
           <a:lstStyle/>
           <a:p>
-            <a:pPr marL="342900" indent="-342900">
-              <a:buSzPct val="100000"/>
-              <a:buChar char="•"/>
-            </a:pPr>
-            <a:r>
-              <a:rPr lang="en-US" sz="1300" dirty="0">
+            <a:pPr indent="0" marL="0">
+              <a:buNone/>
+            </a:pPr>
+            <a:r>
+              <a:rPr lang="en-US" sz="1150" dirty="0">
                 <a:solidFill>
                   <a:srgbClr val="212121"/>
                 </a:solidFill>
@@ -2510,66 +2848,408 @@
                 <a:ea typeface="Calibri" pitchFamily="34" charset="-122"/>
                 <a:cs typeface="Calibri" pitchFamily="34" charset="-120"/>
               </a:rPr>
-              <a:t>Add Tools → Catalog → Azure DevOps</a:t>
-            </a:r>
-            <a:endParaRPr lang="en-US" sz="1300" dirty="0"/>
-          </a:p>
-          <a:p>
-            <a:pPr marL="342900" indent="-342900">
-              <a:buSzPct val="100000"/>
-              <a:buChar char="•"/>
-            </a:pPr>
-            <a:r>
-              <a:rPr lang="en-US" sz="1300" dirty="0">
-                <a:solidFill>
-                  <a:srgbClr val="212121"/>
+              <a:t>Show current values and proposed change</a:t>
+            </a:r>
+            <a:endParaRPr lang="en-US" sz="1150" dirty="0"/>
+          </a:p>
+        </p:txBody>
+      </p:sp>
+      <p:sp>
+        <p:nvSpPr>
+          <p:cNvPr id="16" name="Shape 14"/>
+          <p:cNvSpPr/>
+          <p:nvPr/>
+        </p:nvSpPr>
+        <p:spPr>
+          <a:xfrm>
+            <a:off x="5925312" y="1892808"/>
+            <a:ext cx="164592" cy="219456"/>
+          </a:xfrm>
+          <a:prstGeom prst="chevron">
+            <a:avLst/>
+          </a:prstGeom>
+          <a:solidFill>
+            <a:srgbClr val="E8A87C"/>
+          </a:solidFill>
+          <a:ln/>
+        </p:spPr>
+      </p:sp>
+      <p:sp>
+        <p:nvSpPr>
+          <p:cNvPr id="17" name="Shape 15"/>
+          <p:cNvSpPr/>
+          <p:nvPr/>
+        </p:nvSpPr>
+        <p:spPr>
+          <a:xfrm>
+            <a:off x="6144768" y="1216152"/>
+            <a:ext cx="2633472" cy="1572768"/>
+          </a:xfrm>
+          <a:prstGeom prst="roundRect">
+            <a:avLst>
+              <a:gd name="adj" fmla="val 3488"/>
+            </a:avLst>
+          </a:prstGeom>
+          <a:solidFill>
+            <a:srgbClr val="F3F4F6"/>
+          </a:solidFill>
+          <a:ln w="10160">
+            <a:solidFill>
+              <a:srgbClr val="D1D5DB"/>
+            </a:solidFill>
+            <a:prstDash val="solid"/>
+          </a:ln>
+        </p:spPr>
+      </p:sp>
+      <p:sp>
+        <p:nvSpPr>
+          <p:cNvPr id="18" name="Shape 16"/>
+          <p:cNvSpPr/>
+          <p:nvPr/>
+        </p:nvSpPr>
+        <p:spPr>
+          <a:xfrm>
+            <a:off x="6254496" y="1335024"/>
+            <a:ext cx="320040" cy="320040"/>
+          </a:xfrm>
+          <a:prstGeom prst="ellipse">
+            <a:avLst/>
+          </a:prstGeom>
+          <a:solidFill>
+            <a:srgbClr val="1E2761"/>
+          </a:solidFill>
+          <a:ln/>
+        </p:spPr>
+      </p:sp>
+      <p:sp>
+        <p:nvSpPr>
+          <p:cNvPr id="19" name="Text 17"/>
+          <p:cNvSpPr/>
+          <p:nvPr/>
+        </p:nvSpPr>
+        <p:spPr>
+          <a:xfrm>
+            <a:off x="6254496" y="1385316"/>
+            <a:ext cx="320040" cy="146304"/>
+          </a:xfrm>
+          <a:prstGeom prst="rect">
+            <a:avLst/>
+          </a:prstGeom>
+          <a:noFill/>
+          <a:ln/>
+        </p:spPr>
+        <p:txBody>
+          <a:bodyPr wrap="square" lIns="0" tIns="0" rIns="0" bIns="0" rtlCol="0" anchor="ctr"/>
+          <a:lstStyle/>
+          <a:p>
+            <a:pPr algn="ctr" indent="0" marL="0">
+              <a:buNone/>
+            </a:pPr>
+            <a:r>
+              <a:rPr lang="en-US" sz="900" b="1" dirty="0">
+                <a:solidFill>
+                  <a:srgbClr val="FFFFFF"/>
                 </a:solidFill>
                 <a:latin typeface="Calibri" pitchFamily="34" charset="0"/>
                 <a:ea typeface="Calibri" pitchFamily="34" charset="-122"/>
                 <a:cs typeface="Calibri" pitchFamily="34" charset="-120"/>
               </a:rPr>
-              <a:t>Authenticate through a project connection</a:t>
-            </a:r>
-            <a:endParaRPr lang="en-US" sz="1300" dirty="0"/>
-          </a:p>
-          <a:p>
-            <a:pPr marL="342900" indent="-342900">
-              <a:buSzPct val="100000"/>
-              <a:buChar char="•"/>
-            </a:pPr>
-            <a:r>
-              <a:rPr lang="en-US" sz="1300" dirty="0">
-                <a:solidFill>
-                  <a:srgbClr val="212121"/>
+              <a:t>3</a:t>
+            </a:r>
+            <a:endParaRPr lang="en-US" sz="900" dirty="0"/>
+          </a:p>
+        </p:txBody>
+      </p:sp>
+      <p:sp>
+        <p:nvSpPr>
+          <p:cNvPr id="20" name="Text 18"/>
+          <p:cNvSpPr/>
+          <p:nvPr/>
+        </p:nvSpPr>
+        <p:spPr>
+          <a:xfrm>
+            <a:off x="6675120" y="1335024"/>
+            <a:ext cx="1975104" cy="310896"/>
+          </a:xfrm>
+          <a:prstGeom prst="rect">
+            <a:avLst/>
+          </a:prstGeom>
+          <a:noFill/>
+          <a:ln/>
+        </p:spPr>
+        <p:txBody>
+          <a:bodyPr wrap="square" lIns="0" tIns="0" rIns="0" bIns="0" rtlCol="0" anchor="ctr">
+            <a:normAutofit/>
+          </a:bodyPr>
+          <a:lstStyle/>
+          <a:p>
+            <a:pPr indent="0" marL="0">
+              <a:buNone/>
+            </a:pPr>
+            <a:r>
+              <a:rPr lang="en-US" sz="1500" b="1" dirty="0">
+                <a:solidFill>
+                  <a:srgbClr val="1E2761"/>
                 </a:solidFill>
                 <a:latin typeface="Calibri" pitchFamily="34" charset="0"/>
                 <a:ea typeface="Calibri" pitchFamily="34" charset="-122"/>
                 <a:cs typeface="Calibri" pitchFamily="34" charset="-120"/>
               </a:rPr>
-              <a:t>Select the smallest required tool subset</a:t>
-            </a:r>
-            <a:endParaRPr lang="en-US" sz="1300" dirty="0"/>
-          </a:p>
-        </p:txBody>
-      </p:sp>
-      <p:sp>
-        <p:nvSpPr>
-          <p:cNvPr id="8" name="Shape 6"/>
-          <p:cNvSpPr/>
-          <p:nvPr/>
-        </p:nvSpPr>
-        <p:spPr>
-          <a:xfrm>
-            <a:off x="4663440" y="1078992"/>
-            <a:ext cx="4114800" cy="3493008"/>
+              <a:t>Approve</a:t>
+            </a:r>
+            <a:endParaRPr lang="en-US" sz="1500" dirty="0"/>
+          </a:p>
+        </p:txBody>
+      </p:sp>
+      <p:sp>
+        <p:nvSpPr>
+          <p:cNvPr id="21" name="Text 19"/>
+          <p:cNvSpPr/>
+          <p:nvPr/>
+        </p:nvSpPr>
+        <p:spPr>
+          <a:xfrm>
+            <a:off x="6291072" y="1719072"/>
+            <a:ext cx="2340864" cy="950976"/>
+          </a:xfrm>
+          <a:prstGeom prst="rect">
+            <a:avLst/>
+          </a:prstGeom>
+          <a:noFill/>
+          <a:ln/>
+        </p:spPr>
+        <p:txBody>
+          <a:bodyPr wrap="square" lIns="0" tIns="0" rIns="0" bIns="0" rtlCol="0" anchor="t">
+            <a:normAutofit/>
+          </a:bodyPr>
+          <a:lstStyle/>
+          <a:p>
+            <a:pPr indent="0" marL="0">
+              <a:buNone/>
+            </a:pPr>
+            <a:r>
+              <a:rPr lang="en-US" sz="1150" dirty="0">
+                <a:solidFill>
+                  <a:srgbClr val="212121"/>
+                </a:solidFill>
+                <a:latin typeface="Calibri" pitchFamily="34" charset="0"/>
+                <a:ea typeface="Calibri" pitchFamily="34" charset="-122"/>
+                <a:cs typeface="Calibri" pitchFamily="34" charset="-120"/>
+              </a:rPr>
+              <a:t>Caller reviews tool name and arguments</a:t>
+            </a:r>
+            <a:endParaRPr lang="en-US" sz="1150" dirty="0"/>
+          </a:p>
+        </p:txBody>
+      </p:sp>
+      <p:sp>
+        <p:nvSpPr>
+          <p:cNvPr id="22" name="Shape 20"/>
+          <p:cNvSpPr/>
+          <p:nvPr/>
+        </p:nvSpPr>
+        <p:spPr>
+          <a:xfrm>
+            <a:off x="365760" y="3044952"/>
+            <a:ext cx="2633472" cy="1572768"/>
           </a:xfrm>
           <a:prstGeom prst="roundRect">
-            <a:avLst/>
+            <a:avLst>
+              <a:gd name="adj" fmla="val 3488"/>
+            </a:avLst>
+          </a:prstGeom>
+          <a:solidFill>
+            <a:srgbClr val="F3F4F6"/>
+          </a:solidFill>
+          <a:ln w="10160">
+            <a:solidFill>
+              <a:srgbClr val="D1D5DB"/>
+            </a:solidFill>
+            <a:prstDash val="solid"/>
+          </a:ln>
+        </p:spPr>
+      </p:sp>
+      <p:sp>
+        <p:nvSpPr>
+          <p:cNvPr id="23" name="Shape 21"/>
+          <p:cNvSpPr/>
+          <p:nvPr/>
+        </p:nvSpPr>
+        <p:spPr>
+          <a:xfrm>
+            <a:off x="475488" y="3163824"/>
+            <a:ext cx="320040" cy="320040"/>
+          </a:xfrm>
+          <a:prstGeom prst="ellipse">
+            <a:avLst/>
+          </a:prstGeom>
+          <a:solidFill>
+            <a:srgbClr val="1E2761"/>
+          </a:solidFill>
+          <a:ln/>
+        </p:spPr>
+      </p:sp>
+      <p:sp>
+        <p:nvSpPr>
+          <p:cNvPr id="24" name="Text 22"/>
+          <p:cNvSpPr/>
+          <p:nvPr/>
+        </p:nvSpPr>
+        <p:spPr>
+          <a:xfrm>
+            <a:off x="475488" y="3214116"/>
+            <a:ext cx="320040" cy="146304"/>
+          </a:xfrm>
+          <a:prstGeom prst="rect">
+            <a:avLst/>
+          </a:prstGeom>
+          <a:noFill/>
+          <a:ln/>
+        </p:spPr>
+        <p:txBody>
+          <a:bodyPr wrap="square" lIns="0" tIns="0" rIns="0" bIns="0" rtlCol="0" anchor="ctr"/>
+          <a:lstStyle/>
+          <a:p>
+            <a:pPr algn="ctr" indent="0" marL="0">
+              <a:buNone/>
+            </a:pPr>
+            <a:r>
+              <a:rPr lang="en-US" sz="900" b="1" dirty="0">
+                <a:solidFill>
+                  <a:srgbClr val="FFFFFF"/>
+                </a:solidFill>
+                <a:latin typeface="Calibri" pitchFamily="34" charset="0"/>
+                <a:ea typeface="Calibri" pitchFamily="34" charset="-122"/>
+                <a:cs typeface="Calibri" pitchFamily="34" charset="-120"/>
+              </a:rPr>
+              <a:t>4</a:t>
+            </a:r>
+            <a:endParaRPr lang="en-US" sz="900" dirty="0"/>
+          </a:p>
+        </p:txBody>
+      </p:sp>
+      <p:sp>
+        <p:nvSpPr>
+          <p:cNvPr id="25" name="Text 23"/>
+          <p:cNvSpPr/>
+          <p:nvPr/>
+        </p:nvSpPr>
+        <p:spPr>
+          <a:xfrm>
+            <a:off x="896112" y="3163824"/>
+            <a:ext cx="1975104" cy="310896"/>
+          </a:xfrm>
+          <a:prstGeom prst="rect">
+            <a:avLst/>
+          </a:prstGeom>
+          <a:noFill/>
+          <a:ln/>
+        </p:spPr>
+        <p:txBody>
+          <a:bodyPr wrap="square" lIns="0" tIns="0" rIns="0" bIns="0" rtlCol="0" anchor="ctr">
+            <a:normAutofit/>
+          </a:bodyPr>
+          <a:lstStyle/>
+          <a:p>
+            <a:pPr indent="0" marL="0">
+              <a:buNone/>
+            </a:pPr>
+            <a:r>
+              <a:rPr lang="en-US" sz="1500" b="1" dirty="0">
+                <a:solidFill>
+                  <a:srgbClr val="1E2761"/>
+                </a:solidFill>
+                <a:latin typeface="Calibri" pitchFamily="34" charset="0"/>
+                <a:ea typeface="Calibri" pitchFamily="34" charset="-122"/>
+                <a:cs typeface="Calibri" pitchFamily="34" charset="-120"/>
+              </a:rPr>
+              <a:t>Write</a:t>
+            </a:r>
+            <a:endParaRPr lang="en-US" sz="1500" dirty="0"/>
+          </a:p>
+        </p:txBody>
+      </p:sp>
+      <p:sp>
+        <p:nvSpPr>
+          <p:cNvPr id="26" name="Text 24"/>
+          <p:cNvSpPr/>
+          <p:nvPr/>
+        </p:nvSpPr>
+        <p:spPr>
+          <a:xfrm>
+            <a:off x="512064" y="3547872"/>
+            <a:ext cx="2340864" cy="950976"/>
+          </a:xfrm>
+          <a:prstGeom prst="rect">
+            <a:avLst/>
+          </a:prstGeom>
+          <a:noFill/>
+          <a:ln/>
+        </p:spPr>
+        <p:txBody>
+          <a:bodyPr wrap="square" lIns="0" tIns="0" rIns="0" bIns="0" rtlCol="0" anchor="t">
+            <a:normAutofit/>
+          </a:bodyPr>
+          <a:lstStyle/>
+          <a:p>
+            <a:pPr indent="0" marL="0">
+              <a:buNone/>
+            </a:pPr>
+            <a:r>
+              <a:rPr lang="en-US" sz="1150" dirty="0">
+                <a:solidFill>
+                  <a:srgbClr val="212121"/>
+                </a:solidFill>
+                <a:latin typeface="Calibri" pitchFamily="34" charset="0"/>
+                <a:ea typeface="Calibri" pitchFamily="34" charset="-122"/>
+                <a:cs typeface="Calibri" pitchFamily="34" charset="-120"/>
+              </a:rPr>
+              <a:t>wit_work_item_write(action="update", ...)</a:t>
+            </a:r>
+            <a:endParaRPr lang="en-US" sz="1150" dirty="0"/>
+          </a:p>
+        </p:txBody>
+      </p:sp>
+      <p:sp>
+        <p:nvSpPr>
+          <p:cNvPr id="27" name="Shape 25"/>
+          <p:cNvSpPr/>
+          <p:nvPr/>
+        </p:nvSpPr>
+        <p:spPr>
+          <a:xfrm>
+            <a:off x="3035808" y="3721608"/>
+            <a:ext cx="164592" cy="219456"/>
+          </a:xfrm>
+          <a:prstGeom prst="chevron">
+            <a:avLst/>
+          </a:prstGeom>
+          <a:solidFill>
+            <a:srgbClr val="E8A87C"/>
+          </a:solidFill>
+          <a:ln/>
+        </p:spPr>
+      </p:sp>
+      <p:sp>
+        <p:nvSpPr>
+          <p:cNvPr id="28" name="Shape 26"/>
+          <p:cNvSpPr/>
+          <p:nvPr/>
+        </p:nvSpPr>
+        <p:spPr>
+          <a:xfrm>
+            <a:off x="3255264" y="3044952"/>
+            <a:ext cx="2633472" cy="1572768"/>
+          </a:xfrm>
+          <a:prstGeom prst="roundRect">
+            <a:avLst>
+              <a:gd name="adj" fmla="val 3488"/>
+            </a:avLst>
           </a:prstGeom>
           <a:solidFill>
             <a:srgbClr val="CADCFC"/>
           </a:solidFill>
-          <a:ln w="11430">
+          <a:ln w="10160">
             <a:solidFill>
               <a:srgbClr val="1E2761"/>
             </a:solidFill>
@@ -2579,14 +3259,73 @@
       </p:sp>
       <p:sp>
         <p:nvSpPr>
-          <p:cNvPr id="9" name="Text 7"/>
-          <p:cNvSpPr/>
-          <p:nvPr/>
-        </p:nvSpPr>
-        <p:spPr>
-          <a:xfrm>
-            <a:off x="4864608" y="1298448"/>
-            <a:ext cx="3712464" cy="411480"/>
+          <p:cNvPr id="29" name="Shape 27"/>
+          <p:cNvSpPr/>
+          <p:nvPr/>
+        </p:nvSpPr>
+        <p:spPr>
+          <a:xfrm>
+            <a:off x="3364992" y="3163824"/>
+            <a:ext cx="320040" cy="320040"/>
+          </a:xfrm>
+          <a:prstGeom prst="ellipse">
+            <a:avLst/>
+          </a:prstGeom>
+          <a:solidFill>
+            <a:srgbClr val="1E2761"/>
+          </a:solidFill>
+          <a:ln/>
+        </p:spPr>
+      </p:sp>
+      <p:sp>
+        <p:nvSpPr>
+          <p:cNvPr id="30" name="Text 28"/>
+          <p:cNvSpPr/>
+          <p:nvPr/>
+        </p:nvSpPr>
+        <p:spPr>
+          <a:xfrm>
+            <a:off x="3364992" y="3214116"/>
+            <a:ext cx="320040" cy="146304"/>
+          </a:xfrm>
+          <a:prstGeom prst="rect">
+            <a:avLst/>
+          </a:prstGeom>
+          <a:noFill/>
+          <a:ln/>
+        </p:spPr>
+        <p:txBody>
+          <a:bodyPr wrap="square" lIns="0" tIns="0" rIns="0" bIns="0" rtlCol="0" anchor="ctr"/>
+          <a:lstStyle/>
+          <a:p>
+            <a:pPr algn="ctr" indent="0" marL="0">
+              <a:buNone/>
+            </a:pPr>
+            <a:r>
+              <a:rPr lang="en-US" sz="900" b="1" dirty="0">
+                <a:solidFill>
+                  <a:srgbClr val="FFFFFF"/>
+                </a:solidFill>
+                <a:latin typeface="Calibri" pitchFamily="34" charset="0"/>
+                <a:ea typeface="Calibri" pitchFamily="34" charset="-122"/>
+                <a:cs typeface="Calibri" pitchFamily="34" charset="-120"/>
+              </a:rPr>
+              <a:t>5</a:t>
+            </a:r>
+            <a:endParaRPr lang="en-US" sz="900" dirty="0"/>
+          </a:p>
+        </p:txBody>
+      </p:sp>
+      <p:sp>
+        <p:nvSpPr>
+          <p:cNvPr id="31" name="Text 29"/>
+          <p:cNvSpPr/>
+          <p:nvPr/>
+        </p:nvSpPr>
+        <p:spPr>
+          <a:xfrm>
+            <a:off x="3785616" y="3163824"/>
+            <a:ext cx="1975104" cy="310896"/>
           </a:xfrm>
           <a:prstGeom prst="rect">
             <a:avLst/>
@@ -2604,7 +3343,7 @@
               <a:buNone/>
             </a:pPr>
             <a:r>
-              <a:rPr lang="en-US" sz="2000" b="1" dirty="0">
+              <a:rPr lang="en-US" sz="1500" b="1" dirty="0">
                 <a:solidFill>
                   <a:srgbClr val="1E2761"/>
                 </a:solidFill>
@@ -2612,41 +3351,40 @@
                 <a:ea typeface="Calibri" pitchFamily="34" charset="-122"/>
                 <a:cs typeface="Calibri" pitchFamily="34" charset="-120"/>
               </a:rPr>
-              <a:t>Local MAF path</a:t>
-            </a:r>
-            <a:endParaRPr lang="en-US" sz="2000" dirty="0"/>
-          </a:p>
-        </p:txBody>
-      </p:sp>
-      <p:sp>
-        <p:nvSpPr>
-          <p:cNvPr id="10" name="Text 8"/>
-          <p:cNvSpPr/>
-          <p:nvPr/>
-        </p:nvSpPr>
-        <p:spPr>
-          <a:xfrm>
-            <a:off x="4892040" y="1828800"/>
-            <a:ext cx="3639312" cy="2395728"/>
-          </a:xfrm>
-          <a:prstGeom prst="rect">
-            <a:avLst/>
-          </a:prstGeom>
-          <a:noFill/>
-          <a:ln/>
-        </p:spPr>
-        <p:txBody>
-          <a:bodyPr wrap="square" lIns="381" tIns="381" rIns="381" bIns="381" rtlCol="0" anchor="ctr">
+              <a:t>Verify</a:t>
+            </a:r>
+            <a:endParaRPr lang="en-US" sz="1500" dirty="0"/>
+          </a:p>
+        </p:txBody>
+      </p:sp>
+      <p:sp>
+        <p:nvSpPr>
+          <p:cNvPr id="32" name="Text 30"/>
+          <p:cNvSpPr/>
+          <p:nvPr/>
+        </p:nvSpPr>
+        <p:spPr>
+          <a:xfrm>
+            <a:off x="3401568" y="3547872"/>
+            <a:ext cx="2340864" cy="950976"/>
+          </a:xfrm>
+          <a:prstGeom prst="rect">
+            <a:avLst/>
+          </a:prstGeom>
+          <a:noFill/>
+          <a:ln/>
+        </p:spPr>
+        <p:txBody>
+          <a:bodyPr wrap="square" lIns="0" tIns="0" rIns="0" bIns="0" rtlCol="0" anchor="t">
             <a:normAutofit/>
           </a:bodyPr>
           <a:lstStyle/>
           <a:p>
-            <a:pPr marL="342900" indent="-342900">
-              <a:buSzPct val="100000"/>
-              <a:buChar char="•"/>
-            </a:pPr>
-            <a:r>
-              <a:rPr lang="en-US" sz="1300" dirty="0">
+            <a:pPr indent="0" marL="0">
+              <a:buNone/>
+            </a:pPr>
+            <a:r>
+              <a:rPr lang="en-US" sz="1150" dirty="0">
                 <a:solidFill>
                   <a:srgbClr val="212121"/>
                 </a:solidFill>
@@ -2654,51 +3392,15 @@
                 <a:ea typeface="Calibri" pitchFamily="34" charset="-122"/>
                 <a:cs typeface="Calibri" pitchFamily="34" charset="-120"/>
               </a:rPr>
-              <a:t>Consume an existing Toolbox MCP endpoint</a:t>
-            </a:r>
-            <a:endParaRPr lang="en-US" sz="1300" dirty="0"/>
-          </a:p>
-          <a:p>
-            <a:pPr marL="342900" indent="-342900">
-              <a:buSzPct val="100000"/>
-              <a:buChar char="•"/>
-            </a:pPr>
-            <a:r>
-              <a:rPr lang="en-US" sz="1300" dirty="0">
-                <a:solidFill>
-                  <a:srgbClr val="212121"/>
-                </a:solidFill>
-                <a:latin typeface="Calibri" pitchFamily="34" charset="0"/>
-                <a:ea typeface="Calibri" pitchFamily="34" charset="-122"/>
-                <a:cs typeface="Calibri" pitchFamily="34" charset="-120"/>
-              </a:rPr>
-              <a:t>Authenticate to the Toolbox with supported Entra auth</a:t>
-            </a:r>
-            <a:endParaRPr lang="en-US" sz="1300" dirty="0"/>
-          </a:p>
-          <a:p>
-            <a:pPr marL="342900" indent="-342900">
-              <a:buSzPct val="100000"/>
-              <a:buChar char="•"/>
-            </a:pPr>
-            <a:r>
-              <a:rPr lang="en-US" sz="1300" dirty="0">
-                <a:solidFill>
-                  <a:srgbClr val="212121"/>
-                </a:solidFill>
-                <a:latin typeface="Calibri" pitchFamily="34" charset="0"/>
-                <a:ea typeface="Calibri" pitchFamily="34" charset="-122"/>
-                <a:cs typeface="Calibri" pitchFamily="34" charset="-120"/>
-              </a:rPr>
-              <a:t>Treat upstream MCP credentials as Toolbox-managed</a:t>
-            </a:r>
-            <a:endParaRPr lang="en-US" sz="1300" dirty="0"/>
-          </a:p>
-        </p:txBody>
-      </p:sp>
-      <p:sp>
-        <p:nvSpPr>
-          <p:cNvPr id="11" name="Shape 9"/>
+              <a:t>Read the item again and record the result</a:t>
+            </a:r>
+            <a:endParaRPr lang="en-US" sz="1150" dirty="0"/>
+          </a:p>
+        </p:txBody>
+      </p:sp>
+      <p:sp>
+        <p:nvSpPr>
+          <p:cNvPr id="33" name="Shape 31"/>
           <p:cNvSpPr/>
           <p:nvPr/>
         </p:nvSpPr>
@@ -2721,7 +3423,7 @@
       </p:sp>
       <p:sp>
         <p:nvSpPr>
-          <p:cNvPr id="12" name="Text 10"/>
+          <p:cNvPr id="34" name="Text 32"/>
           <p:cNvSpPr/>
           <p:nvPr/>
         </p:nvSpPr>
@@ -2754,7 +3456,7 @@
                 <a:ea typeface="Calibri" pitchFamily="34" charset="-122"/>
                 <a:cs typeface="Calibri" pitchFamily="34" charset="-120"/>
               </a:rPr>
-              <a:t>Source: https://learn.microsoft.com/en-us/azure/foundry/agents/how-to/tools/model-context-protocol  ·  +1 in notes</a:t>
+              <a:t>Source: https://learn.microsoft.com/en-us/azure/devops/mcp-server/remote-mcp-server?view=azure-devops  ·  +1 in notes</a:t>
             </a:r>
             <a:endParaRPr lang="en-US" sz="820" dirty="0"/>
           </a:p>
@@ -2888,7 +3590,7 @@
                 <a:ea typeface="Calibri" pitchFamily="34" charset="-122"/>
                 <a:cs typeface="Calibri" pitchFamily="34" charset="-120"/>
               </a:rPr>
-              <a:t>OAuth consent belongs to the connection path</a:t>
+              <a:t>Two supported paths — not one wizard</a:t>
             </a:r>
             <a:endParaRPr lang="en-US" sz="2500" dirty="0"/>
           </a:p>
@@ -2903,17 +3605,159 @@
         <p:spPr>
           <a:xfrm>
             <a:off x="365760" y="1078992"/>
-            <a:ext cx="4105656" cy="1655064"/>
+            <a:ext cx="4114800" cy="3493008"/>
           </a:xfrm>
           <a:prstGeom prst="roundRect">
-            <a:avLst>
-              <a:gd name="adj" fmla="val 3315"/>
-            </a:avLst>
+            <a:avLst/>
+          </a:prstGeom>
+          <a:solidFill>
+            <a:srgbClr val="F3F4F6"/>
+          </a:solidFill>
+          <a:ln w="11430">
+            <a:solidFill>
+              <a:srgbClr val="D1D5DB"/>
+            </a:solidFill>
+            <a:prstDash val="solid"/>
+          </a:ln>
+        </p:spPr>
+      </p:sp>
+      <p:sp>
+        <p:nvSpPr>
+          <p:cNvPr id="6" name="Text 4"/>
+          <p:cNvSpPr/>
+          <p:nvPr/>
+        </p:nvSpPr>
+        <p:spPr>
+          <a:xfrm>
+            <a:off x="566928" y="1298448"/>
+            <a:ext cx="3712464" cy="411480"/>
+          </a:xfrm>
+          <a:prstGeom prst="rect">
+            <a:avLst/>
+          </a:prstGeom>
+          <a:noFill/>
+          <a:ln/>
+        </p:spPr>
+        <p:txBody>
+          <a:bodyPr wrap="square" lIns="0" tIns="0" rIns="0" bIns="0" rtlCol="0" anchor="ctr">
+            <a:normAutofit/>
+          </a:bodyPr>
+          <a:lstStyle/>
+          <a:p>
+            <a:pPr indent="0" marL="0">
+              <a:buNone/>
+            </a:pPr>
+            <a:r>
+              <a:rPr lang="en-US" sz="2000" b="1" dirty="0">
+                <a:solidFill>
+                  <a:srgbClr val="1E2761"/>
+                </a:solidFill>
+                <a:latin typeface="Calibri" pitchFamily="34" charset="0"/>
+                <a:ea typeface="Calibri" pitchFamily="34" charset="-122"/>
+                <a:cs typeface="Calibri" pitchFamily="34" charset="-120"/>
+              </a:rPr>
+              <a:t>Foundry agent path</a:t>
+            </a:r>
+            <a:endParaRPr lang="en-US" sz="2000" dirty="0"/>
+          </a:p>
+        </p:txBody>
+      </p:sp>
+      <p:sp>
+        <p:nvSpPr>
+          <p:cNvPr id="7" name="Text 5"/>
+          <p:cNvSpPr/>
+          <p:nvPr/>
+        </p:nvSpPr>
+        <p:spPr>
+          <a:xfrm>
+            <a:off x="594360" y="1828800"/>
+            <a:ext cx="3639312" cy="2395728"/>
+          </a:xfrm>
+          <a:prstGeom prst="rect">
+            <a:avLst/>
+          </a:prstGeom>
+          <a:noFill/>
+          <a:ln/>
+        </p:spPr>
+        <p:txBody>
+          <a:bodyPr wrap="square" lIns="381" tIns="381" rIns="381" bIns="381" rtlCol="0" anchor="ctr">
+            <a:normAutofit/>
+          </a:bodyPr>
+          <a:lstStyle/>
+          <a:p>
+            <a:pPr marL="342900" indent="-342900">
+              <a:buSzPct val="100000"/>
+              <a:buChar char="•"/>
+            </a:pPr>
+            <a:r>
+              <a:rPr lang="en-US" sz="1300" dirty="0">
+                <a:solidFill>
+                  <a:srgbClr val="212121"/>
+                </a:solidFill>
+                <a:latin typeface="Calibri" pitchFamily="34" charset="0"/>
+                <a:ea typeface="Calibri" pitchFamily="34" charset="-122"/>
+                <a:cs typeface="Calibri" pitchFamily="34" charset="-120"/>
+              </a:rPr>
+              <a:t>Add Tools → Catalog → Azure DevOps</a:t>
+            </a:r>
+            <a:endParaRPr lang="en-US" sz="1300" dirty="0"/>
+          </a:p>
+          <a:p>
+            <a:pPr marL="342900" indent="-342900">
+              <a:buSzPct val="100000"/>
+              <a:buChar char="•"/>
+            </a:pPr>
+            <a:r>
+              <a:rPr lang="en-US" sz="1300" dirty="0">
+                <a:solidFill>
+                  <a:srgbClr val="212121"/>
+                </a:solidFill>
+                <a:latin typeface="Calibri" pitchFamily="34" charset="0"/>
+                <a:ea typeface="Calibri" pitchFamily="34" charset="-122"/>
+                <a:cs typeface="Calibri" pitchFamily="34" charset="-120"/>
+              </a:rPr>
+              <a:t>Authenticate through a project connection</a:t>
+            </a:r>
+            <a:endParaRPr lang="en-US" sz="1300" dirty="0"/>
+          </a:p>
+          <a:p>
+            <a:pPr marL="342900" indent="-342900">
+              <a:buSzPct val="100000"/>
+              <a:buChar char="•"/>
+            </a:pPr>
+            <a:r>
+              <a:rPr lang="en-US" sz="1300" dirty="0">
+                <a:solidFill>
+                  <a:srgbClr val="212121"/>
+                </a:solidFill>
+                <a:latin typeface="Calibri" pitchFamily="34" charset="0"/>
+                <a:ea typeface="Calibri" pitchFamily="34" charset="-122"/>
+                <a:cs typeface="Calibri" pitchFamily="34" charset="-120"/>
+              </a:rPr>
+              <a:t>Select the smallest required tool subset</a:t>
+            </a:r>
+            <a:endParaRPr lang="en-US" sz="1300" dirty="0"/>
+          </a:p>
+        </p:txBody>
+      </p:sp>
+      <p:sp>
+        <p:nvSpPr>
+          <p:cNvPr id="8" name="Shape 6"/>
+          <p:cNvSpPr/>
+          <p:nvPr/>
+        </p:nvSpPr>
+        <p:spPr>
+          <a:xfrm>
+            <a:off x="4663440" y="1078992"/>
+            <a:ext cx="4114800" cy="3493008"/>
+          </a:xfrm>
+          <a:prstGeom prst="roundRect">
+            <a:avLst/>
           </a:prstGeom>
           <a:solidFill>
             <a:srgbClr val="CADCFC"/>
           </a:solidFill>
-          <a:ln w="10160">
+          <a:ln w="11430">
             <a:solidFill>
               <a:srgbClr val="1E2761"/>
             </a:solidFill>
@@ -2923,14 +3767,14 @@
       </p:sp>
       <p:sp>
         <p:nvSpPr>
-          <p:cNvPr id="6" name="Text 4"/>
-          <p:cNvSpPr/>
-          <p:nvPr/>
-        </p:nvSpPr>
-        <p:spPr>
-          <a:xfrm>
-            <a:off x="512064" y="1197864"/>
-            <a:ext cx="3813048" cy="310896"/>
+          <p:cNvPr id="9" name="Text 7"/>
+          <p:cNvSpPr/>
+          <p:nvPr/>
+        </p:nvSpPr>
+        <p:spPr>
+          <a:xfrm>
+            <a:off x="4864608" y="1298448"/>
+            <a:ext cx="3712464" cy="411480"/>
           </a:xfrm>
           <a:prstGeom prst="rect">
             <a:avLst/>
@@ -2948,7 +3792,7 @@
               <a:buNone/>
             </a:pPr>
             <a:r>
-              <a:rPr lang="en-US" sz="1500" b="1" dirty="0">
+              <a:rPr lang="en-US" sz="2000" b="1" dirty="0">
                 <a:solidFill>
                   <a:srgbClr val="1E2761"/>
                 </a:solidFill>
@@ -2956,40 +3800,41 @@
                 <a:ea typeface="Calibri" pitchFamily="34" charset="-122"/>
                 <a:cs typeface="Calibri" pitchFamily="34" charset="-120"/>
               </a:rPr>
-              <a:t>Project connection</a:t>
-            </a:r>
-            <a:endParaRPr lang="en-US" sz="1500" dirty="0"/>
-          </a:p>
-        </p:txBody>
-      </p:sp>
-      <p:sp>
-        <p:nvSpPr>
-          <p:cNvPr id="7" name="Text 5"/>
-          <p:cNvSpPr/>
-          <p:nvPr/>
-        </p:nvSpPr>
-        <p:spPr>
-          <a:xfrm>
-            <a:off x="512064" y="1581912"/>
-            <a:ext cx="3813048" cy="1033272"/>
-          </a:xfrm>
-          <a:prstGeom prst="rect">
-            <a:avLst/>
-          </a:prstGeom>
-          <a:noFill/>
-          <a:ln/>
-        </p:spPr>
-        <p:txBody>
-          <a:bodyPr wrap="square" lIns="0" tIns="0" rIns="0" bIns="0" rtlCol="0" anchor="t">
+              <a:t>Local MAF path</a:t>
+            </a:r>
+            <a:endParaRPr lang="en-US" sz="2000" dirty="0"/>
+          </a:p>
+        </p:txBody>
+      </p:sp>
+      <p:sp>
+        <p:nvSpPr>
+          <p:cNvPr id="10" name="Text 8"/>
+          <p:cNvSpPr/>
+          <p:nvPr/>
+        </p:nvSpPr>
+        <p:spPr>
+          <a:xfrm>
+            <a:off x="4892040" y="1828800"/>
+            <a:ext cx="3639312" cy="2395728"/>
+          </a:xfrm>
+          <a:prstGeom prst="rect">
+            <a:avLst/>
+          </a:prstGeom>
+          <a:noFill/>
+          <a:ln/>
+        </p:spPr>
+        <p:txBody>
+          <a:bodyPr wrap="square" lIns="381" tIns="381" rIns="381" bIns="381" rtlCol="0" anchor="ctr">
             <a:normAutofit/>
           </a:bodyPr>
           <a:lstStyle/>
           <a:p>
-            <a:pPr indent="0" marL="0">
-              <a:buNone/>
-            </a:pPr>
-            <a:r>
-              <a:rPr lang="en-US" sz="1150" dirty="0">
+            <a:pPr marL="342900" indent="-342900">
+              <a:buSzPct val="100000"/>
+              <a:buChar char="•"/>
+            </a:pPr>
+            <a:r>
+              <a:rPr lang="en-US" sz="1300" dirty="0">
                 <a:solidFill>
                   <a:srgbClr val="212121"/>
                 </a:solidFill>
@@ -2997,108 +3842,35 @@
                 <a:ea typeface="Calibri" pitchFamily="34" charset="-122"/>
                 <a:cs typeface="Calibri" pitchFamily="34" charset="-120"/>
               </a:rPr>
-              <a:t>Stores authentication details instead of app code</a:t>
-            </a:r>
-            <a:endParaRPr lang="en-US" sz="1150" dirty="0"/>
-          </a:p>
-        </p:txBody>
-      </p:sp>
-      <p:sp>
-        <p:nvSpPr>
-          <p:cNvPr id="8" name="Shape 6"/>
-          <p:cNvSpPr/>
-          <p:nvPr/>
-        </p:nvSpPr>
-        <p:spPr>
-          <a:xfrm>
-            <a:off x="4672584" y="1078992"/>
-            <a:ext cx="4105656" cy="1655064"/>
-          </a:xfrm>
-          <a:prstGeom prst="roundRect">
-            <a:avLst>
-              <a:gd name="adj" fmla="val 3315"/>
-            </a:avLst>
-          </a:prstGeom>
-          <a:solidFill>
-            <a:srgbClr val="F3F4F6"/>
-          </a:solidFill>
-          <a:ln w="10160">
-            <a:solidFill>
-              <a:srgbClr val="D1D5DB"/>
-            </a:solidFill>
-            <a:prstDash val="solid"/>
-          </a:ln>
-        </p:spPr>
-      </p:sp>
-      <p:sp>
-        <p:nvSpPr>
-          <p:cNvPr id="9" name="Text 7"/>
-          <p:cNvSpPr/>
-          <p:nvPr/>
-        </p:nvSpPr>
-        <p:spPr>
-          <a:xfrm>
-            <a:off x="4818888" y="1197864"/>
-            <a:ext cx="3813048" cy="310896"/>
-          </a:xfrm>
-          <a:prstGeom prst="rect">
-            <a:avLst/>
-          </a:prstGeom>
-          <a:noFill/>
-          <a:ln/>
-        </p:spPr>
-        <p:txBody>
-          <a:bodyPr wrap="square" lIns="0" tIns="0" rIns="0" bIns="0" rtlCol="0" anchor="ctr">
-            <a:normAutofit/>
-          </a:bodyPr>
-          <a:lstStyle/>
-          <a:p>
-            <a:pPr indent="0" marL="0">
-              <a:buNone/>
-            </a:pPr>
-            <a:r>
-              <a:rPr lang="en-US" sz="1500" b="1" dirty="0">
-                <a:solidFill>
-                  <a:srgbClr val="1E2761"/>
+              <a:t>Consume an existing Toolbox MCP endpoint</a:t>
+            </a:r>
+            <a:endParaRPr lang="en-US" sz="1300" dirty="0"/>
+          </a:p>
+          <a:p>
+            <a:pPr marL="342900" indent="-342900">
+              <a:buSzPct val="100000"/>
+              <a:buChar char="•"/>
+            </a:pPr>
+            <a:r>
+              <a:rPr lang="en-US" sz="1300" dirty="0">
+                <a:solidFill>
+                  <a:srgbClr val="212121"/>
                 </a:solidFill>
                 <a:latin typeface="Calibri" pitchFamily="34" charset="0"/>
                 <a:ea typeface="Calibri" pitchFamily="34" charset="-122"/>
                 <a:cs typeface="Calibri" pitchFamily="34" charset="-120"/>
               </a:rPr>
-              <a:t>Consent</a:t>
-            </a:r>
-            <a:endParaRPr lang="en-US" sz="1500" dirty="0"/>
-          </a:p>
-        </p:txBody>
-      </p:sp>
-      <p:sp>
-        <p:nvSpPr>
-          <p:cNvPr id="10" name="Text 8"/>
-          <p:cNvSpPr/>
-          <p:nvPr/>
-        </p:nvSpPr>
-        <p:spPr>
-          <a:xfrm>
-            <a:off x="4818888" y="1581912"/>
-            <a:ext cx="3813048" cy="1033272"/>
-          </a:xfrm>
-          <a:prstGeom prst="rect">
-            <a:avLst/>
-          </a:prstGeom>
-          <a:noFill/>
-          <a:ln/>
-        </p:spPr>
-        <p:txBody>
-          <a:bodyPr wrap="square" lIns="0" tIns="0" rIns="0" bIns="0" rtlCol="0" anchor="t">
-            <a:normAutofit/>
-          </a:bodyPr>
-          <a:lstStyle/>
-          <a:p>
-            <a:pPr indent="0" marL="0">
-              <a:buNone/>
-            </a:pPr>
-            <a:r>
-              <a:rPr lang="en-US" sz="1150" dirty="0">
+              <a:t>Authenticate to the Toolbox with supported Entra auth</a:t>
+            </a:r>
+            <a:endParaRPr lang="en-US" sz="1300" dirty="0"/>
+          </a:p>
+          <a:p>
+            <a:pPr marL="342900" indent="-342900">
+              <a:buSzPct val="100000"/>
+              <a:buChar char="•"/>
+            </a:pPr>
+            <a:r>
+              <a:rPr lang="en-US" sz="1300" dirty="0">
                 <a:solidFill>
                   <a:srgbClr val="212121"/>
                 </a:solidFill>
@@ -3106,233 +3878,15 @@
                 <a:ea typeface="Calibri" pitchFamily="34" charset="-122"/>
                 <a:cs typeface="Calibri" pitchFamily="34" charset="-120"/>
               </a:rPr>
-              <a:t>First OAuth-backed toolbox call can return CONSENT_REQUIRED</a:t>
-            </a:r>
-            <a:endParaRPr lang="en-US" sz="1150" dirty="0"/>
+              <a:t>Treat upstream MCP credentials as Toolbox-managed</a:t>
+            </a:r>
+            <a:endParaRPr lang="en-US" sz="1300" dirty="0"/>
           </a:p>
         </p:txBody>
       </p:sp>
       <p:sp>
         <p:nvSpPr>
           <p:cNvPr id="11" name="Shape 9"/>
-          <p:cNvSpPr/>
-          <p:nvPr/>
-        </p:nvSpPr>
-        <p:spPr>
-          <a:xfrm>
-            <a:off x="365760" y="2935224"/>
-            <a:ext cx="4105656" cy="1655064"/>
-          </a:xfrm>
-          <a:prstGeom prst="roundRect">
-            <a:avLst>
-              <a:gd name="adj" fmla="val 3315"/>
-            </a:avLst>
-          </a:prstGeom>
-          <a:solidFill>
-            <a:srgbClr val="F3F4F6"/>
-          </a:solidFill>
-          <a:ln w="10160">
-            <a:solidFill>
-              <a:srgbClr val="D1D5DB"/>
-            </a:solidFill>
-            <a:prstDash val="solid"/>
-          </a:ln>
-        </p:spPr>
-      </p:sp>
-      <p:sp>
-        <p:nvSpPr>
-          <p:cNvPr id="12" name="Text 10"/>
-          <p:cNvSpPr/>
-          <p:nvPr/>
-        </p:nvSpPr>
-        <p:spPr>
-          <a:xfrm>
-            <a:off x="512064" y="3054096"/>
-            <a:ext cx="3813048" cy="310896"/>
-          </a:xfrm>
-          <a:prstGeom prst="rect">
-            <a:avLst/>
-          </a:prstGeom>
-          <a:noFill/>
-          <a:ln/>
-        </p:spPr>
-        <p:txBody>
-          <a:bodyPr wrap="square" lIns="0" tIns="0" rIns="0" bIns="0" rtlCol="0" anchor="ctr">
-            <a:normAutofit/>
-          </a:bodyPr>
-          <a:lstStyle/>
-          <a:p>
-            <a:pPr indent="0" marL="0">
-              <a:buNone/>
-            </a:pPr>
-            <a:r>
-              <a:rPr lang="en-US" sz="1500" b="1" dirty="0">
-                <a:solidFill>
-                  <a:srgbClr val="1E2761"/>
-                </a:solidFill>
-                <a:latin typeface="Calibri" pitchFamily="34" charset="0"/>
-                <a:ea typeface="Calibri" pitchFamily="34" charset="-122"/>
-                <a:cs typeface="Calibri" pitchFamily="34" charset="-120"/>
-              </a:rPr>
-              <a:t>Retry</a:t>
-            </a:r>
-            <a:endParaRPr lang="en-US" sz="1500" dirty="0"/>
-          </a:p>
-        </p:txBody>
-      </p:sp>
-      <p:sp>
-        <p:nvSpPr>
-          <p:cNvPr id="13" name="Text 11"/>
-          <p:cNvSpPr/>
-          <p:nvPr/>
-        </p:nvSpPr>
-        <p:spPr>
-          <a:xfrm>
-            <a:off x="512064" y="3438144"/>
-            <a:ext cx="3813048" cy="1033272"/>
-          </a:xfrm>
-          <a:prstGeom prst="rect">
-            <a:avLst/>
-          </a:prstGeom>
-          <a:noFill/>
-          <a:ln/>
-        </p:spPr>
-        <p:txBody>
-          <a:bodyPr wrap="square" lIns="0" tIns="0" rIns="0" bIns="0" rtlCol="0" anchor="t">
-            <a:normAutofit/>
-          </a:bodyPr>
-          <a:lstStyle/>
-          <a:p>
-            <a:pPr indent="0" marL="0">
-              <a:buNone/>
-            </a:pPr>
-            <a:r>
-              <a:rPr lang="en-US" sz="1150" dirty="0">
-                <a:solidFill>
-                  <a:srgbClr val="212121"/>
-                </a:solidFill>
-                <a:latin typeface="Calibri" pitchFamily="34" charset="0"/>
-                <a:ea typeface="Calibri" pitchFamily="34" charset="-122"/>
-                <a:cs typeface="Calibri" pitchFamily="34" charset="-120"/>
-              </a:rPr>
-              <a:t>Complete the consent URL, then retry the call</a:t>
-            </a:r>
-            <a:endParaRPr lang="en-US" sz="1150" dirty="0"/>
-          </a:p>
-        </p:txBody>
-      </p:sp>
-      <p:sp>
-        <p:nvSpPr>
-          <p:cNvPr id="14" name="Shape 12"/>
-          <p:cNvSpPr/>
-          <p:nvPr/>
-        </p:nvSpPr>
-        <p:spPr>
-          <a:xfrm>
-            <a:off x="4672584" y="2935224"/>
-            <a:ext cx="4105656" cy="1655064"/>
-          </a:xfrm>
-          <a:prstGeom prst="roundRect">
-            <a:avLst>
-              <a:gd name="adj" fmla="val 3315"/>
-            </a:avLst>
-          </a:prstGeom>
-          <a:solidFill>
-            <a:srgbClr val="F3F4F6"/>
-          </a:solidFill>
-          <a:ln w="10160">
-            <a:solidFill>
-              <a:srgbClr val="D1D5DB"/>
-            </a:solidFill>
-            <a:prstDash val="solid"/>
-          </a:ln>
-        </p:spPr>
-      </p:sp>
-      <p:sp>
-        <p:nvSpPr>
-          <p:cNvPr id="15" name="Text 13"/>
-          <p:cNvSpPr/>
-          <p:nvPr/>
-        </p:nvSpPr>
-        <p:spPr>
-          <a:xfrm>
-            <a:off x="4818888" y="3054096"/>
-            <a:ext cx="3813048" cy="310896"/>
-          </a:xfrm>
-          <a:prstGeom prst="rect">
-            <a:avLst/>
-          </a:prstGeom>
-          <a:noFill/>
-          <a:ln/>
-        </p:spPr>
-        <p:txBody>
-          <a:bodyPr wrap="square" lIns="0" tIns="0" rIns="0" bIns="0" rtlCol="0" anchor="ctr">
-            <a:normAutofit/>
-          </a:bodyPr>
-          <a:lstStyle/>
-          <a:p>
-            <a:pPr indent="0" marL="0">
-              <a:buNone/>
-            </a:pPr>
-            <a:r>
-              <a:rPr lang="en-US" sz="1500" b="1" dirty="0">
-                <a:solidFill>
-                  <a:srgbClr val="1E2761"/>
-                </a:solidFill>
-                <a:latin typeface="Calibri" pitchFamily="34" charset="0"/>
-                <a:ea typeface="Calibri" pitchFamily="34" charset="-122"/>
-                <a:cs typeface="Calibri" pitchFamily="34" charset="-120"/>
-              </a:rPr>
-              <a:t>Boundary</a:t>
-            </a:r>
-            <a:endParaRPr lang="en-US" sz="1500" dirty="0"/>
-          </a:p>
-        </p:txBody>
-      </p:sp>
-      <p:sp>
-        <p:nvSpPr>
-          <p:cNvPr id="16" name="Text 14"/>
-          <p:cNvSpPr/>
-          <p:nvPr/>
-        </p:nvSpPr>
-        <p:spPr>
-          <a:xfrm>
-            <a:off x="4818888" y="3438144"/>
-            <a:ext cx="3813048" cy="1033272"/>
-          </a:xfrm>
-          <a:prstGeom prst="rect">
-            <a:avLst/>
-          </a:prstGeom>
-          <a:noFill/>
-          <a:ln/>
-        </p:spPr>
-        <p:txBody>
-          <a:bodyPr wrap="square" lIns="0" tIns="0" rIns="0" bIns="0" rtlCol="0" anchor="t">
-            <a:normAutofit/>
-          </a:bodyPr>
-          <a:lstStyle/>
-          <a:p>
-            <a:pPr indent="0" marL="0">
-              <a:buNone/>
-            </a:pPr>
-            <a:r>
-              <a:rPr lang="en-US" sz="1150" dirty="0">
-                <a:solidFill>
-                  <a:srgbClr val="212121"/>
-                </a:solidFill>
-                <a:latin typeface="Calibri" pitchFamily="34" charset="0"/>
-                <a:ea typeface="Calibri" pitchFamily="34" charset="-122"/>
-                <a:cs typeface="Calibri" pitchFamily="34" charset="-120"/>
-              </a:rPr>
-              <a:t>Do not claim an undocumented direct local MAF-to-ADO OAuth recipe</a:t>
-            </a:r>
-            <a:endParaRPr lang="en-US" sz="1150" dirty="0"/>
-          </a:p>
-        </p:txBody>
-      </p:sp>
-      <p:sp>
-        <p:nvSpPr>
-          <p:cNvPr id="17" name="Shape 15"/>
           <p:cNvSpPr/>
           <p:nvPr/>
         </p:nvSpPr>
@@ -3355,7 +3909,7 @@
       </p:sp>
       <p:sp>
         <p:nvSpPr>
-          <p:cNvPr id="18" name="Text 16"/>
+          <p:cNvPr id="12" name="Text 10"/>
           <p:cNvSpPr/>
           <p:nvPr/>
         </p:nvSpPr>
@@ -3388,7 +3942,7 @@
                 <a:ea typeface="Calibri" pitchFamily="34" charset="-122"/>
                 <a:cs typeface="Calibri" pitchFamily="34" charset="-120"/>
               </a:rPr>
-              <a:t>Source: https://learn.microsoft.com/en-us/azure/foundry/agents/how-to/tools/model-context-protocol</a:t>
+              <a:t>Source: https://learn.microsoft.com/en-us/azure/foundry/agents/how-to/tools/model-context-protocol  ·  +1 in notes</a:t>
             </a:r>
             <a:endParaRPr lang="en-US" sz="820" dirty="0"/>
           </a:p>
@@ -3522,6 +4076,640 @@
                 <a:ea typeface="Calibri" pitchFamily="34" charset="-122"/>
                 <a:cs typeface="Calibri" pitchFamily="34" charset="-120"/>
               </a:rPr>
+              <a:t>OAuth consent belongs to the connection path</a:t>
+            </a:r>
+            <a:endParaRPr lang="en-US" sz="2500" dirty="0"/>
+          </a:p>
+        </p:txBody>
+      </p:sp>
+      <p:sp>
+        <p:nvSpPr>
+          <p:cNvPr id="5" name="Shape 3"/>
+          <p:cNvSpPr/>
+          <p:nvPr/>
+        </p:nvSpPr>
+        <p:spPr>
+          <a:xfrm>
+            <a:off x="365760" y="1078992"/>
+            <a:ext cx="4105656" cy="1655064"/>
+          </a:xfrm>
+          <a:prstGeom prst="roundRect">
+            <a:avLst>
+              <a:gd name="adj" fmla="val 3315"/>
+            </a:avLst>
+          </a:prstGeom>
+          <a:solidFill>
+            <a:srgbClr val="CADCFC"/>
+          </a:solidFill>
+          <a:ln w="10160">
+            <a:solidFill>
+              <a:srgbClr val="1E2761"/>
+            </a:solidFill>
+            <a:prstDash val="solid"/>
+          </a:ln>
+        </p:spPr>
+      </p:sp>
+      <p:sp>
+        <p:nvSpPr>
+          <p:cNvPr id="6" name="Text 4"/>
+          <p:cNvSpPr/>
+          <p:nvPr/>
+        </p:nvSpPr>
+        <p:spPr>
+          <a:xfrm>
+            <a:off x="512064" y="1197864"/>
+            <a:ext cx="3813048" cy="310896"/>
+          </a:xfrm>
+          <a:prstGeom prst="rect">
+            <a:avLst/>
+          </a:prstGeom>
+          <a:noFill/>
+          <a:ln/>
+        </p:spPr>
+        <p:txBody>
+          <a:bodyPr wrap="square" lIns="0" tIns="0" rIns="0" bIns="0" rtlCol="0" anchor="ctr">
+            <a:normAutofit/>
+          </a:bodyPr>
+          <a:lstStyle/>
+          <a:p>
+            <a:pPr indent="0" marL="0">
+              <a:buNone/>
+            </a:pPr>
+            <a:r>
+              <a:rPr lang="en-US" sz="1500" b="1" dirty="0">
+                <a:solidFill>
+                  <a:srgbClr val="1E2761"/>
+                </a:solidFill>
+                <a:latin typeface="Calibri" pitchFamily="34" charset="0"/>
+                <a:ea typeface="Calibri" pitchFamily="34" charset="-122"/>
+                <a:cs typeface="Calibri" pitchFamily="34" charset="-120"/>
+              </a:rPr>
+              <a:t>Project connection</a:t>
+            </a:r>
+            <a:endParaRPr lang="en-US" sz="1500" dirty="0"/>
+          </a:p>
+        </p:txBody>
+      </p:sp>
+      <p:sp>
+        <p:nvSpPr>
+          <p:cNvPr id="7" name="Text 5"/>
+          <p:cNvSpPr/>
+          <p:nvPr/>
+        </p:nvSpPr>
+        <p:spPr>
+          <a:xfrm>
+            <a:off x="512064" y="1581912"/>
+            <a:ext cx="3813048" cy="1033272"/>
+          </a:xfrm>
+          <a:prstGeom prst="rect">
+            <a:avLst/>
+          </a:prstGeom>
+          <a:noFill/>
+          <a:ln/>
+        </p:spPr>
+        <p:txBody>
+          <a:bodyPr wrap="square" lIns="0" tIns="0" rIns="0" bIns="0" rtlCol="0" anchor="t">
+            <a:normAutofit/>
+          </a:bodyPr>
+          <a:lstStyle/>
+          <a:p>
+            <a:pPr indent="0" marL="0">
+              <a:buNone/>
+            </a:pPr>
+            <a:r>
+              <a:rPr lang="en-US" sz="1150" dirty="0">
+                <a:solidFill>
+                  <a:srgbClr val="212121"/>
+                </a:solidFill>
+                <a:latin typeface="Calibri" pitchFamily="34" charset="0"/>
+                <a:ea typeface="Calibri" pitchFamily="34" charset="-122"/>
+                <a:cs typeface="Calibri" pitchFamily="34" charset="-120"/>
+              </a:rPr>
+              <a:t>Stores authentication details instead of app code</a:t>
+            </a:r>
+            <a:endParaRPr lang="en-US" sz="1150" dirty="0"/>
+          </a:p>
+        </p:txBody>
+      </p:sp>
+      <p:sp>
+        <p:nvSpPr>
+          <p:cNvPr id="8" name="Shape 6"/>
+          <p:cNvSpPr/>
+          <p:nvPr/>
+        </p:nvSpPr>
+        <p:spPr>
+          <a:xfrm>
+            <a:off x="4672584" y="1078992"/>
+            <a:ext cx="4105656" cy="1655064"/>
+          </a:xfrm>
+          <a:prstGeom prst="roundRect">
+            <a:avLst>
+              <a:gd name="adj" fmla="val 3315"/>
+            </a:avLst>
+          </a:prstGeom>
+          <a:solidFill>
+            <a:srgbClr val="F3F4F6"/>
+          </a:solidFill>
+          <a:ln w="10160">
+            <a:solidFill>
+              <a:srgbClr val="D1D5DB"/>
+            </a:solidFill>
+            <a:prstDash val="solid"/>
+          </a:ln>
+        </p:spPr>
+      </p:sp>
+      <p:sp>
+        <p:nvSpPr>
+          <p:cNvPr id="9" name="Text 7"/>
+          <p:cNvSpPr/>
+          <p:nvPr/>
+        </p:nvSpPr>
+        <p:spPr>
+          <a:xfrm>
+            <a:off x="4818888" y="1197864"/>
+            <a:ext cx="3813048" cy="310896"/>
+          </a:xfrm>
+          <a:prstGeom prst="rect">
+            <a:avLst/>
+          </a:prstGeom>
+          <a:noFill/>
+          <a:ln/>
+        </p:spPr>
+        <p:txBody>
+          <a:bodyPr wrap="square" lIns="0" tIns="0" rIns="0" bIns="0" rtlCol="0" anchor="ctr">
+            <a:normAutofit/>
+          </a:bodyPr>
+          <a:lstStyle/>
+          <a:p>
+            <a:pPr indent="0" marL="0">
+              <a:buNone/>
+            </a:pPr>
+            <a:r>
+              <a:rPr lang="en-US" sz="1500" b="1" dirty="0">
+                <a:solidFill>
+                  <a:srgbClr val="1E2761"/>
+                </a:solidFill>
+                <a:latin typeface="Calibri" pitchFamily="34" charset="0"/>
+                <a:ea typeface="Calibri" pitchFamily="34" charset="-122"/>
+                <a:cs typeface="Calibri" pitchFamily="34" charset="-120"/>
+              </a:rPr>
+              <a:t>Consent</a:t>
+            </a:r>
+            <a:endParaRPr lang="en-US" sz="1500" dirty="0"/>
+          </a:p>
+        </p:txBody>
+      </p:sp>
+      <p:sp>
+        <p:nvSpPr>
+          <p:cNvPr id="10" name="Text 8"/>
+          <p:cNvSpPr/>
+          <p:nvPr/>
+        </p:nvSpPr>
+        <p:spPr>
+          <a:xfrm>
+            <a:off x="4818888" y="1581912"/>
+            <a:ext cx="3813048" cy="1033272"/>
+          </a:xfrm>
+          <a:prstGeom prst="rect">
+            <a:avLst/>
+          </a:prstGeom>
+          <a:noFill/>
+          <a:ln/>
+        </p:spPr>
+        <p:txBody>
+          <a:bodyPr wrap="square" lIns="0" tIns="0" rIns="0" bIns="0" rtlCol="0" anchor="t">
+            <a:normAutofit/>
+          </a:bodyPr>
+          <a:lstStyle/>
+          <a:p>
+            <a:pPr indent="0" marL="0">
+              <a:buNone/>
+            </a:pPr>
+            <a:r>
+              <a:rPr lang="en-US" sz="1150" dirty="0">
+                <a:solidFill>
+                  <a:srgbClr val="212121"/>
+                </a:solidFill>
+                <a:latin typeface="Calibri" pitchFamily="34" charset="0"/>
+                <a:ea typeface="Calibri" pitchFamily="34" charset="-122"/>
+                <a:cs typeface="Calibri" pitchFamily="34" charset="-120"/>
+              </a:rPr>
+              <a:t>First OAuth-backed toolbox call can return CONSENT_REQUIRED</a:t>
+            </a:r>
+            <a:endParaRPr lang="en-US" sz="1150" dirty="0"/>
+          </a:p>
+        </p:txBody>
+      </p:sp>
+      <p:sp>
+        <p:nvSpPr>
+          <p:cNvPr id="11" name="Shape 9"/>
+          <p:cNvSpPr/>
+          <p:nvPr/>
+        </p:nvSpPr>
+        <p:spPr>
+          <a:xfrm>
+            <a:off x="365760" y="2935224"/>
+            <a:ext cx="4105656" cy="1655064"/>
+          </a:xfrm>
+          <a:prstGeom prst="roundRect">
+            <a:avLst>
+              <a:gd name="adj" fmla="val 3315"/>
+            </a:avLst>
+          </a:prstGeom>
+          <a:solidFill>
+            <a:srgbClr val="F3F4F6"/>
+          </a:solidFill>
+          <a:ln w="10160">
+            <a:solidFill>
+              <a:srgbClr val="D1D5DB"/>
+            </a:solidFill>
+            <a:prstDash val="solid"/>
+          </a:ln>
+        </p:spPr>
+      </p:sp>
+      <p:sp>
+        <p:nvSpPr>
+          <p:cNvPr id="12" name="Text 10"/>
+          <p:cNvSpPr/>
+          <p:nvPr/>
+        </p:nvSpPr>
+        <p:spPr>
+          <a:xfrm>
+            <a:off x="512064" y="3054096"/>
+            <a:ext cx="3813048" cy="310896"/>
+          </a:xfrm>
+          <a:prstGeom prst="rect">
+            <a:avLst/>
+          </a:prstGeom>
+          <a:noFill/>
+          <a:ln/>
+        </p:spPr>
+        <p:txBody>
+          <a:bodyPr wrap="square" lIns="0" tIns="0" rIns="0" bIns="0" rtlCol="0" anchor="ctr">
+            <a:normAutofit/>
+          </a:bodyPr>
+          <a:lstStyle/>
+          <a:p>
+            <a:pPr indent="0" marL="0">
+              <a:buNone/>
+            </a:pPr>
+            <a:r>
+              <a:rPr lang="en-US" sz="1500" b="1" dirty="0">
+                <a:solidFill>
+                  <a:srgbClr val="1E2761"/>
+                </a:solidFill>
+                <a:latin typeface="Calibri" pitchFamily="34" charset="0"/>
+                <a:ea typeface="Calibri" pitchFamily="34" charset="-122"/>
+                <a:cs typeface="Calibri" pitchFamily="34" charset="-120"/>
+              </a:rPr>
+              <a:t>Retry</a:t>
+            </a:r>
+            <a:endParaRPr lang="en-US" sz="1500" dirty="0"/>
+          </a:p>
+        </p:txBody>
+      </p:sp>
+      <p:sp>
+        <p:nvSpPr>
+          <p:cNvPr id="13" name="Text 11"/>
+          <p:cNvSpPr/>
+          <p:nvPr/>
+        </p:nvSpPr>
+        <p:spPr>
+          <a:xfrm>
+            <a:off x="512064" y="3438144"/>
+            <a:ext cx="3813048" cy="1033272"/>
+          </a:xfrm>
+          <a:prstGeom prst="rect">
+            <a:avLst/>
+          </a:prstGeom>
+          <a:noFill/>
+          <a:ln/>
+        </p:spPr>
+        <p:txBody>
+          <a:bodyPr wrap="square" lIns="0" tIns="0" rIns="0" bIns="0" rtlCol="0" anchor="t">
+            <a:normAutofit/>
+          </a:bodyPr>
+          <a:lstStyle/>
+          <a:p>
+            <a:pPr indent="0" marL="0">
+              <a:buNone/>
+            </a:pPr>
+            <a:r>
+              <a:rPr lang="en-US" sz="1150" dirty="0">
+                <a:solidFill>
+                  <a:srgbClr val="212121"/>
+                </a:solidFill>
+                <a:latin typeface="Calibri" pitchFamily="34" charset="0"/>
+                <a:ea typeface="Calibri" pitchFamily="34" charset="-122"/>
+                <a:cs typeface="Calibri" pitchFamily="34" charset="-120"/>
+              </a:rPr>
+              <a:t>Complete the consent URL, then retry the call</a:t>
+            </a:r>
+            <a:endParaRPr lang="en-US" sz="1150" dirty="0"/>
+          </a:p>
+        </p:txBody>
+      </p:sp>
+      <p:sp>
+        <p:nvSpPr>
+          <p:cNvPr id="14" name="Shape 12"/>
+          <p:cNvSpPr/>
+          <p:nvPr/>
+        </p:nvSpPr>
+        <p:spPr>
+          <a:xfrm>
+            <a:off x="4672584" y="2935224"/>
+            <a:ext cx="4105656" cy="1655064"/>
+          </a:xfrm>
+          <a:prstGeom prst="roundRect">
+            <a:avLst>
+              <a:gd name="adj" fmla="val 3315"/>
+            </a:avLst>
+          </a:prstGeom>
+          <a:solidFill>
+            <a:srgbClr val="F3F4F6"/>
+          </a:solidFill>
+          <a:ln w="10160">
+            <a:solidFill>
+              <a:srgbClr val="D1D5DB"/>
+            </a:solidFill>
+            <a:prstDash val="solid"/>
+          </a:ln>
+        </p:spPr>
+      </p:sp>
+      <p:sp>
+        <p:nvSpPr>
+          <p:cNvPr id="15" name="Text 13"/>
+          <p:cNvSpPr/>
+          <p:nvPr/>
+        </p:nvSpPr>
+        <p:spPr>
+          <a:xfrm>
+            <a:off x="4818888" y="3054096"/>
+            <a:ext cx="3813048" cy="310896"/>
+          </a:xfrm>
+          <a:prstGeom prst="rect">
+            <a:avLst/>
+          </a:prstGeom>
+          <a:noFill/>
+          <a:ln/>
+        </p:spPr>
+        <p:txBody>
+          <a:bodyPr wrap="square" lIns="0" tIns="0" rIns="0" bIns="0" rtlCol="0" anchor="ctr">
+            <a:normAutofit/>
+          </a:bodyPr>
+          <a:lstStyle/>
+          <a:p>
+            <a:pPr indent="0" marL="0">
+              <a:buNone/>
+            </a:pPr>
+            <a:r>
+              <a:rPr lang="en-US" sz="1500" b="1" dirty="0">
+                <a:solidFill>
+                  <a:srgbClr val="1E2761"/>
+                </a:solidFill>
+                <a:latin typeface="Calibri" pitchFamily="34" charset="0"/>
+                <a:ea typeface="Calibri" pitchFamily="34" charset="-122"/>
+                <a:cs typeface="Calibri" pitchFamily="34" charset="-120"/>
+              </a:rPr>
+              <a:t>Boundary</a:t>
+            </a:r>
+            <a:endParaRPr lang="en-US" sz="1500" dirty="0"/>
+          </a:p>
+        </p:txBody>
+      </p:sp>
+      <p:sp>
+        <p:nvSpPr>
+          <p:cNvPr id="16" name="Text 14"/>
+          <p:cNvSpPr/>
+          <p:nvPr/>
+        </p:nvSpPr>
+        <p:spPr>
+          <a:xfrm>
+            <a:off x="4818888" y="3438144"/>
+            <a:ext cx="3813048" cy="1033272"/>
+          </a:xfrm>
+          <a:prstGeom prst="rect">
+            <a:avLst/>
+          </a:prstGeom>
+          <a:noFill/>
+          <a:ln/>
+        </p:spPr>
+        <p:txBody>
+          <a:bodyPr wrap="square" lIns="0" tIns="0" rIns="0" bIns="0" rtlCol="0" anchor="t">
+            <a:normAutofit/>
+          </a:bodyPr>
+          <a:lstStyle/>
+          <a:p>
+            <a:pPr indent="0" marL="0">
+              <a:buNone/>
+            </a:pPr>
+            <a:r>
+              <a:rPr lang="en-US" sz="1150" dirty="0">
+                <a:solidFill>
+                  <a:srgbClr val="212121"/>
+                </a:solidFill>
+                <a:latin typeface="Calibri" pitchFamily="34" charset="0"/>
+                <a:ea typeface="Calibri" pitchFamily="34" charset="-122"/>
+                <a:cs typeface="Calibri" pitchFamily="34" charset="-120"/>
+              </a:rPr>
+              <a:t>Do not claim an undocumented direct local MAF-to-ADO OAuth recipe</a:t>
+            </a:r>
+            <a:endParaRPr lang="en-US" sz="1150" dirty="0"/>
+          </a:p>
+        </p:txBody>
+      </p:sp>
+      <p:sp>
+        <p:nvSpPr>
+          <p:cNvPr id="17" name="Shape 15"/>
+          <p:cNvSpPr/>
+          <p:nvPr/>
+        </p:nvSpPr>
+        <p:spPr>
+          <a:xfrm>
+            <a:off x="365760" y="4773168"/>
+            <a:ext cx="8412480" cy="0"/>
+          </a:xfrm>
+          <a:prstGeom prst="line">
+            <a:avLst/>
+          </a:prstGeom>
+          <a:noFill/>
+          <a:ln w="6350">
+            <a:solidFill>
+              <a:srgbClr val="D1D5DB"/>
+            </a:solidFill>
+            <a:prstDash val="solid"/>
+          </a:ln>
+        </p:spPr>
+      </p:sp>
+      <p:sp>
+        <p:nvSpPr>
+          <p:cNvPr id="18" name="Text 16"/>
+          <p:cNvSpPr/>
+          <p:nvPr/>
+        </p:nvSpPr>
+        <p:spPr>
+          <a:xfrm>
+            <a:off x="384048" y="4818888"/>
+            <a:ext cx="8275320" cy="182880"/>
+          </a:xfrm>
+          <a:prstGeom prst="rect">
+            <a:avLst/>
+          </a:prstGeom>
+          <a:noFill/>
+          <a:ln/>
+        </p:spPr>
+        <p:txBody>
+          <a:bodyPr wrap="square" lIns="0" tIns="0" rIns="0" bIns="0" rtlCol="0" anchor="ctr">
+            <a:normAutofit/>
+          </a:bodyPr>
+          <a:lstStyle/>
+          <a:p>
+            <a:pPr indent="0" marL="0">
+              <a:buNone/>
+            </a:pPr>
+            <a:r>
+              <a:rPr lang="en-US" sz="820" dirty="0">
+                <a:solidFill>
+                  <a:srgbClr val="6B7280"/>
+                </a:solidFill>
+                <a:latin typeface="Calibri" pitchFamily="34" charset="0"/>
+                <a:ea typeface="Calibri" pitchFamily="34" charset="-122"/>
+                <a:cs typeface="Calibri" pitchFamily="34" charset="-120"/>
+              </a:rPr>
+              <a:t>Source: https://learn.microsoft.com/en-us/azure/foundry/agents/how-to/tools/model-context-protocol</a:t>
+            </a:r>
+            <a:endParaRPr lang="en-US" sz="820" dirty="0"/>
+          </a:p>
+        </p:txBody>
+      </p:sp>
+    </p:spTree>
+  </p:cSld>
+  <p:clrMapOvr>
+    <a:masterClrMapping/>
+  </p:clrMapOvr>
+</p:sld>
+</file>
+
+<file path=ppt/slides/slide13.xml><?xml version="1.0" encoding="utf-8"?>
+<p:sld xmlns:a="http://schemas.openxmlformats.org/drawingml/2006/main" xmlns:r="http://schemas.openxmlformats.org/officeDocument/2006/relationships" xmlns:p="http://schemas.openxmlformats.org/presentationml/2006/main">
+  <p:cSld name="Slide 13">
+    <p:bg>
+      <p:bgPr>
+        <a:solidFill>
+          <a:srgbClr val="FFFFFF"/>
+        </a:solidFill>
+      </p:bgPr>
+    </p:bg>
+    <p:spTree>
+      <p:nvGrpSpPr>
+        <p:cNvPr id="1" name=""/>
+        <p:cNvGrpSpPr/>
+        <p:nvPr/>
+      </p:nvGrpSpPr>
+      <p:grpSpPr>
+        <a:xfrm>
+          <a:off x="0" y="0"/>
+          <a:ext cx="0" cy="0"/>
+          <a:chOff x="0" y="0"/>
+          <a:chExt cx="0" cy="0"/>
+        </a:xfrm>
+      </p:grpSpPr>
+      <p:sp>
+        <p:nvSpPr>
+          <p:cNvPr id="2" name="Shape 0"/>
+          <p:cNvSpPr/>
+          <p:nvPr/>
+        </p:nvSpPr>
+        <p:spPr>
+          <a:xfrm>
+            <a:off x="0" y="0"/>
+            <a:ext cx="54864" cy="5143500"/>
+          </a:xfrm>
+          <a:prstGeom prst="rect">
+            <a:avLst/>
+          </a:prstGeom>
+          <a:solidFill>
+            <a:srgbClr val="1E2761"/>
+          </a:solidFill>
+          <a:ln/>
+        </p:spPr>
+      </p:sp>
+      <p:sp>
+        <p:nvSpPr>
+          <p:cNvPr id="3" name="Text 1"/>
+          <p:cNvSpPr/>
+          <p:nvPr/>
+        </p:nvSpPr>
+        <p:spPr>
+          <a:xfrm>
+            <a:off x="5486400" y="256032"/>
+            <a:ext cx="3337560" cy="228600"/>
+          </a:xfrm>
+          <a:prstGeom prst="rect">
+            <a:avLst/>
+          </a:prstGeom>
+          <a:noFill/>
+          <a:ln/>
+        </p:spPr>
+        <p:txBody>
+          <a:bodyPr wrap="square" lIns="0" tIns="0" rIns="0" bIns="0" rtlCol="0" anchor="ctr">
+            <a:normAutofit/>
+          </a:bodyPr>
+          <a:lstStyle/>
+          <a:p>
+            <a:pPr algn="r" indent="0" marL="0">
+              <a:buNone/>
+            </a:pPr>
+            <a:r>
+              <a:rPr lang="en-US" sz="950" dirty="0">
+                <a:solidFill>
+                  <a:srgbClr val="6B7280"/>
+                </a:solidFill>
+                <a:latin typeface="Calibri" pitchFamily="34" charset="0"/>
+                <a:ea typeface="Calibri" pitchFamily="34" charset="-122"/>
+                <a:cs typeface="Calibri" pitchFamily="34" charset="-120"/>
+              </a:rPr>
+              <a:t>Day 3 · Module 6</a:t>
+            </a:r>
+            <a:endParaRPr lang="en-US" sz="950" dirty="0"/>
+          </a:p>
+        </p:txBody>
+      </p:sp>
+      <p:sp>
+        <p:nvSpPr>
+          <p:cNvPr id="4" name="Text 2"/>
+          <p:cNvSpPr/>
+          <p:nvPr/>
+        </p:nvSpPr>
+        <p:spPr>
+          <a:xfrm>
+            <a:off x="365760" y="310896"/>
+            <a:ext cx="6583680" cy="603504"/>
+          </a:xfrm>
+          <a:prstGeom prst="rect">
+            <a:avLst/>
+          </a:prstGeom>
+          <a:noFill/>
+          <a:ln/>
+        </p:spPr>
+        <p:txBody>
+          <a:bodyPr wrap="square" lIns="0" tIns="0" rIns="0" bIns="0" rtlCol="0" anchor="ctr">
+            <a:normAutofit/>
+          </a:bodyPr>
+          <a:lstStyle/>
+          <a:p>
+            <a:pPr indent="0" marL="0">
+              <a:buNone/>
+            </a:pPr>
+            <a:r>
+              <a:rPr lang="en-US" sz="2500" b="1" dirty="0">
+                <a:solidFill>
+                  <a:srgbClr val="1E2761"/>
+                </a:solidFill>
+                <a:latin typeface="Calibri" pitchFamily="34" charset="0"/>
+                <a:ea typeface="Calibri" pitchFamily="34" charset="-122"/>
+                <a:cs typeface="Calibri" pitchFamily="34" charset="-120"/>
+              </a:rPr>
               <a:t>Failure modes tell you where to look</a:t>
             </a:r>
             <a:endParaRPr lang="en-US" sz="2500" dirty="0"/>
@@ -3530,7 +4718,7 @@
       </p:sp>
       <p:graphicFrame>
         <p:nvGraphicFramePr>
-          <p:cNvPr id="13" name="Table 0"/>
+          <p:cNvPr id="14" name="Table 0"/>
           <p:cNvGraphicFramePr>
             <a:graphicFrameLocks noGrp="1"/>
           </p:cNvGraphicFramePr>
@@ -4458,9 +5646,9 @@
 </p:sld>
 </file>
 
-<file path=ppt/slides/slide13.xml><?xml version="1.0" encoding="utf-8"?>
+<file path=ppt/slides/slide14.xml><?xml version="1.0" encoding="utf-8"?>
 <p:sld xmlns:a="http://schemas.openxmlformats.org/drawingml/2006/main" xmlns:r="http://schemas.openxmlformats.org/officeDocument/2006/relationships" xmlns:p="http://schemas.openxmlformats.org/presentationml/2006/main">
-  <p:cSld name="Slide 13">
+  <p:cSld name="Slide 14">
     <p:bg>
       <p:bgPr>
         <a:solidFill>
@@ -5092,9 +6280,9 @@
 </p:sld>
 </file>
 
-<file path=ppt/slides/slide14.xml><?xml version="1.0" encoding="utf-8"?>
+<file path=ppt/slides/slide15.xml><?xml version="1.0" encoding="utf-8"?>
 <p:sld xmlns:a="http://schemas.openxmlformats.org/drawingml/2006/main" xmlns:r="http://schemas.openxmlformats.org/officeDocument/2006/relationships" xmlns:p="http://schemas.openxmlformats.org/presentationml/2006/main">
-  <p:cSld name="Slide 14">
+  <p:cSld name="Slide 15">
     <p:bg>
       <p:bgPr>
         <a:solidFill>
@@ -9601,6 +10789,359 @@
     <p:bg>
       <p:bgPr>
         <a:solidFill>
+          <a:srgbClr val="CADCFC"/>
+        </a:solidFill>
+      </p:bgPr>
+    </p:bg>
+    <p:spTree>
+      <p:nvGrpSpPr>
+        <p:cNvPr id="1" name=""/>
+        <p:cNvGrpSpPr/>
+        <p:nvPr/>
+      </p:nvGrpSpPr>
+      <p:grpSpPr>
+        <a:xfrm>
+          <a:off x="0" y="0"/>
+          <a:ext cx="0" cy="0"/>
+          <a:chOff x="0" y="0"/>
+          <a:chExt cx="0" cy="0"/>
+        </a:xfrm>
+      </p:grpSpPr>
+      <p:sp>
+        <p:nvSpPr>
+          <p:cNvPr id="2" name="Shape 0"/>
+          <p:cNvSpPr/>
+          <p:nvPr/>
+        </p:nvSpPr>
+        <p:spPr>
+          <a:xfrm>
+            <a:off x="0" y="0"/>
+            <a:ext cx="146304" cy="5143500"/>
+          </a:xfrm>
+          <a:prstGeom prst="rect">
+            <a:avLst/>
+          </a:prstGeom>
+          <a:solidFill>
+            <a:srgbClr val="1E2761"/>
+          </a:solidFill>
+          <a:ln/>
+        </p:spPr>
+      </p:sp>
+      <p:sp>
+        <p:nvSpPr>
+          <p:cNvPr id="3" name="Text 1"/>
+          <p:cNvSpPr/>
+          <p:nvPr/>
+        </p:nvSpPr>
+        <p:spPr>
+          <a:xfrm>
+            <a:off x="5669280" y="274320"/>
+            <a:ext cx="3291840" cy="274320"/>
+          </a:xfrm>
+          <a:prstGeom prst="rect">
+            <a:avLst/>
+          </a:prstGeom>
+          <a:noFill/>
+          <a:ln/>
+        </p:spPr>
+        <p:txBody>
+          <a:bodyPr wrap="square" lIns="0" tIns="0" rIns="0" bIns="0" rtlCol="0" anchor="ctr"/>
+          <a:lstStyle/>
+          <a:p>
+            <a:pPr algn="r" indent="0" marL="0">
+              <a:buNone/>
+            </a:pPr>
+            <a:r>
+              <a:rPr lang="en-US" sz="1000" dirty="0">
+                <a:solidFill>
+                  <a:srgbClr val="6B7280"/>
+                </a:solidFill>
+                <a:latin typeface="Calibri" pitchFamily="34" charset="0"/>
+                <a:ea typeface="Calibri" pitchFamily="34" charset="-122"/>
+                <a:cs typeface="Calibri" pitchFamily="34" charset="-120"/>
+              </a:rPr>
+              <a:t>Day 3 · Module 6 · Demo</a:t>
+            </a:r>
+            <a:endParaRPr lang="en-US" sz="1000" dirty="0"/>
+          </a:p>
+        </p:txBody>
+      </p:sp>
+      <p:sp>
+        <p:nvSpPr>
+          <p:cNvPr id="4" name="Text 2"/>
+          <p:cNvSpPr/>
+          <p:nvPr/>
+        </p:nvSpPr>
+        <p:spPr>
+          <a:xfrm>
+            <a:off x="548640" y="1051560"/>
+            <a:ext cx="5486400" cy="502920"/>
+          </a:xfrm>
+          <a:prstGeom prst="rect">
+            <a:avLst/>
+          </a:prstGeom>
+          <a:noFill/>
+          <a:ln/>
+        </p:spPr>
+        <p:txBody>
+          <a:bodyPr wrap="square" lIns="0" tIns="0" rIns="0" bIns="0" rtlCol="0" anchor="ctr"/>
+          <a:lstStyle/>
+          <a:p>
+            <a:pPr indent="0" marL="0">
+              <a:buNone/>
+            </a:pPr>
+            <a:r>
+              <a:rPr lang="en-US" sz="3200" b="1" spc="800" kern="0" dirty="0">
+                <a:solidFill>
+                  <a:srgbClr val="1E2761"/>
+                </a:solidFill>
+                <a:latin typeface="Calibri" pitchFamily="34" charset="0"/>
+                <a:ea typeface="Calibri" pitchFamily="34" charset="-122"/>
+                <a:cs typeface="Calibri" pitchFamily="34" charset="-120"/>
+              </a:rPr>
+              <a:t>DEMO</a:t>
+            </a:r>
+            <a:endParaRPr lang="en-US" sz="3200" dirty="0"/>
+          </a:p>
+        </p:txBody>
+      </p:sp>
+      <p:sp>
+        <p:nvSpPr>
+          <p:cNvPr id="5" name="Text 3"/>
+          <p:cNvSpPr/>
+          <p:nvPr/>
+        </p:nvSpPr>
+        <p:spPr>
+          <a:xfrm>
+            <a:off x="548640" y="1691640"/>
+            <a:ext cx="8046720" cy="914400"/>
+          </a:xfrm>
+          <a:prstGeom prst="rect">
+            <a:avLst/>
+          </a:prstGeom>
+          <a:noFill/>
+          <a:ln/>
+        </p:spPr>
+        <p:txBody>
+          <a:bodyPr wrap="square" lIns="0" tIns="0" rIns="0" bIns="0" rtlCol="0" anchor="ctr"/>
+          <a:lstStyle/>
+          <a:p>
+            <a:pPr indent="0" marL="0">
+              <a:buNone/>
+            </a:pPr>
+            <a:r>
+              <a:rPr lang="en-US" sz="3000" b="1" dirty="0">
+                <a:solidFill>
+                  <a:srgbClr val="1E2761"/>
+                </a:solidFill>
+                <a:latin typeface="Calibri" pitchFamily="34" charset="0"/>
+                <a:ea typeface="Calibri" pitchFamily="34" charset="-122"/>
+                <a:cs typeface="Calibri" pitchFamily="34" charset="-120"/>
+              </a:rPr>
+              <a:t>Read-only ADO MCP in action</a:t>
+            </a:r>
+            <a:endParaRPr lang="en-US" sz="3000" dirty="0"/>
+          </a:p>
+        </p:txBody>
+      </p:sp>
+      <p:sp>
+        <p:nvSpPr>
+          <p:cNvPr id="6" name="Text 4"/>
+          <p:cNvSpPr/>
+          <p:nvPr/>
+        </p:nvSpPr>
+        <p:spPr>
+          <a:xfrm>
+            <a:off x="6583680" y="1051560"/>
+            <a:ext cx="2194560" cy="502920"/>
+          </a:xfrm>
+          <a:prstGeom prst="rect">
+            <a:avLst/>
+          </a:prstGeom>
+          <a:noFill/>
+          <a:ln/>
+        </p:spPr>
+        <p:txBody>
+          <a:bodyPr wrap="square" lIns="0" tIns="0" rIns="0" bIns="0" rtlCol="0" anchor="ctr"/>
+          <a:lstStyle/>
+          <a:p>
+            <a:pPr algn="r" indent="0" marL="0">
+              <a:buNone/>
+            </a:pPr>
+            <a:r>
+              <a:rPr lang="en-US" sz="1800" i="1" dirty="0">
+                <a:solidFill>
+                  <a:srgbClr val="6B7280"/>
+                </a:solidFill>
+                <a:latin typeface="Calibri" pitchFamily="34" charset="0"/>
+                <a:ea typeface="Calibri" pitchFamily="34" charset="-122"/>
+                <a:cs typeface="Calibri" pitchFamily="34" charset="-120"/>
+              </a:rPr>
+              <a:t>~5 min</a:t>
+            </a:r>
+            <a:endParaRPr lang="en-US" sz="1800" dirty="0"/>
+          </a:p>
+        </p:txBody>
+      </p:sp>
+      <p:sp>
+        <p:nvSpPr>
+          <p:cNvPr id="7" name="Text 5"/>
+          <p:cNvSpPr/>
+          <p:nvPr/>
+        </p:nvSpPr>
+        <p:spPr>
+          <a:xfrm>
+            <a:off x="548640" y="2788920"/>
+            <a:ext cx="8046720" cy="1371600"/>
+          </a:xfrm>
+          <a:prstGeom prst="rect">
+            <a:avLst/>
+          </a:prstGeom>
+          <a:noFill/>
+          <a:ln/>
+        </p:spPr>
+        <p:txBody>
+          <a:bodyPr wrap="square" lIns="0" tIns="0" rIns="0" bIns="0" rtlCol="0" anchor="ctr"/>
+          <a:lstStyle/>
+          <a:p>
+            <a:pPr indent="0" marL="0">
+              <a:spcAft>
+                <a:spcPts val="600"/>
+              </a:spcAft>
+              <a:buNone/>
+            </a:pPr>
+            <a:r>
+              <a:rPr lang="en-US" sz="1600" dirty="0">
+                <a:solidFill>
+                  <a:srgbClr val="212121"/>
+                </a:solidFill>
+                <a:latin typeface="Calibri" pitchFamily="34" charset="0"/>
+                <a:ea typeface="Calibri" pitchFamily="34" charset="-122"/>
+                <a:cs typeface="Calibri" pitchFamily="34" charset="-120"/>
+              </a:rPr>
+              <a:t>Connect to the presenter's own Azure DevOps organization with X-MCP-Toolsets: wit and X-MCP-Readonly: true: a wit_work_item(action="get") read succeeds, and an attempted write is rejected by the server — the filter is enforced server-side, not by convention.</a:t>
+            </a:r>
+            <a:endParaRPr lang="en-US" sz="1600" dirty="0"/>
+          </a:p>
+        </p:txBody>
+      </p:sp>
+      <p:sp>
+        <p:nvSpPr>
+          <p:cNvPr id="8" name="Text 6"/>
+          <p:cNvSpPr/>
+          <p:nvPr/>
+        </p:nvSpPr>
+        <p:spPr>
+          <a:xfrm>
+            <a:off x="548640" y="4434840"/>
+            <a:ext cx="8046720" cy="320040"/>
+          </a:xfrm>
+          <a:prstGeom prst="rect">
+            <a:avLst/>
+          </a:prstGeom>
+          <a:noFill/>
+          <a:ln/>
+        </p:spPr>
+        <p:txBody>
+          <a:bodyPr wrap="square" lIns="0" tIns="0" rIns="0" bIns="0" rtlCol="0" anchor="ctr"/>
+          <a:lstStyle/>
+          <a:p>
+            <a:pPr indent="0" marL="0">
+              <a:buNone/>
+            </a:pPr>
+            <a:r>
+              <a:rPr lang="en-US" sz="1100" i="1" dirty="0">
+                <a:solidFill>
+                  <a:srgbClr val="6B7280"/>
+                </a:solidFill>
+                <a:latin typeface="Calibri" pitchFamily="34" charset="0"/>
+                <a:ea typeface="Calibri" pitchFamily="34" charset="-122"/>
+                <a:cs typeface="Calibri" pitchFamily="34" charset="-120"/>
+              </a:rPr>
+              <a:t>Runbook: demos/day3/module-6-demo-1-read-only-ado.md</a:t>
+            </a:r>
+            <a:endParaRPr lang="en-US" sz="1100" dirty="0"/>
+          </a:p>
+        </p:txBody>
+      </p:sp>
+      <p:sp>
+        <p:nvSpPr>
+          <p:cNvPr id="9" name="Shape 7"/>
+          <p:cNvSpPr/>
+          <p:nvPr/>
+        </p:nvSpPr>
+        <p:spPr>
+          <a:xfrm>
+            <a:off x="365760" y="4773168"/>
+            <a:ext cx="8412480" cy="0"/>
+          </a:xfrm>
+          <a:prstGeom prst="line">
+            <a:avLst/>
+          </a:prstGeom>
+          <a:noFill/>
+          <a:ln w="6350">
+            <a:solidFill>
+              <a:srgbClr val="D1D5DB"/>
+            </a:solidFill>
+            <a:prstDash val="solid"/>
+          </a:ln>
+        </p:spPr>
+      </p:sp>
+      <p:sp>
+        <p:nvSpPr>
+          <p:cNvPr id="10" name="Text 8"/>
+          <p:cNvSpPr/>
+          <p:nvPr/>
+        </p:nvSpPr>
+        <p:spPr>
+          <a:xfrm>
+            <a:off x="384048" y="4818888"/>
+            <a:ext cx="8275320" cy="182880"/>
+          </a:xfrm>
+          <a:prstGeom prst="rect">
+            <a:avLst/>
+          </a:prstGeom>
+          <a:noFill/>
+          <a:ln/>
+        </p:spPr>
+        <p:txBody>
+          <a:bodyPr wrap="square" lIns="0" tIns="0" rIns="0" bIns="0" rtlCol="0" anchor="ctr">
+            <a:normAutofit/>
+          </a:bodyPr>
+          <a:lstStyle/>
+          <a:p>
+            <a:pPr indent="0" marL="0">
+              <a:buNone/>
+            </a:pPr>
+            <a:r>
+              <a:rPr lang="en-US" sz="820" dirty="0">
+                <a:solidFill>
+                  <a:srgbClr val="6B7280"/>
+                </a:solidFill>
+                <a:latin typeface="Calibri" pitchFamily="34" charset="0"/>
+                <a:ea typeface="Calibri" pitchFamily="34" charset="-122"/>
+                <a:cs typeface="Calibri" pitchFamily="34" charset="-120"/>
+              </a:rPr>
+              <a:t>Source: https://learn.microsoft.com/en-us/azure/devops/mcp-server/remote-mcp-server?view=azure-devops</a:t>
+            </a:r>
+            <a:endParaRPr lang="en-US" sz="820" dirty="0"/>
+          </a:p>
+        </p:txBody>
+      </p:sp>
+    </p:spTree>
+  </p:cSld>
+  <p:clrMapOvr>
+    <a:masterClrMapping/>
+  </p:clrMapOvr>
+</p:sld>
+</file>
+
+<file path=ppt/slides/slide9.xml><?xml version="1.0" encoding="utf-8"?>
+<p:sld xmlns:a="http://schemas.openxmlformats.org/drawingml/2006/main" xmlns:r="http://schemas.openxmlformats.org/officeDocument/2006/relationships" xmlns:p="http://schemas.openxmlformats.org/presentationml/2006/main">
+  <p:cSld name="Slide 9">
+    <p:bg>
+      <p:bgPr>
+        <a:solidFill>
           <a:srgbClr val="FFFFFF"/>
         </a:solidFill>
       </p:bgPr>
@@ -9723,7 +11264,7 @@
       </p:sp>
       <p:graphicFrame>
         <p:nvGraphicFramePr>
-          <p:cNvPr id="9" name="Table 0"/>
+          <p:cNvPr id="10" name="Table 0"/>
           <p:cNvGraphicFramePr>
             <a:graphicFrameLocks noGrp="1"/>
           </p:cNvGraphicFramePr>
@@ -10841,1104 +12382,6 @@
                 <a:cs typeface="Calibri" pitchFamily="34" charset="-120"/>
               </a:rPr>
               <a:t>Source: https://learn.microsoft.com/en-us/azure/devops/mcp-server/remote-mcp-server?view=azure-devops</a:t>
-            </a:r>
-            <a:endParaRPr lang="en-US" sz="820" dirty="0"/>
-          </a:p>
-        </p:txBody>
-      </p:sp>
-    </p:spTree>
-  </p:cSld>
-  <p:clrMapOvr>
-    <a:masterClrMapping/>
-  </p:clrMapOvr>
-</p:sld>
-</file>
-
-<file path=ppt/slides/slide9.xml><?xml version="1.0" encoding="utf-8"?>
-<p:sld xmlns:a="http://schemas.openxmlformats.org/drawingml/2006/main" xmlns:r="http://schemas.openxmlformats.org/officeDocument/2006/relationships" xmlns:p="http://schemas.openxmlformats.org/presentationml/2006/main">
-  <p:cSld name="Slide 9">
-    <p:bg>
-      <p:bgPr>
-        <a:solidFill>
-          <a:srgbClr val="FFFFFF"/>
-        </a:solidFill>
-      </p:bgPr>
-    </p:bg>
-    <p:spTree>
-      <p:nvGrpSpPr>
-        <p:cNvPr id="1" name=""/>
-        <p:cNvGrpSpPr/>
-        <p:nvPr/>
-      </p:nvGrpSpPr>
-      <p:grpSpPr>
-        <a:xfrm>
-          <a:off x="0" y="0"/>
-          <a:ext cx="0" cy="0"/>
-          <a:chOff x="0" y="0"/>
-          <a:chExt cx="0" cy="0"/>
-        </a:xfrm>
-      </p:grpSpPr>
-      <p:sp>
-        <p:nvSpPr>
-          <p:cNvPr id="2" name="Shape 0"/>
-          <p:cNvSpPr/>
-          <p:nvPr/>
-        </p:nvSpPr>
-        <p:spPr>
-          <a:xfrm>
-            <a:off x="0" y="0"/>
-            <a:ext cx="54864" cy="5143500"/>
-          </a:xfrm>
-          <a:prstGeom prst="rect">
-            <a:avLst/>
-          </a:prstGeom>
-          <a:solidFill>
-            <a:srgbClr val="1E2761"/>
-          </a:solidFill>
-          <a:ln/>
-        </p:spPr>
-      </p:sp>
-      <p:sp>
-        <p:nvSpPr>
-          <p:cNvPr id="3" name="Text 1"/>
-          <p:cNvSpPr/>
-          <p:nvPr/>
-        </p:nvSpPr>
-        <p:spPr>
-          <a:xfrm>
-            <a:off x="5486400" y="256032"/>
-            <a:ext cx="3337560" cy="228600"/>
-          </a:xfrm>
-          <a:prstGeom prst="rect">
-            <a:avLst/>
-          </a:prstGeom>
-          <a:noFill/>
-          <a:ln/>
-        </p:spPr>
-        <p:txBody>
-          <a:bodyPr wrap="square" lIns="0" tIns="0" rIns="0" bIns="0" rtlCol="0" anchor="ctr">
-            <a:normAutofit/>
-          </a:bodyPr>
-          <a:lstStyle/>
-          <a:p>
-            <a:pPr algn="r" indent="0" marL="0">
-              <a:buNone/>
-            </a:pPr>
-            <a:r>
-              <a:rPr lang="en-US" sz="950" dirty="0">
-                <a:solidFill>
-                  <a:srgbClr val="6B7280"/>
-                </a:solidFill>
-                <a:latin typeface="Calibri" pitchFamily="34" charset="0"/>
-                <a:ea typeface="Calibri" pitchFamily="34" charset="-122"/>
-                <a:cs typeface="Calibri" pitchFamily="34" charset="-120"/>
-              </a:rPr>
-              <a:t>Day 3 · Module 6</a:t>
-            </a:r>
-            <a:endParaRPr lang="en-US" sz="950" dirty="0"/>
-          </a:p>
-        </p:txBody>
-      </p:sp>
-      <p:sp>
-        <p:nvSpPr>
-          <p:cNvPr id="4" name="Text 2"/>
-          <p:cNvSpPr/>
-          <p:nvPr/>
-        </p:nvSpPr>
-        <p:spPr>
-          <a:xfrm>
-            <a:off x="365760" y="310896"/>
-            <a:ext cx="6583680" cy="603504"/>
-          </a:xfrm>
-          <a:prstGeom prst="rect">
-            <a:avLst/>
-          </a:prstGeom>
-          <a:noFill/>
-          <a:ln/>
-        </p:spPr>
-        <p:txBody>
-          <a:bodyPr wrap="square" lIns="0" tIns="0" rIns="0" bIns="0" rtlCol="0" anchor="ctr">
-            <a:normAutofit/>
-          </a:bodyPr>
-          <a:lstStyle/>
-          <a:p>
-            <a:pPr indent="0" marL="0">
-              <a:buNone/>
-            </a:pPr>
-            <a:r>
-              <a:rPr lang="en-US" sz="2500" b="1" dirty="0">
-                <a:solidFill>
-                  <a:srgbClr val="1E2761"/>
-                </a:solidFill>
-                <a:latin typeface="Calibri" pitchFamily="34" charset="0"/>
-                <a:ea typeface="Calibri" pitchFamily="34" charset="-122"/>
-                <a:cs typeface="Calibri" pitchFamily="34" charset="-120"/>
-              </a:rPr>
-              <a:t>Use a read-first, approved-write sequence</a:t>
-            </a:r>
-            <a:endParaRPr lang="en-US" sz="2500" dirty="0"/>
-          </a:p>
-        </p:txBody>
-      </p:sp>
-      <p:sp>
-        <p:nvSpPr>
-          <p:cNvPr id="5" name="Shape 3"/>
-          <p:cNvSpPr/>
-          <p:nvPr/>
-        </p:nvSpPr>
-        <p:spPr>
-          <a:xfrm>
-            <a:off x="365760" y="1216152"/>
-            <a:ext cx="2633472" cy="1572768"/>
-          </a:xfrm>
-          <a:prstGeom prst="roundRect">
-            <a:avLst>
-              <a:gd name="adj" fmla="val 3488"/>
-            </a:avLst>
-          </a:prstGeom>
-          <a:solidFill>
-            <a:srgbClr val="CADCFC"/>
-          </a:solidFill>
-          <a:ln w="10160">
-            <a:solidFill>
-              <a:srgbClr val="1E2761"/>
-            </a:solidFill>
-            <a:prstDash val="solid"/>
-          </a:ln>
-        </p:spPr>
-      </p:sp>
-      <p:sp>
-        <p:nvSpPr>
-          <p:cNvPr id="6" name="Shape 4"/>
-          <p:cNvSpPr/>
-          <p:nvPr/>
-        </p:nvSpPr>
-        <p:spPr>
-          <a:xfrm>
-            <a:off x="475488" y="1335024"/>
-            <a:ext cx="320040" cy="320040"/>
-          </a:xfrm>
-          <a:prstGeom prst="ellipse">
-            <a:avLst/>
-          </a:prstGeom>
-          <a:solidFill>
-            <a:srgbClr val="1E2761"/>
-          </a:solidFill>
-          <a:ln/>
-        </p:spPr>
-      </p:sp>
-      <p:sp>
-        <p:nvSpPr>
-          <p:cNvPr id="7" name="Text 5"/>
-          <p:cNvSpPr/>
-          <p:nvPr/>
-        </p:nvSpPr>
-        <p:spPr>
-          <a:xfrm>
-            <a:off x="475488" y="1385316"/>
-            <a:ext cx="320040" cy="146304"/>
-          </a:xfrm>
-          <a:prstGeom prst="rect">
-            <a:avLst/>
-          </a:prstGeom>
-          <a:noFill/>
-          <a:ln/>
-        </p:spPr>
-        <p:txBody>
-          <a:bodyPr wrap="square" lIns="0" tIns="0" rIns="0" bIns="0" rtlCol="0" anchor="ctr"/>
-          <a:lstStyle/>
-          <a:p>
-            <a:pPr algn="ctr" indent="0" marL="0">
-              <a:buNone/>
-            </a:pPr>
-            <a:r>
-              <a:rPr lang="en-US" sz="900" b="1" dirty="0">
-                <a:solidFill>
-                  <a:srgbClr val="FFFFFF"/>
-                </a:solidFill>
-                <a:latin typeface="Calibri" pitchFamily="34" charset="0"/>
-                <a:ea typeface="Calibri" pitchFamily="34" charset="-122"/>
-                <a:cs typeface="Calibri" pitchFamily="34" charset="-120"/>
-              </a:rPr>
-              <a:t>1</a:t>
-            </a:r>
-            <a:endParaRPr lang="en-US" sz="900" dirty="0"/>
-          </a:p>
-        </p:txBody>
-      </p:sp>
-      <p:sp>
-        <p:nvSpPr>
-          <p:cNvPr id="8" name="Text 6"/>
-          <p:cNvSpPr/>
-          <p:nvPr/>
-        </p:nvSpPr>
-        <p:spPr>
-          <a:xfrm>
-            <a:off x="896112" y="1335024"/>
-            <a:ext cx="1975104" cy="310896"/>
-          </a:xfrm>
-          <a:prstGeom prst="rect">
-            <a:avLst/>
-          </a:prstGeom>
-          <a:noFill/>
-          <a:ln/>
-        </p:spPr>
-        <p:txBody>
-          <a:bodyPr wrap="square" lIns="0" tIns="0" rIns="0" bIns="0" rtlCol="0" anchor="ctr">
-            <a:normAutofit/>
-          </a:bodyPr>
-          <a:lstStyle/>
-          <a:p>
-            <a:pPr indent="0" marL="0">
-              <a:buNone/>
-            </a:pPr>
-            <a:r>
-              <a:rPr lang="en-US" sz="1500" b="1" dirty="0">
-                <a:solidFill>
-                  <a:srgbClr val="1E2761"/>
-                </a:solidFill>
-                <a:latin typeface="Calibri" pitchFamily="34" charset="0"/>
-                <a:ea typeface="Calibri" pitchFamily="34" charset="-122"/>
-                <a:cs typeface="Calibri" pitchFamily="34" charset="-120"/>
-              </a:rPr>
-              <a:t>Read</a:t>
-            </a:r>
-            <a:endParaRPr lang="en-US" sz="1500" dirty="0"/>
-          </a:p>
-        </p:txBody>
-      </p:sp>
-      <p:sp>
-        <p:nvSpPr>
-          <p:cNvPr id="9" name="Text 7"/>
-          <p:cNvSpPr/>
-          <p:nvPr/>
-        </p:nvSpPr>
-        <p:spPr>
-          <a:xfrm>
-            <a:off x="512064" y="1719072"/>
-            <a:ext cx="2340864" cy="950976"/>
-          </a:xfrm>
-          <a:prstGeom prst="rect">
-            <a:avLst/>
-          </a:prstGeom>
-          <a:noFill/>
-          <a:ln/>
-        </p:spPr>
-        <p:txBody>
-          <a:bodyPr wrap="square" lIns="0" tIns="0" rIns="0" bIns="0" rtlCol="0" anchor="t">
-            <a:normAutofit/>
-          </a:bodyPr>
-          <a:lstStyle/>
-          <a:p>
-            <a:pPr indent="0" marL="0">
-              <a:buNone/>
-            </a:pPr>
-            <a:r>
-              <a:rPr lang="en-US" sz="1150" dirty="0">
-                <a:solidFill>
-                  <a:srgbClr val="212121"/>
-                </a:solidFill>
-                <a:latin typeface="Calibri" pitchFamily="34" charset="0"/>
-                <a:ea typeface="Calibri" pitchFamily="34" charset="-122"/>
-                <a:cs typeface="Calibri" pitchFamily="34" charset="-120"/>
-              </a:rPr>
-              <a:t>wit_work_item(action="get", ...)</a:t>
-            </a:r>
-            <a:endParaRPr lang="en-US" sz="1150" dirty="0"/>
-          </a:p>
-        </p:txBody>
-      </p:sp>
-      <p:sp>
-        <p:nvSpPr>
-          <p:cNvPr id="10" name="Shape 8"/>
-          <p:cNvSpPr/>
-          <p:nvPr/>
-        </p:nvSpPr>
-        <p:spPr>
-          <a:xfrm>
-            <a:off x="3035808" y="1892808"/>
-            <a:ext cx="164592" cy="219456"/>
-          </a:xfrm>
-          <a:prstGeom prst="chevron">
-            <a:avLst/>
-          </a:prstGeom>
-          <a:solidFill>
-            <a:srgbClr val="E8A87C"/>
-          </a:solidFill>
-          <a:ln/>
-        </p:spPr>
-      </p:sp>
-      <p:sp>
-        <p:nvSpPr>
-          <p:cNvPr id="11" name="Shape 9"/>
-          <p:cNvSpPr/>
-          <p:nvPr/>
-        </p:nvSpPr>
-        <p:spPr>
-          <a:xfrm>
-            <a:off x="3255264" y="1216152"/>
-            <a:ext cx="2633472" cy="1572768"/>
-          </a:xfrm>
-          <a:prstGeom prst="roundRect">
-            <a:avLst>
-              <a:gd name="adj" fmla="val 3488"/>
-            </a:avLst>
-          </a:prstGeom>
-          <a:solidFill>
-            <a:srgbClr val="F3F4F6"/>
-          </a:solidFill>
-          <a:ln w="10160">
-            <a:solidFill>
-              <a:srgbClr val="D1D5DB"/>
-            </a:solidFill>
-            <a:prstDash val="solid"/>
-          </a:ln>
-        </p:spPr>
-      </p:sp>
-      <p:sp>
-        <p:nvSpPr>
-          <p:cNvPr id="12" name="Shape 10"/>
-          <p:cNvSpPr/>
-          <p:nvPr/>
-        </p:nvSpPr>
-        <p:spPr>
-          <a:xfrm>
-            <a:off x="3364992" y="1335024"/>
-            <a:ext cx="320040" cy="320040"/>
-          </a:xfrm>
-          <a:prstGeom prst="ellipse">
-            <a:avLst/>
-          </a:prstGeom>
-          <a:solidFill>
-            <a:srgbClr val="1E2761"/>
-          </a:solidFill>
-          <a:ln/>
-        </p:spPr>
-      </p:sp>
-      <p:sp>
-        <p:nvSpPr>
-          <p:cNvPr id="13" name="Text 11"/>
-          <p:cNvSpPr/>
-          <p:nvPr/>
-        </p:nvSpPr>
-        <p:spPr>
-          <a:xfrm>
-            <a:off x="3364992" y="1385316"/>
-            <a:ext cx="320040" cy="146304"/>
-          </a:xfrm>
-          <a:prstGeom prst="rect">
-            <a:avLst/>
-          </a:prstGeom>
-          <a:noFill/>
-          <a:ln/>
-        </p:spPr>
-        <p:txBody>
-          <a:bodyPr wrap="square" lIns="0" tIns="0" rIns="0" bIns="0" rtlCol="0" anchor="ctr"/>
-          <a:lstStyle/>
-          <a:p>
-            <a:pPr algn="ctr" indent="0" marL="0">
-              <a:buNone/>
-            </a:pPr>
-            <a:r>
-              <a:rPr lang="en-US" sz="900" b="1" dirty="0">
-                <a:solidFill>
-                  <a:srgbClr val="FFFFFF"/>
-                </a:solidFill>
-                <a:latin typeface="Calibri" pitchFamily="34" charset="0"/>
-                <a:ea typeface="Calibri" pitchFamily="34" charset="-122"/>
-                <a:cs typeface="Calibri" pitchFamily="34" charset="-120"/>
-              </a:rPr>
-              <a:t>2</a:t>
-            </a:r>
-            <a:endParaRPr lang="en-US" sz="900" dirty="0"/>
-          </a:p>
-        </p:txBody>
-      </p:sp>
-      <p:sp>
-        <p:nvSpPr>
-          <p:cNvPr id="14" name="Text 12"/>
-          <p:cNvSpPr/>
-          <p:nvPr/>
-        </p:nvSpPr>
-        <p:spPr>
-          <a:xfrm>
-            <a:off x="3785616" y="1335024"/>
-            <a:ext cx="1975104" cy="310896"/>
-          </a:xfrm>
-          <a:prstGeom prst="rect">
-            <a:avLst/>
-          </a:prstGeom>
-          <a:noFill/>
-          <a:ln/>
-        </p:spPr>
-        <p:txBody>
-          <a:bodyPr wrap="square" lIns="0" tIns="0" rIns="0" bIns="0" rtlCol="0" anchor="ctr">
-            <a:normAutofit/>
-          </a:bodyPr>
-          <a:lstStyle/>
-          <a:p>
-            <a:pPr indent="0" marL="0">
-              <a:buNone/>
-            </a:pPr>
-            <a:r>
-              <a:rPr lang="en-US" sz="1500" b="1" dirty="0">
-                <a:solidFill>
-                  <a:srgbClr val="1E2761"/>
-                </a:solidFill>
-                <a:latin typeface="Calibri" pitchFamily="34" charset="0"/>
-                <a:ea typeface="Calibri" pitchFamily="34" charset="-122"/>
-                <a:cs typeface="Calibri" pitchFamily="34" charset="-120"/>
-              </a:rPr>
-              <a:t>Compare</a:t>
-            </a:r>
-            <a:endParaRPr lang="en-US" sz="1500" dirty="0"/>
-          </a:p>
-        </p:txBody>
-      </p:sp>
-      <p:sp>
-        <p:nvSpPr>
-          <p:cNvPr id="15" name="Text 13"/>
-          <p:cNvSpPr/>
-          <p:nvPr/>
-        </p:nvSpPr>
-        <p:spPr>
-          <a:xfrm>
-            <a:off x="3401568" y="1719072"/>
-            <a:ext cx="2340864" cy="950976"/>
-          </a:xfrm>
-          <a:prstGeom prst="rect">
-            <a:avLst/>
-          </a:prstGeom>
-          <a:noFill/>
-          <a:ln/>
-        </p:spPr>
-        <p:txBody>
-          <a:bodyPr wrap="square" lIns="0" tIns="0" rIns="0" bIns="0" rtlCol="0" anchor="t">
-            <a:normAutofit/>
-          </a:bodyPr>
-          <a:lstStyle/>
-          <a:p>
-            <a:pPr indent="0" marL="0">
-              <a:buNone/>
-            </a:pPr>
-            <a:r>
-              <a:rPr lang="en-US" sz="1150" dirty="0">
-                <a:solidFill>
-                  <a:srgbClr val="212121"/>
-                </a:solidFill>
-                <a:latin typeface="Calibri" pitchFamily="34" charset="0"/>
-                <a:ea typeface="Calibri" pitchFamily="34" charset="-122"/>
-                <a:cs typeface="Calibri" pitchFamily="34" charset="-120"/>
-              </a:rPr>
-              <a:t>Show current values and proposed change</a:t>
-            </a:r>
-            <a:endParaRPr lang="en-US" sz="1150" dirty="0"/>
-          </a:p>
-        </p:txBody>
-      </p:sp>
-      <p:sp>
-        <p:nvSpPr>
-          <p:cNvPr id="16" name="Shape 14"/>
-          <p:cNvSpPr/>
-          <p:nvPr/>
-        </p:nvSpPr>
-        <p:spPr>
-          <a:xfrm>
-            <a:off x="5925312" y="1892808"/>
-            <a:ext cx="164592" cy="219456"/>
-          </a:xfrm>
-          <a:prstGeom prst="chevron">
-            <a:avLst/>
-          </a:prstGeom>
-          <a:solidFill>
-            <a:srgbClr val="E8A87C"/>
-          </a:solidFill>
-          <a:ln/>
-        </p:spPr>
-      </p:sp>
-      <p:sp>
-        <p:nvSpPr>
-          <p:cNvPr id="17" name="Shape 15"/>
-          <p:cNvSpPr/>
-          <p:nvPr/>
-        </p:nvSpPr>
-        <p:spPr>
-          <a:xfrm>
-            <a:off x="6144768" y="1216152"/>
-            <a:ext cx="2633472" cy="1572768"/>
-          </a:xfrm>
-          <a:prstGeom prst="roundRect">
-            <a:avLst>
-              <a:gd name="adj" fmla="val 3488"/>
-            </a:avLst>
-          </a:prstGeom>
-          <a:solidFill>
-            <a:srgbClr val="F3F4F6"/>
-          </a:solidFill>
-          <a:ln w="10160">
-            <a:solidFill>
-              <a:srgbClr val="D1D5DB"/>
-            </a:solidFill>
-            <a:prstDash val="solid"/>
-          </a:ln>
-        </p:spPr>
-      </p:sp>
-      <p:sp>
-        <p:nvSpPr>
-          <p:cNvPr id="18" name="Shape 16"/>
-          <p:cNvSpPr/>
-          <p:nvPr/>
-        </p:nvSpPr>
-        <p:spPr>
-          <a:xfrm>
-            <a:off x="6254496" y="1335024"/>
-            <a:ext cx="320040" cy="320040"/>
-          </a:xfrm>
-          <a:prstGeom prst="ellipse">
-            <a:avLst/>
-          </a:prstGeom>
-          <a:solidFill>
-            <a:srgbClr val="1E2761"/>
-          </a:solidFill>
-          <a:ln/>
-        </p:spPr>
-      </p:sp>
-      <p:sp>
-        <p:nvSpPr>
-          <p:cNvPr id="19" name="Text 17"/>
-          <p:cNvSpPr/>
-          <p:nvPr/>
-        </p:nvSpPr>
-        <p:spPr>
-          <a:xfrm>
-            <a:off x="6254496" y="1385316"/>
-            <a:ext cx="320040" cy="146304"/>
-          </a:xfrm>
-          <a:prstGeom prst="rect">
-            <a:avLst/>
-          </a:prstGeom>
-          <a:noFill/>
-          <a:ln/>
-        </p:spPr>
-        <p:txBody>
-          <a:bodyPr wrap="square" lIns="0" tIns="0" rIns="0" bIns="0" rtlCol="0" anchor="ctr"/>
-          <a:lstStyle/>
-          <a:p>
-            <a:pPr algn="ctr" indent="0" marL="0">
-              <a:buNone/>
-            </a:pPr>
-            <a:r>
-              <a:rPr lang="en-US" sz="900" b="1" dirty="0">
-                <a:solidFill>
-                  <a:srgbClr val="FFFFFF"/>
-                </a:solidFill>
-                <a:latin typeface="Calibri" pitchFamily="34" charset="0"/>
-                <a:ea typeface="Calibri" pitchFamily="34" charset="-122"/>
-                <a:cs typeface="Calibri" pitchFamily="34" charset="-120"/>
-              </a:rPr>
-              <a:t>3</a:t>
-            </a:r>
-            <a:endParaRPr lang="en-US" sz="900" dirty="0"/>
-          </a:p>
-        </p:txBody>
-      </p:sp>
-      <p:sp>
-        <p:nvSpPr>
-          <p:cNvPr id="20" name="Text 18"/>
-          <p:cNvSpPr/>
-          <p:nvPr/>
-        </p:nvSpPr>
-        <p:spPr>
-          <a:xfrm>
-            <a:off x="6675120" y="1335024"/>
-            <a:ext cx="1975104" cy="310896"/>
-          </a:xfrm>
-          <a:prstGeom prst="rect">
-            <a:avLst/>
-          </a:prstGeom>
-          <a:noFill/>
-          <a:ln/>
-        </p:spPr>
-        <p:txBody>
-          <a:bodyPr wrap="square" lIns="0" tIns="0" rIns="0" bIns="0" rtlCol="0" anchor="ctr">
-            <a:normAutofit/>
-          </a:bodyPr>
-          <a:lstStyle/>
-          <a:p>
-            <a:pPr indent="0" marL="0">
-              <a:buNone/>
-            </a:pPr>
-            <a:r>
-              <a:rPr lang="en-US" sz="1500" b="1" dirty="0">
-                <a:solidFill>
-                  <a:srgbClr val="1E2761"/>
-                </a:solidFill>
-                <a:latin typeface="Calibri" pitchFamily="34" charset="0"/>
-                <a:ea typeface="Calibri" pitchFamily="34" charset="-122"/>
-                <a:cs typeface="Calibri" pitchFamily="34" charset="-120"/>
-              </a:rPr>
-              <a:t>Approve</a:t>
-            </a:r>
-            <a:endParaRPr lang="en-US" sz="1500" dirty="0"/>
-          </a:p>
-        </p:txBody>
-      </p:sp>
-      <p:sp>
-        <p:nvSpPr>
-          <p:cNvPr id="21" name="Text 19"/>
-          <p:cNvSpPr/>
-          <p:nvPr/>
-        </p:nvSpPr>
-        <p:spPr>
-          <a:xfrm>
-            <a:off x="6291072" y="1719072"/>
-            <a:ext cx="2340864" cy="950976"/>
-          </a:xfrm>
-          <a:prstGeom prst="rect">
-            <a:avLst/>
-          </a:prstGeom>
-          <a:noFill/>
-          <a:ln/>
-        </p:spPr>
-        <p:txBody>
-          <a:bodyPr wrap="square" lIns="0" tIns="0" rIns="0" bIns="0" rtlCol="0" anchor="t">
-            <a:normAutofit/>
-          </a:bodyPr>
-          <a:lstStyle/>
-          <a:p>
-            <a:pPr indent="0" marL="0">
-              <a:buNone/>
-            </a:pPr>
-            <a:r>
-              <a:rPr lang="en-US" sz="1150" dirty="0">
-                <a:solidFill>
-                  <a:srgbClr val="212121"/>
-                </a:solidFill>
-                <a:latin typeface="Calibri" pitchFamily="34" charset="0"/>
-                <a:ea typeface="Calibri" pitchFamily="34" charset="-122"/>
-                <a:cs typeface="Calibri" pitchFamily="34" charset="-120"/>
-              </a:rPr>
-              <a:t>Caller reviews tool name and arguments</a:t>
-            </a:r>
-            <a:endParaRPr lang="en-US" sz="1150" dirty="0"/>
-          </a:p>
-        </p:txBody>
-      </p:sp>
-      <p:sp>
-        <p:nvSpPr>
-          <p:cNvPr id="22" name="Shape 20"/>
-          <p:cNvSpPr/>
-          <p:nvPr/>
-        </p:nvSpPr>
-        <p:spPr>
-          <a:xfrm>
-            <a:off x="365760" y="3044952"/>
-            <a:ext cx="2633472" cy="1572768"/>
-          </a:xfrm>
-          <a:prstGeom prst="roundRect">
-            <a:avLst>
-              <a:gd name="adj" fmla="val 3488"/>
-            </a:avLst>
-          </a:prstGeom>
-          <a:solidFill>
-            <a:srgbClr val="F3F4F6"/>
-          </a:solidFill>
-          <a:ln w="10160">
-            <a:solidFill>
-              <a:srgbClr val="D1D5DB"/>
-            </a:solidFill>
-            <a:prstDash val="solid"/>
-          </a:ln>
-        </p:spPr>
-      </p:sp>
-      <p:sp>
-        <p:nvSpPr>
-          <p:cNvPr id="23" name="Shape 21"/>
-          <p:cNvSpPr/>
-          <p:nvPr/>
-        </p:nvSpPr>
-        <p:spPr>
-          <a:xfrm>
-            <a:off x="475488" y="3163824"/>
-            <a:ext cx="320040" cy="320040"/>
-          </a:xfrm>
-          <a:prstGeom prst="ellipse">
-            <a:avLst/>
-          </a:prstGeom>
-          <a:solidFill>
-            <a:srgbClr val="1E2761"/>
-          </a:solidFill>
-          <a:ln/>
-        </p:spPr>
-      </p:sp>
-      <p:sp>
-        <p:nvSpPr>
-          <p:cNvPr id="24" name="Text 22"/>
-          <p:cNvSpPr/>
-          <p:nvPr/>
-        </p:nvSpPr>
-        <p:spPr>
-          <a:xfrm>
-            <a:off x="475488" y="3214116"/>
-            <a:ext cx="320040" cy="146304"/>
-          </a:xfrm>
-          <a:prstGeom prst="rect">
-            <a:avLst/>
-          </a:prstGeom>
-          <a:noFill/>
-          <a:ln/>
-        </p:spPr>
-        <p:txBody>
-          <a:bodyPr wrap="square" lIns="0" tIns="0" rIns="0" bIns="0" rtlCol="0" anchor="ctr"/>
-          <a:lstStyle/>
-          <a:p>
-            <a:pPr algn="ctr" indent="0" marL="0">
-              <a:buNone/>
-            </a:pPr>
-            <a:r>
-              <a:rPr lang="en-US" sz="900" b="1" dirty="0">
-                <a:solidFill>
-                  <a:srgbClr val="FFFFFF"/>
-                </a:solidFill>
-                <a:latin typeface="Calibri" pitchFamily="34" charset="0"/>
-                <a:ea typeface="Calibri" pitchFamily="34" charset="-122"/>
-                <a:cs typeface="Calibri" pitchFamily="34" charset="-120"/>
-              </a:rPr>
-              <a:t>4</a:t>
-            </a:r>
-            <a:endParaRPr lang="en-US" sz="900" dirty="0"/>
-          </a:p>
-        </p:txBody>
-      </p:sp>
-      <p:sp>
-        <p:nvSpPr>
-          <p:cNvPr id="25" name="Text 23"/>
-          <p:cNvSpPr/>
-          <p:nvPr/>
-        </p:nvSpPr>
-        <p:spPr>
-          <a:xfrm>
-            <a:off x="896112" y="3163824"/>
-            <a:ext cx="1975104" cy="310896"/>
-          </a:xfrm>
-          <a:prstGeom prst="rect">
-            <a:avLst/>
-          </a:prstGeom>
-          <a:noFill/>
-          <a:ln/>
-        </p:spPr>
-        <p:txBody>
-          <a:bodyPr wrap="square" lIns="0" tIns="0" rIns="0" bIns="0" rtlCol="0" anchor="ctr">
-            <a:normAutofit/>
-          </a:bodyPr>
-          <a:lstStyle/>
-          <a:p>
-            <a:pPr indent="0" marL="0">
-              <a:buNone/>
-            </a:pPr>
-            <a:r>
-              <a:rPr lang="en-US" sz="1500" b="1" dirty="0">
-                <a:solidFill>
-                  <a:srgbClr val="1E2761"/>
-                </a:solidFill>
-                <a:latin typeface="Calibri" pitchFamily="34" charset="0"/>
-                <a:ea typeface="Calibri" pitchFamily="34" charset="-122"/>
-                <a:cs typeface="Calibri" pitchFamily="34" charset="-120"/>
-              </a:rPr>
-              <a:t>Write</a:t>
-            </a:r>
-            <a:endParaRPr lang="en-US" sz="1500" dirty="0"/>
-          </a:p>
-        </p:txBody>
-      </p:sp>
-      <p:sp>
-        <p:nvSpPr>
-          <p:cNvPr id="26" name="Text 24"/>
-          <p:cNvSpPr/>
-          <p:nvPr/>
-        </p:nvSpPr>
-        <p:spPr>
-          <a:xfrm>
-            <a:off x="512064" y="3547872"/>
-            <a:ext cx="2340864" cy="950976"/>
-          </a:xfrm>
-          <a:prstGeom prst="rect">
-            <a:avLst/>
-          </a:prstGeom>
-          <a:noFill/>
-          <a:ln/>
-        </p:spPr>
-        <p:txBody>
-          <a:bodyPr wrap="square" lIns="0" tIns="0" rIns="0" bIns="0" rtlCol="0" anchor="t">
-            <a:normAutofit/>
-          </a:bodyPr>
-          <a:lstStyle/>
-          <a:p>
-            <a:pPr indent="0" marL="0">
-              <a:buNone/>
-            </a:pPr>
-            <a:r>
-              <a:rPr lang="en-US" sz="1150" dirty="0">
-                <a:solidFill>
-                  <a:srgbClr val="212121"/>
-                </a:solidFill>
-                <a:latin typeface="Calibri" pitchFamily="34" charset="0"/>
-                <a:ea typeface="Calibri" pitchFamily="34" charset="-122"/>
-                <a:cs typeface="Calibri" pitchFamily="34" charset="-120"/>
-              </a:rPr>
-              <a:t>wit_work_item_write(action="update", ...)</a:t>
-            </a:r>
-            <a:endParaRPr lang="en-US" sz="1150" dirty="0"/>
-          </a:p>
-        </p:txBody>
-      </p:sp>
-      <p:sp>
-        <p:nvSpPr>
-          <p:cNvPr id="27" name="Shape 25"/>
-          <p:cNvSpPr/>
-          <p:nvPr/>
-        </p:nvSpPr>
-        <p:spPr>
-          <a:xfrm>
-            <a:off x="3035808" y="3721608"/>
-            <a:ext cx="164592" cy="219456"/>
-          </a:xfrm>
-          <a:prstGeom prst="chevron">
-            <a:avLst/>
-          </a:prstGeom>
-          <a:solidFill>
-            <a:srgbClr val="E8A87C"/>
-          </a:solidFill>
-          <a:ln/>
-        </p:spPr>
-      </p:sp>
-      <p:sp>
-        <p:nvSpPr>
-          <p:cNvPr id="28" name="Shape 26"/>
-          <p:cNvSpPr/>
-          <p:nvPr/>
-        </p:nvSpPr>
-        <p:spPr>
-          <a:xfrm>
-            <a:off x="3255264" y="3044952"/>
-            <a:ext cx="2633472" cy="1572768"/>
-          </a:xfrm>
-          <a:prstGeom prst="roundRect">
-            <a:avLst>
-              <a:gd name="adj" fmla="val 3488"/>
-            </a:avLst>
-          </a:prstGeom>
-          <a:solidFill>
-            <a:srgbClr val="CADCFC"/>
-          </a:solidFill>
-          <a:ln w="10160">
-            <a:solidFill>
-              <a:srgbClr val="1E2761"/>
-            </a:solidFill>
-            <a:prstDash val="solid"/>
-          </a:ln>
-        </p:spPr>
-      </p:sp>
-      <p:sp>
-        <p:nvSpPr>
-          <p:cNvPr id="29" name="Shape 27"/>
-          <p:cNvSpPr/>
-          <p:nvPr/>
-        </p:nvSpPr>
-        <p:spPr>
-          <a:xfrm>
-            <a:off x="3364992" y="3163824"/>
-            <a:ext cx="320040" cy="320040"/>
-          </a:xfrm>
-          <a:prstGeom prst="ellipse">
-            <a:avLst/>
-          </a:prstGeom>
-          <a:solidFill>
-            <a:srgbClr val="1E2761"/>
-          </a:solidFill>
-          <a:ln/>
-        </p:spPr>
-      </p:sp>
-      <p:sp>
-        <p:nvSpPr>
-          <p:cNvPr id="30" name="Text 28"/>
-          <p:cNvSpPr/>
-          <p:nvPr/>
-        </p:nvSpPr>
-        <p:spPr>
-          <a:xfrm>
-            <a:off x="3364992" y="3214116"/>
-            <a:ext cx="320040" cy="146304"/>
-          </a:xfrm>
-          <a:prstGeom prst="rect">
-            <a:avLst/>
-          </a:prstGeom>
-          <a:noFill/>
-          <a:ln/>
-        </p:spPr>
-        <p:txBody>
-          <a:bodyPr wrap="square" lIns="0" tIns="0" rIns="0" bIns="0" rtlCol="0" anchor="ctr"/>
-          <a:lstStyle/>
-          <a:p>
-            <a:pPr algn="ctr" indent="0" marL="0">
-              <a:buNone/>
-            </a:pPr>
-            <a:r>
-              <a:rPr lang="en-US" sz="900" b="1" dirty="0">
-                <a:solidFill>
-                  <a:srgbClr val="FFFFFF"/>
-                </a:solidFill>
-                <a:latin typeface="Calibri" pitchFamily="34" charset="0"/>
-                <a:ea typeface="Calibri" pitchFamily="34" charset="-122"/>
-                <a:cs typeface="Calibri" pitchFamily="34" charset="-120"/>
-              </a:rPr>
-              <a:t>5</a:t>
-            </a:r>
-            <a:endParaRPr lang="en-US" sz="900" dirty="0"/>
-          </a:p>
-        </p:txBody>
-      </p:sp>
-      <p:sp>
-        <p:nvSpPr>
-          <p:cNvPr id="31" name="Text 29"/>
-          <p:cNvSpPr/>
-          <p:nvPr/>
-        </p:nvSpPr>
-        <p:spPr>
-          <a:xfrm>
-            <a:off x="3785616" y="3163824"/>
-            <a:ext cx="1975104" cy="310896"/>
-          </a:xfrm>
-          <a:prstGeom prst="rect">
-            <a:avLst/>
-          </a:prstGeom>
-          <a:noFill/>
-          <a:ln/>
-        </p:spPr>
-        <p:txBody>
-          <a:bodyPr wrap="square" lIns="0" tIns="0" rIns="0" bIns="0" rtlCol="0" anchor="ctr">
-            <a:normAutofit/>
-          </a:bodyPr>
-          <a:lstStyle/>
-          <a:p>
-            <a:pPr indent="0" marL="0">
-              <a:buNone/>
-            </a:pPr>
-            <a:r>
-              <a:rPr lang="en-US" sz="1500" b="1" dirty="0">
-                <a:solidFill>
-                  <a:srgbClr val="1E2761"/>
-                </a:solidFill>
-                <a:latin typeface="Calibri" pitchFamily="34" charset="0"/>
-                <a:ea typeface="Calibri" pitchFamily="34" charset="-122"/>
-                <a:cs typeface="Calibri" pitchFamily="34" charset="-120"/>
-              </a:rPr>
-              <a:t>Verify</a:t>
-            </a:r>
-            <a:endParaRPr lang="en-US" sz="1500" dirty="0"/>
-          </a:p>
-        </p:txBody>
-      </p:sp>
-      <p:sp>
-        <p:nvSpPr>
-          <p:cNvPr id="32" name="Text 30"/>
-          <p:cNvSpPr/>
-          <p:nvPr/>
-        </p:nvSpPr>
-        <p:spPr>
-          <a:xfrm>
-            <a:off x="3401568" y="3547872"/>
-            <a:ext cx="2340864" cy="950976"/>
-          </a:xfrm>
-          <a:prstGeom prst="rect">
-            <a:avLst/>
-          </a:prstGeom>
-          <a:noFill/>
-          <a:ln/>
-        </p:spPr>
-        <p:txBody>
-          <a:bodyPr wrap="square" lIns="0" tIns="0" rIns="0" bIns="0" rtlCol="0" anchor="t">
-            <a:normAutofit/>
-          </a:bodyPr>
-          <a:lstStyle/>
-          <a:p>
-            <a:pPr indent="0" marL="0">
-              <a:buNone/>
-            </a:pPr>
-            <a:r>
-              <a:rPr lang="en-US" sz="1150" dirty="0">
-                <a:solidFill>
-                  <a:srgbClr val="212121"/>
-                </a:solidFill>
-                <a:latin typeface="Calibri" pitchFamily="34" charset="0"/>
-                <a:ea typeface="Calibri" pitchFamily="34" charset="-122"/>
-                <a:cs typeface="Calibri" pitchFamily="34" charset="-120"/>
-              </a:rPr>
-              <a:t>Read the item again and record the result</a:t>
-            </a:r>
-            <a:endParaRPr lang="en-US" sz="1150" dirty="0"/>
-          </a:p>
-        </p:txBody>
-      </p:sp>
-      <p:sp>
-        <p:nvSpPr>
-          <p:cNvPr id="33" name="Shape 31"/>
-          <p:cNvSpPr/>
-          <p:nvPr/>
-        </p:nvSpPr>
-        <p:spPr>
-          <a:xfrm>
-            <a:off x="365760" y="4773168"/>
-            <a:ext cx="8412480" cy="0"/>
-          </a:xfrm>
-          <a:prstGeom prst="line">
-            <a:avLst/>
-          </a:prstGeom>
-          <a:noFill/>
-          <a:ln w="6350">
-            <a:solidFill>
-              <a:srgbClr val="D1D5DB"/>
-            </a:solidFill>
-            <a:prstDash val="solid"/>
-          </a:ln>
-        </p:spPr>
-      </p:sp>
-      <p:sp>
-        <p:nvSpPr>
-          <p:cNvPr id="34" name="Text 32"/>
-          <p:cNvSpPr/>
-          <p:nvPr/>
-        </p:nvSpPr>
-        <p:spPr>
-          <a:xfrm>
-            <a:off x="384048" y="4818888"/>
-            <a:ext cx="8275320" cy="182880"/>
-          </a:xfrm>
-          <a:prstGeom prst="rect">
-            <a:avLst/>
-          </a:prstGeom>
-          <a:noFill/>
-          <a:ln/>
-        </p:spPr>
-        <p:txBody>
-          <a:bodyPr wrap="square" lIns="0" tIns="0" rIns="0" bIns="0" rtlCol="0" anchor="ctr">
-            <a:normAutofit/>
-          </a:bodyPr>
-          <a:lstStyle/>
-          <a:p>
-            <a:pPr indent="0" marL="0">
-              <a:buNone/>
-            </a:pPr>
-            <a:r>
-              <a:rPr lang="en-US" sz="820" dirty="0">
-                <a:solidFill>
-                  <a:srgbClr val="6B7280"/>
-                </a:solidFill>
-                <a:latin typeface="Calibri" pitchFamily="34" charset="0"/>
-                <a:ea typeface="Calibri" pitchFamily="34" charset="-122"/>
-                <a:cs typeface="Calibri" pitchFamily="34" charset="-120"/>
-              </a:rPr>
-              <a:t>Source: https://learn.microsoft.com/en-us/azure/devops/mcp-server/remote-mcp-server?view=azure-devops  ·  +1 in notes</a:t>
             </a:r>
             <a:endParaRPr lang="en-US" sz="820" dirty="0"/>
           </a:p>

--- a/decks/day3/module-6-azure-devops-mcp.pptx
+++ b/decks/day3/module-6-azure-devops-mcp.pptx
@@ -10637,7 +10637,7 @@
                 <a:ea typeface="Consolas" pitchFamily="34" charset="-122"/>
                 <a:cs typeface="Consolas" pitchFamily="34" charset="-120"/>
               </a:rPr>
-              <a:t>  "headers": {</a:t>
+              <a:t>  </a:t>
             </a:r>
             <a:endParaRPr lang="en-US" sz="1280" dirty="0"/>
           </a:p>
@@ -10648,17 +10648,14 @@
             <a:r>
               <a:rPr lang="en-US" sz="1280" dirty="0">
                 <a:solidFill>
-                  <a:srgbClr val="212121"/>
+                  <a:srgbClr val="1F7A4D"/>
                 </a:solidFill>
                 <a:latin typeface="Consolas" pitchFamily="34" charset="0"/>
                 <a:ea typeface="Consolas" pitchFamily="34" charset="-122"/>
                 <a:cs typeface="Consolas" pitchFamily="34" charset="-120"/>
               </a:rPr>
-              <a:t>    "X-MCP-Toolsets": "wit",</a:t>
-            </a:r>
-            <a:endParaRPr lang="en-US" sz="1280" dirty="0"/>
-          </a:p>
-          <a:p>
+              <a:t>"headers"</a:t>
+            </a:r>
             <a:pPr indent="0" marL="0">
               <a:buNone/>
             </a:pPr>
@@ -10671,8 +10668,149 @@
                 <a:ea typeface="Consolas" pitchFamily="34" charset="-122"/>
                 <a:cs typeface="Consolas" pitchFamily="34" charset="-120"/>
               </a:rPr>
-              <a:t>    "X-MCP-Readonly": "true"</a:t>
-            </a:r>
+              <a:t>: {</a:t>
+            </a:r>
+            <a:endParaRPr lang="en-US" sz="1280" dirty="0"/>
+          </a:p>
+          <a:p>
+            <a:pPr indent="0" marL="0">
+              <a:buNone/>
+            </a:pPr>
+            <a:r>
+              <a:rPr lang="en-US" sz="1280" dirty="0">
+                <a:solidFill>
+                  <a:srgbClr val="212121"/>
+                </a:solidFill>
+                <a:latin typeface="Consolas" pitchFamily="34" charset="0"/>
+                <a:ea typeface="Consolas" pitchFamily="34" charset="-122"/>
+                <a:cs typeface="Consolas" pitchFamily="34" charset="-120"/>
+              </a:rPr>
+              <a:t>    </a:t>
+            </a:r>
+            <a:endParaRPr lang="en-US" sz="1280" dirty="0"/>
+          </a:p>
+          <a:p>
+            <a:pPr indent="0" marL="0">
+              <a:buNone/>
+            </a:pPr>
+            <a:r>
+              <a:rPr lang="en-US" sz="1280" dirty="0">
+                <a:solidFill>
+                  <a:srgbClr val="1F7A4D"/>
+                </a:solidFill>
+                <a:latin typeface="Consolas" pitchFamily="34" charset="0"/>
+                <a:ea typeface="Consolas" pitchFamily="34" charset="-122"/>
+                <a:cs typeface="Consolas" pitchFamily="34" charset="-120"/>
+              </a:rPr>
+              <a:t>"X-MCP-Toolsets"</a:t>
+            </a:r>
+            <a:pPr indent="0" marL="0">
+              <a:buNone/>
+            </a:pPr>
+            <a:r>
+              <a:rPr lang="en-US" sz="1280" dirty="0">
+                <a:solidFill>
+                  <a:srgbClr val="212121"/>
+                </a:solidFill>
+                <a:latin typeface="Consolas" pitchFamily="34" charset="0"/>
+                <a:ea typeface="Consolas" pitchFamily="34" charset="-122"/>
+                <a:cs typeface="Consolas" pitchFamily="34" charset="-120"/>
+              </a:rPr>
+              <a:t>: </a:t>
+            </a:r>
+            <a:pPr indent="0" marL="0">
+              <a:buNone/>
+            </a:pPr>
+            <a:r>
+              <a:rPr lang="en-US" sz="1280" dirty="0">
+                <a:solidFill>
+                  <a:srgbClr val="1F7A4D"/>
+                </a:solidFill>
+                <a:latin typeface="Consolas" pitchFamily="34" charset="0"/>
+                <a:ea typeface="Consolas" pitchFamily="34" charset="-122"/>
+                <a:cs typeface="Consolas" pitchFamily="34" charset="-120"/>
+              </a:rPr>
+              <a:t>"wit"</a:t>
+            </a:r>
+            <a:pPr indent="0" marL="0">
+              <a:buNone/>
+            </a:pPr>
+            <a:r>
+              <a:rPr lang="en-US" sz="1280" dirty="0">
+                <a:solidFill>
+                  <a:srgbClr val="212121"/>
+                </a:solidFill>
+                <a:latin typeface="Consolas" pitchFamily="34" charset="0"/>
+                <a:ea typeface="Consolas" pitchFamily="34" charset="-122"/>
+                <a:cs typeface="Consolas" pitchFamily="34" charset="-120"/>
+              </a:rPr>
+              <a:t>,</a:t>
+            </a:r>
+            <a:endParaRPr lang="en-US" sz="1280" dirty="0"/>
+          </a:p>
+          <a:p>
+            <a:pPr indent="0" marL="0">
+              <a:buNone/>
+            </a:pPr>
+            <a:r>
+              <a:rPr lang="en-US" sz="1280" dirty="0">
+                <a:solidFill>
+                  <a:srgbClr val="212121"/>
+                </a:solidFill>
+                <a:latin typeface="Consolas" pitchFamily="34" charset="0"/>
+                <a:ea typeface="Consolas" pitchFamily="34" charset="-122"/>
+                <a:cs typeface="Consolas" pitchFamily="34" charset="-120"/>
+              </a:rPr>
+              <a:t>    </a:t>
+            </a:r>
+            <a:endParaRPr lang="en-US" sz="1280" dirty="0"/>
+          </a:p>
+          <a:p>
+            <a:pPr indent="0" marL="0">
+              <a:buNone/>
+            </a:pPr>
+            <a:r>
+              <a:rPr lang="en-US" sz="1280" dirty="0">
+                <a:solidFill>
+                  <a:srgbClr val="1F7A4D"/>
+                </a:solidFill>
+                <a:latin typeface="Consolas" pitchFamily="34" charset="0"/>
+                <a:ea typeface="Consolas" pitchFamily="34" charset="-122"/>
+                <a:cs typeface="Consolas" pitchFamily="34" charset="-120"/>
+              </a:rPr>
+              <a:t>"X-MCP-Readonly"</a:t>
+            </a:r>
+            <a:pPr indent="0" marL="0">
+              <a:buNone/>
+            </a:pPr>
+            <a:r>
+              <a:rPr lang="en-US" sz="1280" dirty="0">
+                <a:solidFill>
+                  <a:srgbClr val="212121"/>
+                </a:solidFill>
+                <a:latin typeface="Consolas" pitchFamily="34" charset="0"/>
+                <a:ea typeface="Consolas" pitchFamily="34" charset="-122"/>
+                <a:cs typeface="Consolas" pitchFamily="34" charset="-120"/>
+              </a:rPr>
+              <a:t>: </a:t>
+            </a:r>
+            <a:pPr indent="0" marL="0">
+              <a:buNone/>
+            </a:pPr>
+            <a:r>
+              <a:rPr lang="en-US" sz="1280" dirty="0">
+                <a:solidFill>
+                  <a:srgbClr val="1F7A4D"/>
+                </a:solidFill>
+                <a:latin typeface="Consolas" pitchFamily="34" charset="0"/>
+                <a:ea typeface="Consolas" pitchFamily="34" charset="-122"/>
+                <a:cs typeface="Consolas" pitchFamily="34" charset="-120"/>
+              </a:rPr>
+              <a:t>"true"</a:t>
+            </a:r>
+            <a:pPr indent="0" marL="0">
+              <a:buNone/>
+            </a:pPr>
             <a:endParaRPr lang="en-US" sz="1280" dirty="0"/>
           </a:p>
           <a:p>

--- a/decks/day3/module-6-azure-devops-mcp.pptx
+++ b/decks/day3/module-6-azure-devops-mcp.pptx
@@ -9829,11 +9829,11 @@
             <a:avLst/>
           </a:prstGeom>
           <a:solidFill>
-            <a:srgbClr val="F3F4F6"/>
+            <a:srgbClr val="1D1E22"/>
           </a:solidFill>
-          <a:ln w="6350">
+          <a:ln w="9525">
             <a:solidFill>
-              <a:srgbClr val="D1D5DB"/>
+              <a:srgbClr val="2A2B2E"/>
             </a:solidFill>
             <a:prstDash val="solid"/>
           </a:ln>
@@ -9866,7 +9866,7 @@
             <a:r>
               <a:rPr lang="en-US" sz="1280" dirty="0">
                 <a:solidFill>
-                  <a:srgbClr val="212121"/>
+                  <a:srgbClr val="FFFFFF"/>
                 </a:solidFill>
                 <a:latin typeface="Consolas" pitchFamily="34" charset="0"/>
                 <a:ea typeface="Consolas" pitchFamily="34" charset="-122"/>
@@ -10577,11 +10577,11 @@
             <a:avLst/>
           </a:prstGeom>
           <a:solidFill>
-            <a:srgbClr val="F3F4F6"/>
+            <a:srgbClr val="1D1E22"/>
           </a:solidFill>
-          <a:ln w="6350">
+          <a:ln w="9525">
             <a:solidFill>
-              <a:srgbClr val="D1D5DB"/>
+              <a:srgbClr val="2A2B2E"/>
             </a:solidFill>
             <a:prstDash val="solid"/>
           </a:ln>
@@ -10614,7 +10614,7 @@
             <a:r>
               <a:rPr lang="en-US" sz="1280" dirty="0">
                 <a:solidFill>
-                  <a:srgbClr val="212121"/>
+                  <a:srgbClr val="FFFFFF"/>
                 </a:solidFill>
                 <a:latin typeface="Consolas" pitchFamily="34" charset="0"/>
                 <a:ea typeface="Consolas" pitchFamily="34" charset="-122"/>
@@ -10631,7 +10631,7 @@
             <a:r>
               <a:rPr lang="en-US" sz="1280" dirty="0">
                 <a:solidFill>
-                  <a:srgbClr val="212121"/>
+                  <a:srgbClr val="FFFFFF"/>
                 </a:solidFill>
                 <a:latin typeface="Consolas" pitchFamily="34" charset="0"/>
                 <a:ea typeface="Consolas" pitchFamily="34" charset="-122"/>
@@ -10648,7 +10648,7 @@
             <a:r>
               <a:rPr lang="en-US" sz="1280" dirty="0">
                 <a:solidFill>
-                  <a:srgbClr val="1F7A4D"/>
+                  <a:srgbClr val="E4C98A"/>
                 </a:solidFill>
                 <a:latin typeface="Consolas" pitchFamily="34" charset="0"/>
                 <a:ea typeface="Consolas" pitchFamily="34" charset="-122"/>
@@ -10662,7 +10662,7 @@
             <a:r>
               <a:rPr lang="en-US" sz="1280" dirty="0">
                 <a:solidFill>
-                  <a:srgbClr val="212121"/>
+                  <a:srgbClr val="FFFFFF"/>
                 </a:solidFill>
                 <a:latin typeface="Consolas" pitchFamily="34" charset="0"/>
                 <a:ea typeface="Consolas" pitchFamily="34" charset="-122"/>
@@ -10679,7 +10679,7 @@
             <a:r>
               <a:rPr lang="en-US" sz="1280" dirty="0">
                 <a:solidFill>
-                  <a:srgbClr val="212121"/>
+                  <a:srgbClr val="FFFFFF"/>
                 </a:solidFill>
                 <a:latin typeface="Consolas" pitchFamily="34" charset="0"/>
                 <a:ea typeface="Consolas" pitchFamily="34" charset="-122"/>
@@ -10696,7 +10696,7 @@
             <a:r>
               <a:rPr lang="en-US" sz="1280" dirty="0">
                 <a:solidFill>
-                  <a:srgbClr val="1F7A4D"/>
+                  <a:srgbClr val="E4C98A"/>
                 </a:solidFill>
                 <a:latin typeface="Consolas" pitchFamily="34" charset="0"/>
                 <a:ea typeface="Consolas" pitchFamily="34" charset="-122"/>
@@ -10710,7 +10710,7 @@
             <a:r>
               <a:rPr lang="en-US" sz="1280" dirty="0">
                 <a:solidFill>
-                  <a:srgbClr val="212121"/>
+                  <a:srgbClr val="FFFFFF"/>
                 </a:solidFill>
                 <a:latin typeface="Consolas" pitchFamily="34" charset="0"/>
                 <a:ea typeface="Consolas" pitchFamily="34" charset="-122"/>
@@ -10724,7 +10724,7 @@
             <a:r>
               <a:rPr lang="en-US" sz="1280" dirty="0">
                 <a:solidFill>
-                  <a:srgbClr val="1F7A4D"/>
+                  <a:srgbClr val="E4C98A"/>
                 </a:solidFill>
                 <a:latin typeface="Consolas" pitchFamily="34" charset="0"/>
                 <a:ea typeface="Consolas" pitchFamily="34" charset="-122"/>
@@ -10738,7 +10738,7 @@
             <a:r>
               <a:rPr lang="en-US" sz="1280" dirty="0">
                 <a:solidFill>
-                  <a:srgbClr val="212121"/>
+                  <a:srgbClr val="FFFFFF"/>
                 </a:solidFill>
                 <a:latin typeface="Consolas" pitchFamily="34" charset="0"/>
                 <a:ea typeface="Consolas" pitchFamily="34" charset="-122"/>
@@ -10755,7 +10755,7 @@
             <a:r>
               <a:rPr lang="en-US" sz="1280" dirty="0">
                 <a:solidFill>
-                  <a:srgbClr val="212121"/>
+                  <a:srgbClr val="FFFFFF"/>
                 </a:solidFill>
                 <a:latin typeface="Consolas" pitchFamily="34" charset="0"/>
                 <a:ea typeface="Consolas" pitchFamily="34" charset="-122"/>
@@ -10772,7 +10772,7 @@
             <a:r>
               <a:rPr lang="en-US" sz="1280" dirty="0">
                 <a:solidFill>
-                  <a:srgbClr val="1F7A4D"/>
+                  <a:srgbClr val="E4C98A"/>
                 </a:solidFill>
                 <a:latin typeface="Consolas" pitchFamily="34" charset="0"/>
                 <a:ea typeface="Consolas" pitchFamily="34" charset="-122"/>
@@ -10786,7 +10786,7 @@
             <a:r>
               <a:rPr lang="en-US" sz="1280" dirty="0">
                 <a:solidFill>
-                  <a:srgbClr val="212121"/>
+                  <a:srgbClr val="FFFFFF"/>
                 </a:solidFill>
                 <a:latin typeface="Consolas" pitchFamily="34" charset="0"/>
                 <a:ea typeface="Consolas" pitchFamily="34" charset="-122"/>
@@ -10800,7 +10800,7 @@
             <a:r>
               <a:rPr lang="en-US" sz="1280" dirty="0">
                 <a:solidFill>
-                  <a:srgbClr val="1F7A4D"/>
+                  <a:srgbClr val="E4C98A"/>
                 </a:solidFill>
                 <a:latin typeface="Consolas" pitchFamily="34" charset="0"/>
                 <a:ea typeface="Consolas" pitchFamily="34" charset="-122"/>
@@ -10820,7 +10820,7 @@
             <a:r>
               <a:rPr lang="en-US" sz="1280" dirty="0">
                 <a:solidFill>
-                  <a:srgbClr val="212121"/>
+                  <a:srgbClr val="FFFFFF"/>
                 </a:solidFill>
                 <a:latin typeface="Consolas" pitchFamily="34" charset="0"/>
                 <a:ea typeface="Consolas" pitchFamily="34" charset="-122"/>
@@ -10837,7 +10837,7 @@
             <a:r>
               <a:rPr lang="en-US" sz="1280" dirty="0">
                 <a:solidFill>
-                  <a:srgbClr val="212121"/>
+                  <a:srgbClr val="FFFFFF"/>
                 </a:solidFill>
                 <a:latin typeface="Consolas" pitchFamily="34" charset="0"/>
                 <a:ea typeface="Consolas" pitchFamily="34" charset="-122"/>

--- a/decks/day3/module-6-azure-devops-mcp.pptx
+++ b/decks/day3/module-6-azure-devops-mcp.pptx
@@ -2255,7 +2255,7 @@
                 <a:ea typeface="Calibri" pitchFamily="34" charset="-122"/>
                 <a:cs typeface="Calibri" pitchFamily="34" charset="-120"/>
               </a:rPr>
-              <a:t>Use the GA hosted server with read-first controls and Foundry-managed continuity</a:t>
+              <a:t>Use the hosted server with read-first controls and Foundry-managed continuity</a:t>
             </a:r>
             <a:endParaRPr lang="en-US" sz="1800" dirty="0"/>
           </a:p>
@@ -6921,7 +6921,7 @@
             <a:avLst/>
           </a:prstGeom>
           <a:solidFill>
-            <a:srgbClr val="CADCFC"/>
+            <a:srgbClr val="F3F4F6"/>
           </a:solidFill>
           <a:ln w="6350">
             <a:solidFill>
@@ -7215,7 +7215,7 @@
               <a:buNone/>
             </a:pPr>
             <a:r>
-              <a:rPr lang="en-US" sz="2500" b="1" dirty="0">
+              <a:rPr lang="en-US" sz="2800" b="1" dirty="0">
                 <a:solidFill>
                   <a:srgbClr val="1E2761"/>
                 </a:solidFill>
@@ -7223,9 +7223,9 @@
                 <a:ea typeface="Calibri" pitchFamily="34" charset="-122"/>
                 <a:cs typeface="Calibri" pitchFamily="34" charset="-120"/>
               </a:rPr>
-              <a:t>Keep the two status labels separate</a:t>
-            </a:r>
-            <a:endParaRPr lang="en-US" sz="2500" dirty="0"/>
+              <a:t>Wwo status labels</a:t>
+            </a:r>
+            <a:endParaRPr lang="en-US" sz="2800" dirty="0"/>
           </a:p>
         </p:txBody>
       </p:sp>
@@ -9174,7 +9174,7 @@
                 <a:ea typeface="Calibri" pitchFamily="34" charset="-122"/>
                 <a:cs typeface="Calibri" pitchFamily="34" charset="-120"/>
               </a:rPr>
-              <a:t>Prerequisites are specific</a:t>
+              <a:t>Prerequisites</a:t>
             </a:r>
             <a:endParaRPr lang="en-US" sz="2800" dirty="0"/>
           </a:p>
@@ -9182,41 +9182,14 @@
       </p:sp>
       <p:sp>
         <p:nvSpPr>
-          <p:cNvPr id="5" name="Shape 3"/>
-          <p:cNvSpPr/>
-          <p:nvPr/>
-        </p:nvSpPr>
-        <p:spPr>
-          <a:xfrm>
-            <a:off x="365760" y="1078992"/>
-            <a:ext cx="4105656" cy="1655064"/>
-          </a:xfrm>
-          <a:prstGeom prst="roundRect">
-            <a:avLst>
-              <a:gd name="adj" fmla="val 3315"/>
-            </a:avLst>
-          </a:prstGeom>
-          <a:solidFill>
-            <a:srgbClr val="CADCFC"/>
-          </a:solidFill>
-          <a:ln w="10160">
-            <a:solidFill>
-              <a:srgbClr val="1E2761"/>
-            </a:solidFill>
-            <a:prstDash val="solid"/>
-          </a:ln>
-        </p:spPr>
-      </p:sp>
-      <p:sp>
-        <p:nvSpPr>
-          <p:cNvPr id="6" name="Text 4"/>
-          <p:cNvSpPr/>
-          <p:nvPr/>
-        </p:nvSpPr>
-        <p:spPr>
-          <a:xfrm>
-            <a:off x="512064" y="1197864"/>
-            <a:ext cx="3813048" cy="310896"/>
+          <p:cNvPr id="5" name="Text 3"/>
+          <p:cNvSpPr/>
+          <p:nvPr/>
+        </p:nvSpPr>
+        <p:spPr>
+          <a:xfrm>
+            <a:off x="502920" y="1170432"/>
+            <a:ext cx="7955280" cy="3520440"/>
           </a:xfrm>
           <a:prstGeom prst="rect">
             <a:avLst/>
@@ -9225,16 +9198,20 @@
           <a:ln/>
         </p:spPr>
         <p:txBody>
-          <a:bodyPr wrap="square" lIns="0" tIns="0" rIns="0" bIns="0" rtlCol="0" anchor="ctr">
+          <a:bodyPr wrap="square" lIns="0" tIns="0" rIns="0" bIns="0" rtlCol="0" anchor="t">
             <a:normAutofit/>
           </a:bodyPr>
           <a:lstStyle/>
           <a:p>
-            <a:pPr indent="0" marL="0">
-              <a:buNone/>
-            </a:pPr>
-            <a:r>
-              <a:rPr lang="en-US" sz="1500" b="1" dirty="0">
+            <a:pPr marL="342900" indent="-342900">
+              <a:spcAft>
+                <a:spcPts val="1000"/>
+              </a:spcAft>
+              <a:buSzPct val="100000"/>
+              <a:buChar char="•"/>
+            </a:pPr>
+            <a:r>
+              <a:rPr lang="en-US" sz="1600" b="1" dirty="0">
                 <a:solidFill>
                   <a:srgbClr val="1E2761"/>
                 </a:solidFill>
@@ -9244,38 +9221,14 @@
               </a:rPr>
               <a:t>Azure DevOps Services</a:t>
             </a:r>
-            <a:endParaRPr lang="en-US" sz="1500" dirty="0"/>
-          </a:p>
-        </p:txBody>
-      </p:sp>
-      <p:sp>
-        <p:nvSpPr>
-          <p:cNvPr id="7" name="Text 5"/>
-          <p:cNvSpPr/>
-          <p:nvPr/>
-        </p:nvSpPr>
-        <p:spPr>
-          <a:xfrm>
-            <a:off x="512064" y="1581912"/>
-            <a:ext cx="3813048" cy="1033272"/>
-          </a:xfrm>
-          <a:prstGeom prst="rect">
-            <a:avLst/>
-          </a:prstGeom>
-          <a:noFill/>
-          <a:ln/>
-        </p:spPr>
-        <p:txBody>
-          <a:bodyPr wrap="square" lIns="0" tIns="0" rIns="0" bIns="0" rtlCol="0" anchor="t">
-            <a:normAutofit/>
-          </a:bodyPr>
-          <a:lstStyle/>
-          <a:p>
             <a:pPr indent="0" marL="0">
+              <a:spcAft>
+                <a:spcPts val="1000"/>
+              </a:spcAft>
               <a:buNone/>
             </a:pPr>
             <a:r>
-              <a:rPr lang="en-US" sz="1150" dirty="0">
+              <a:rPr lang="en-US" sz="1600" dirty="0">
                 <a:solidFill>
                   <a:srgbClr val="212121"/>
                 </a:solidFill>
@@ -9283,67 +9236,20 @@
                 <a:ea typeface="Calibri" pitchFamily="34" charset="-122"/>
                 <a:cs typeface="Calibri" pitchFamily="34" charset="-120"/>
               </a:rPr>
-              <a:t>Active organization backed by Microsoft Entra</a:t>
-            </a:r>
-            <a:endParaRPr lang="en-US" sz="1150" dirty="0"/>
-          </a:p>
-        </p:txBody>
-      </p:sp>
-      <p:sp>
-        <p:nvSpPr>
-          <p:cNvPr id="8" name="Shape 6"/>
-          <p:cNvSpPr/>
-          <p:nvPr/>
-        </p:nvSpPr>
-        <p:spPr>
-          <a:xfrm>
-            <a:off x="4672584" y="1078992"/>
-            <a:ext cx="4105656" cy="1655064"/>
-          </a:xfrm>
-          <a:prstGeom prst="roundRect">
-            <a:avLst>
-              <a:gd name="adj" fmla="val 3315"/>
-            </a:avLst>
-          </a:prstGeom>
-          <a:solidFill>
-            <a:srgbClr val="F3F4F6"/>
-          </a:solidFill>
-          <a:ln w="10160">
-            <a:solidFill>
-              <a:srgbClr val="D1D5DB"/>
-            </a:solidFill>
-            <a:prstDash val="solid"/>
-          </a:ln>
-        </p:spPr>
-      </p:sp>
-      <p:sp>
-        <p:nvSpPr>
-          <p:cNvPr id="9" name="Text 7"/>
-          <p:cNvSpPr/>
-          <p:nvPr/>
-        </p:nvSpPr>
-        <p:spPr>
-          <a:xfrm>
-            <a:off x="4818888" y="1197864"/>
-            <a:ext cx="3813048" cy="310896"/>
-          </a:xfrm>
-          <a:prstGeom prst="rect">
-            <a:avLst/>
-          </a:prstGeom>
-          <a:noFill/>
-          <a:ln/>
-        </p:spPr>
-        <p:txBody>
-          <a:bodyPr wrap="square" lIns="0" tIns="0" rIns="0" bIns="0" rtlCol="0" anchor="ctr">
-            <a:normAutofit/>
-          </a:bodyPr>
-          <a:lstStyle/>
-          <a:p>
-            <a:pPr indent="0" marL="0">
-              <a:buNone/>
-            </a:pPr>
-            <a:r>
-              <a:rPr lang="en-US" sz="1500" b="1" dirty="0">
+              <a:t>  —  Active organization backed by Microsoft Entra</a:t>
+            </a:r>
+            <a:endParaRPr lang="en-US" sz="1600" dirty="0"/>
+          </a:p>
+          <a:p>
+            <a:pPr marL="342900" indent="-342900">
+              <a:spcAft>
+                <a:spcPts val="1000"/>
+              </a:spcAft>
+              <a:buSzPct val="100000"/>
+              <a:buChar char="•"/>
+            </a:pPr>
+            <a:r>
+              <a:rPr lang="en-US" sz="1600" b="1" dirty="0">
                 <a:solidFill>
                   <a:srgbClr val="1E2761"/>
                 </a:solidFill>
@@ -9353,38 +9259,14 @@
               </a:rPr>
               <a:t>Not supported</a:t>
             </a:r>
-            <a:endParaRPr lang="en-US" sz="1500" dirty="0"/>
-          </a:p>
-        </p:txBody>
-      </p:sp>
-      <p:sp>
-        <p:nvSpPr>
-          <p:cNvPr id="10" name="Text 8"/>
-          <p:cNvSpPr/>
-          <p:nvPr/>
-        </p:nvSpPr>
-        <p:spPr>
-          <a:xfrm>
-            <a:off x="4818888" y="1581912"/>
-            <a:ext cx="3813048" cy="1033272"/>
-          </a:xfrm>
-          <a:prstGeom prst="rect">
-            <a:avLst/>
-          </a:prstGeom>
-          <a:noFill/>
-          <a:ln/>
-        </p:spPr>
-        <p:txBody>
-          <a:bodyPr wrap="square" lIns="0" tIns="0" rIns="0" bIns="0" rtlCol="0" anchor="t">
-            <a:normAutofit/>
-          </a:bodyPr>
-          <a:lstStyle/>
-          <a:p>
             <a:pPr indent="0" marL="0">
+              <a:spcAft>
+                <a:spcPts val="1000"/>
+              </a:spcAft>
               <a:buNone/>
             </a:pPr>
             <a:r>
-              <a:rPr lang="en-US" sz="1150" dirty="0">
+              <a:rPr lang="en-US" sz="1600" dirty="0">
                 <a:solidFill>
                   <a:srgbClr val="212121"/>
                 </a:solidFill>
@@ -9392,67 +9274,20 @@
                 <a:ea typeface="Calibri" pitchFamily="34" charset="-122"/>
                 <a:cs typeface="Calibri" pitchFamily="34" charset="-120"/>
               </a:rPr>
-              <a:t>Standalone MSA organizations</a:t>
-            </a:r>
-            <a:endParaRPr lang="en-US" sz="1150" dirty="0"/>
-          </a:p>
-        </p:txBody>
-      </p:sp>
-      <p:sp>
-        <p:nvSpPr>
-          <p:cNvPr id="11" name="Shape 9"/>
-          <p:cNvSpPr/>
-          <p:nvPr/>
-        </p:nvSpPr>
-        <p:spPr>
-          <a:xfrm>
-            <a:off x="365760" y="2935224"/>
-            <a:ext cx="4105656" cy="1655064"/>
-          </a:xfrm>
-          <a:prstGeom prst="roundRect">
-            <a:avLst>
-              <a:gd name="adj" fmla="val 3315"/>
-            </a:avLst>
-          </a:prstGeom>
-          <a:solidFill>
-            <a:srgbClr val="F3F4F6"/>
-          </a:solidFill>
-          <a:ln w="10160">
-            <a:solidFill>
-              <a:srgbClr val="D1D5DB"/>
-            </a:solidFill>
-            <a:prstDash val="solid"/>
-          </a:ln>
-        </p:spPr>
-      </p:sp>
-      <p:sp>
-        <p:nvSpPr>
-          <p:cNvPr id="12" name="Text 10"/>
-          <p:cNvSpPr/>
-          <p:nvPr/>
-        </p:nvSpPr>
-        <p:spPr>
-          <a:xfrm>
-            <a:off x="512064" y="3054096"/>
-            <a:ext cx="3813048" cy="310896"/>
-          </a:xfrm>
-          <a:prstGeom prst="rect">
-            <a:avLst/>
-          </a:prstGeom>
-          <a:noFill/>
-          <a:ln/>
-        </p:spPr>
-        <p:txBody>
-          <a:bodyPr wrap="square" lIns="0" tIns="0" rIns="0" bIns="0" rtlCol="0" anchor="ctr">
-            <a:normAutofit/>
-          </a:bodyPr>
-          <a:lstStyle/>
-          <a:p>
-            <a:pPr indent="0" marL="0">
-              <a:buNone/>
-            </a:pPr>
-            <a:r>
-              <a:rPr lang="en-US" sz="1500" b="1" dirty="0">
+              <a:t>  —  Standalone MSA organizations</a:t>
+            </a:r>
+            <a:endParaRPr lang="en-US" sz="1600" dirty="0"/>
+          </a:p>
+          <a:p>
+            <a:pPr marL="342900" indent="-342900">
+              <a:spcAft>
+                <a:spcPts val="1000"/>
+              </a:spcAft>
+              <a:buSzPct val="100000"/>
+              <a:buChar char="•"/>
+            </a:pPr>
+            <a:r>
+              <a:rPr lang="en-US" sz="1600" b="1" dirty="0">
                 <a:solidFill>
                   <a:srgbClr val="1E2761"/>
                 </a:solidFill>
@@ -9462,38 +9297,14 @@
               </a:rPr>
               <a:t>Not the target</a:t>
             </a:r>
-            <a:endParaRPr lang="en-US" sz="1500" dirty="0"/>
-          </a:p>
-        </p:txBody>
-      </p:sp>
-      <p:sp>
-        <p:nvSpPr>
-          <p:cNvPr id="13" name="Text 11"/>
-          <p:cNvSpPr/>
-          <p:nvPr/>
-        </p:nvSpPr>
-        <p:spPr>
-          <a:xfrm>
-            <a:off x="512064" y="3438144"/>
-            <a:ext cx="3813048" cy="1033272"/>
-          </a:xfrm>
-          <a:prstGeom prst="rect">
-            <a:avLst/>
-          </a:prstGeom>
-          <a:noFill/>
-          <a:ln/>
-        </p:spPr>
-        <p:txBody>
-          <a:bodyPr wrap="square" lIns="0" tIns="0" rIns="0" bIns="0" rtlCol="0" anchor="t">
-            <a:normAutofit/>
-          </a:bodyPr>
-          <a:lstStyle/>
-          <a:p>
             <a:pPr indent="0" marL="0">
+              <a:spcAft>
+                <a:spcPts val="1000"/>
+              </a:spcAft>
               <a:buNone/>
             </a:pPr>
             <a:r>
-              <a:rPr lang="en-US" sz="1150" dirty="0">
+              <a:rPr lang="en-US" sz="1600" dirty="0">
                 <a:solidFill>
                   <a:srgbClr val="212121"/>
                 </a:solidFill>
@@ -9501,67 +9312,20 @@
                 <a:ea typeface="Calibri" pitchFamily="34" charset="-122"/>
                 <a:cs typeface="Calibri" pitchFamily="34" charset="-120"/>
               </a:rPr>
-              <a:t>On-premises Azure DevOps Server</a:t>
-            </a:r>
-            <a:endParaRPr lang="en-US" sz="1150" dirty="0"/>
-          </a:p>
-        </p:txBody>
-      </p:sp>
-      <p:sp>
-        <p:nvSpPr>
-          <p:cNvPr id="14" name="Shape 12"/>
-          <p:cNvSpPr/>
-          <p:nvPr/>
-        </p:nvSpPr>
-        <p:spPr>
-          <a:xfrm>
-            <a:off x="4672584" y="2935224"/>
-            <a:ext cx="4105656" cy="1655064"/>
-          </a:xfrm>
-          <a:prstGeom prst="roundRect">
-            <a:avLst>
-              <a:gd name="adj" fmla="val 3315"/>
-            </a:avLst>
-          </a:prstGeom>
-          <a:solidFill>
-            <a:srgbClr val="F3F4F6"/>
-          </a:solidFill>
-          <a:ln w="10160">
-            <a:solidFill>
-              <a:srgbClr val="D1D5DB"/>
-            </a:solidFill>
-            <a:prstDash val="solid"/>
-          </a:ln>
-        </p:spPr>
-      </p:sp>
-      <p:sp>
-        <p:nvSpPr>
-          <p:cNvPr id="15" name="Text 13"/>
-          <p:cNvSpPr/>
-          <p:nvPr/>
-        </p:nvSpPr>
-        <p:spPr>
-          <a:xfrm>
-            <a:off x="4818888" y="3054096"/>
-            <a:ext cx="3813048" cy="310896"/>
-          </a:xfrm>
-          <a:prstGeom prst="rect">
-            <a:avLst/>
-          </a:prstGeom>
-          <a:noFill/>
-          <a:ln/>
-        </p:spPr>
-        <p:txBody>
-          <a:bodyPr wrap="square" lIns="0" tIns="0" rIns="0" bIns="0" rtlCol="0" anchor="ctr">
-            <a:normAutofit/>
-          </a:bodyPr>
-          <a:lstStyle/>
-          <a:p>
-            <a:pPr indent="0" marL="0">
-              <a:buNone/>
-            </a:pPr>
-            <a:r>
-              <a:rPr lang="en-US" sz="1500" b="1" dirty="0">
+              <a:t>  —  On-premises Azure DevOps Server</a:t>
+            </a:r>
+            <a:endParaRPr lang="en-US" sz="1600" dirty="0"/>
+          </a:p>
+          <a:p>
+            <a:pPr marL="342900" indent="-342900">
+              <a:spcAft>
+                <a:spcPts val="1000"/>
+              </a:spcAft>
+              <a:buSzPct val="100000"/>
+              <a:buChar char="•"/>
+            </a:pPr>
+            <a:r>
+              <a:rPr lang="en-US" sz="1600" b="1" dirty="0">
                 <a:solidFill>
                   <a:srgbClr val="1E2761"/>
                 </a:solidFill>
@@ -9571,38 +9335,14 @@
               </a:rPr>
               <a:t>Permissions</a:t>
             </a:r>
-            <a:endParaRPr lang="en-US" sz="1500" dirty="0"/>
-          </a:p>
-        </p:txBody>
-      </p:sp>
-      <p:sp>
-        <p:nvSpPr>
-          <p:cNvPr id="16" name="Text 14"/>
-          <p:cNvSpPr/>
-          <p:nvPr/>
-        </p:nvSpPr>
-        <p:spPr>
-          <a:xfrm>
-            <a:off x="4818888" y="3438144"/>
-            <a:ext cx="3813048" cy="1033272"/>
-          </a:xfrm>
-          <a:prstGeom prst="rect">
-            <a:avLst/>
-          </a:prstGeom>
-          <a:noFill/>
-          <a:ln/>
-        </p:spPr>
-        <p:txBody>
-          <a:bodyPr wrap="square" lIns="0" tIns="0" rIns="0" bIns="0" rtlCol="0" anchor="t">
-            <a:normAutofit/>
-          </a:bodyPr>
-          <a:lstStyle/>
-          <a:p>
             <a:pPr indent="0" marL="0">
+              <a:spcAft>
+                <a:spcPts val="1000"/>
+              </a:spcAft>
               <a:buNone/>
             </a:pPr>
             <a:r>
-              <a:rPr lang="en-US" sz="1150" dirty="0">
+              <a:rPr lang="en-US" sz="1600" dirty="0">
                 <a:solidFill>
                   <a:srgbClr val="212121"/>
                 </a:solidFill>
@@ -9610,15 +9350,15 @@
                 <a:ea typeface="Calibri" pitchFamily="34" charset="-122"/>
                 <a:cs typeface="Calibri" pitchFamily="34" charset="-120"/>
               </a:rPr>
-              <a:t>Membership and access to every queried or changed resource</a:t>
-            </a:r>
-            <a:endParaRPr lang="en-US" sz="1150" dirty="0"/>
-          </a:p>
-        </p:txBody>
-      </p:sp>
-      <p:sp>
-        <p:nvSpPr>
-          <p:cNvPr id="17" name="Shape 15"/>
+              <a:t>  —  Membership and access to every queried or changed resource</a:t>
+            </a:r>
+            <a:endParaRPr lang="en-US" sz="1600" dirty="0"/>
+          </a:p>
+        </p:txBody>
+      </p:sp>
+      <p:sp>
+        <p:nvSpPr>
+          <p:cNvPr id="6" name="Shape 4"/>
           <p:cNvSpPr/>
           <p:nvPr/>
         </p:nvSpPr>
@@ -9641,7 +9381,7 @@
       </p:sp>
       <p:sp>
         <p:nvSpPr>
-          <p:cNvPr id="18" name="Text 16"/>
+          <p:cNvPr id="7" name="Text 5"/>
           <p:cNvSpPr/>
           <p:nvPr/>
         </p:nvSpPr>
@@ -9857,7 +9597,9 @@
           <a:ln/>
         </p:spPr>
         <p:txBody>
-          <a:bodyPr wrap="square" lIns="0" tIns="0" rIns="0" bIns="0" rtlCol="0" anchor="t"/>
+          <a:bodyPr wrap="square" lIns="0" tIns="0" rIns="0" bIns="0" rtlCol="0" anchor="t">
+            <a:normAutofit/>
+          </a:bodyPr>
           <a:lstStyle/>
           <a:p>
             <a:pPr indent="0" marL="0">
@@ -10062,7 +9804,7 @@
               <a:buNone/>
             </a:pPr>
             <a:r>
-              <a:rPr lang="en-US" sz="2500" b="1" dirty="0">
+              <a:rPr lang="en-US" sz="2800" b="1" dirty="0">
                 <a:solidFill>
                   <a:srgbClr val="1E2761"/>
                 </a:solidFill>
@@ -10070,9 +9812,9 @@
                 <a:ea typeface="Calibri" pitchFamily="34" charset="-122"/>
                 <a:cs typeface="Calibri" pitchFamily="34" charset="-120"/>
               </a:rPr>
-              <a:t>Filter broad toolsets or exact tools</a:t>
-            </a:r>
-            <a:endParaRPr lang="en-US" sz="2500" dirty="0"/>
+              <a:t>Filter by toolsets or exact tools</a:t>
+            </a:r>
+            <a:endParaRPr lang="en-US" sz="2800" dirty="0"/>
           </a:p>
         </p:txBody>
       </p:sp>
@@ -10605,7 +10347,9 @@
           <a:ln/>
         </p:spPr>
         <p:txBody>
-          <a:bodyPr wrap="square" lIns="0" tIns="0" rIns="0" bIns="0" rtlCol="0" anchor="t"/>
+          <a:bodyPr wrap="square" lIns="0" tIns="0" rIns="0" bIns="0" rtlCol="0" anchor="t">
+            <a:normAutofit/>
+          </a:bodyPr>
           <a:lstStyle/>
           <a:p>
             <a:pPr indent="0" marL="0">
@@ -10639,9 +10383,6 @@
               </a:rPr>
               <a:t>  </a:t>
             </a:r>
-            <a:endParaRPr lang="en-US" sz="1280" dirty="0"/>
-          </a:p>
-          <a:p>
             <a:pPr indent="0" marL="0">
               <a:buNone/>
             </a:pPr>
@@ -10687,9 +10428,6 @@
               </a:rPr>
               <a:t>    </a:t>
             </a:r>
-            <a:endParaRPr lang="en-US" sz="1280" dirty="0"/>
-          </a:p>
-          <a:p>
             <a:pPr indent="0" marL="0">
               <a:buNone/>
             </a:pPr>
@@ -10763,9 +10501,6 @@
               </a:rPr>
               <a:t>    </a:t>
             </a:r>
-            <a:endParaRPr lang="en-US" sz="1280" dirty="0"/>
-          </a:p>
-          <a:p>
             <a:pPr indent="0" marL="0">
               <a:buNone/>
             </a:pPr>
@@ -10808,9 +10543,6 @@
               </a:rPr>
               <a:t>"true"</a:t>
             </a:r>
-            <a:pPr indent="0" marL="0">
-              <a:buNone/>
-            </a:pPr>
             <a:endParaRPr lang="en-US" sz="1280" dirty="0"/>
           </a:p>
           <a:p>
@@ -11394,7 +11126,7 @@
                 <a:ea typeface="Calibri" pitchFamily="34" charset="-122"/>
                 <a:cs typeface="Calibri" pitchFamily="34" charset="-120"/>
               </a:rPr>
-              <a:t>Work item tools are consolidated</a:t>
+              <a:t>Work item tools (wit)</a:t>
             </a:r>
             <a:endParaRPr lang="en-US" sz="2800" dirty="0"/>
           </a:p>

--- a/decks/day3/module-6-azure-devops-mcp.pptx
+++ b/decks/day3/module-6-azure-devops-mcp.pptx
@@ -4739,8 +4739,8 @@
             <a:tbl>
               <a:tblPr/>
               <a:tblGrid>
-                <a:gridCol w="4206240"/>
-                <a:gridCol w="4206240"/>
+                <a:gridCol w="2555690"/>
+                <a:gridCol w="5856790"/>
               </a:tblGrid>
               <a:tr h="586740">
                 <a:tc>
@@ -7223,7 +7223,7 @@
                 <a:ea typeface="Calibri" pitchFamily="34" charset="-122"/>
                 <a:cs typeface="Calibri" pitchFamily="34" charset="-120"/>
               </a:rPr>
-              <a:t>Wwo status labels</a:t>
+              <a:t>Two status labels</a:t>
             </a:r>
             <a:endParaRPr lang="en-US" sz="2800" dirty="0"/>
           </a:p>
@@ -7738,9 +7738,9 @@
             <a:tbl>
               <a:tblPr/>
               <a:tblGrid>
-                <a:gridCol w="2804160"/>
-                <a:gridCol w="2804160"/>
-                <a:gridCol w="2804160"/>
+                <a:gridCol w="1869440"/>
+                <a:gridCol w="3204754"/>
+                <a:gridCol w="3338286"/>
               </a:tblGrid>
               <a:tr h="586740">
                 <a:tc>
@@ -11155,9 +11155,9 @@
             <a:tbl>
               <a:tblPr/>
               <a:tblGrid>
-                <a:gridCol w="2804160"/>
-                <a:gridCol w="2804160"/>
-                <a:gridCol w="2804160"/>
+                <a:gridCol w="2955175"/>
+                <a:gridCol w="4268585"/>
+                <a:gridCol w="1188720"/>
               </a:tblGrid>
               <a:tr h="658368">
                 <a:tc>

--- a/decks/day3/module-6-azure-devops-mcp.pptx
+++ b/decks/day3/module-6-azure-devops-mcp.pptx
@@ -2593,7 +2593,7 @@
         <p:spPr>
           <a:xfrm>
             <a:off x="896112" y="1335024"/>
-            <a:ext cx="1975104" cy="310896"/>
+            <a:ext cx="1975104" cy="311277"/>
           </a:xfrm>
           <a:prstGeom prst="rect">
             <a:avLst/>
@@ -2602,7 +2602,7 @@
           <a:ln/>
         </p:spPr>
         <p:txBody>
-          <a:bodyPr wrap="square" lIns="0" tIns="0" rIns="0" bIns="0" rtlCol="0" anchor="ctr">
+          <a:bodyPr wrap="square" lIns="0" tIns="0" rIns="0" bIns="0" rtlCol="0" anchor="t">
             <a:normAutofit/>
           </a:bodyPr>
           <a:lstStyle/>
@@ -2633,8 +2633,8 @@
         </p:nvSpPr>
         <p:spPr>
           <a:xfrm>
-            <a:off x="512064" y="1719072"/>
-            <a:ext cx="2340864" cy="950976"/>
+            <a:off x="512064" y="1701165"/>
+            <a:ext cx="2340864" cy="996315"/>
           </a:xfrm>
           <a:prstGeom prst="rect">
             <a:avLst/>
@@ -2781,7 +2781,7 @@
         <p:spPr>
           <a:xfrm>
             <a:off x="3785616" y="1335024"/>
-            <a:ext cx="1975104" cy="310896"/>
+            <a:ext cx="1975104" cy="311277"/>
           </a:xfrm>
           <a:prstGeom prst="rect">
             <a:avLst/>
@@ -2790,7 +2790,7 @@
           <a:ln/>
         </p:spPr>
         <p:txBody>
-          <a:bodyPr wrap="square" lIns="0" tIns="0" rIns="0" bIns="0" rtlCol="0" anchor="ctr">
+          <a:bodyPr wrap="square" lIns="0" tIns="0" rIns="0" bIns="0" rtlCol="0" anchor="t">
             <a:normAutofit/>
           </a:bodyPr>
           <a:lstStyle/>
@@ -2821,8 +2821,8 @@
         </p:nvSpPr>
         <p:spPr>
           <a:xfrm>
-            <a:off x="3401568" y="1719072"/>
-            <a:ext cx="2340864" cy="950976"/>
+            <a:off x="3401568" y="1701165"/>
+            <a:ext cx="2340864" cy="996315"/>
           </a:xfrm>
           <a:prstGeom prst="rect">
             <a:avLst/>
@@ -2969,7 +2969,7 @@
         <p:spPr>
           <a:xfrm>
             <a:off x="6675120" y="1335024"/>
-            <a:ext cx="1975104" cy="310896"/>
+            <a:ext cx="1975104" cy="311277"/>
           </a:xfrm>
           <a:prstGeom prst="rect">
             <a:avLst/>
@@ -2978,7 +2978,7 @@
           <a:ln/>
         </p:spPr>
         <p:txBody>
-          <a:bodyPr wrap="square" lIns="0" tIns="0" rIns="0" bIns="0" rtlCol="0" anchor="ctr">
+          <a:bodyPr wrap="square" lIns="0" tIns="0" rIns="0" bIns="0" rtlCol="0" anchor="t">
             <a:normAutofit/>
           </a:bodyPr>
           <a:lstStyle/>
@@ -3009,8 +3009,8 @@
         </p:nvSpPr>
         <p:spPr>
           <a:xfrm>
-            <a:off x="6291072" y="1719072"/>
-            <a:ext cx="2340864" cy="950976"/>
+            <a:off x="6291072" y="1701165"/>
+            <a:ext cx="2340864" cy="996315"/>
           </a:xfrm>
           <a:prstGeom prst="rect">
             <a:avLst/>
@@ -3137,7 +3137,7 @@
         <p:spPr>
           <a:xfrm>
             <a:off x="896112" y="3163824"/>
-            <a:ext cx="1975104" cy="310896"/>
+            <a:ext cx="1975104" cy="311277"/>
           </a:xfrm>
           <a:prstGeom prst="rect">
             <a:avLst/>
@@ -3146,7 +3146,7 @@
           <a:ln/>
         </p:spPr>
         <p:txBody>
-          <a:bodyPr wrap="square" lIns="0" tIns="0" rIns="0" bIns="0" rtlCol="0" anchor="ctr">
+          <a:bodyPr wrap="square" lIns="0" tIns="0" rIns="0" bIns="0" rtlCol="0" anchor="t">
             <a:normAutofit/>
           </a:bodyPr>
           <a:lstStyle/>
@@ -3177,8 +3177,8 @@
         </p:nvSpPr>
         <p:spPr>
           <a:xfrm>
-            <a:off x="512064" y="3547872"/>
-            <a:ext cx="2340864" cy="950976"/>
+            <a:off x="512064" y="3529965"/>
+            <a:ext cx="2340864" cy="996315"/>
           </a:xfrm>
           <a:prstGeom prst="rect">
             <a:avLst/>
@@ -3325,7 +3325,7 @@
         <p:spPr>
           <a:xfrm>
             <a:off x="3785616" y="3163824"/>
-            <a:ext cx="1975104" cy="310896"/>
+            <a:ext cx="1975104" cy="311277"/>
           </a:xfrm>
           <a:prstGeom prst="rect">
             <a:avLst/>
@@ -3334,7 +3334,7 @@
           <a:ln/>
         </p:spPr>
         <p:txBody>
-          <a:bodyPr wrap="square" lIns="0" tIns="0" rIns="0" bIns="0" rtlCol="0" anchor="ctr">
+          <a:bodyPr wrap="square" lIns="0" tIns="0" rIns="0" bIns="0" rtlCol="0" anchor="t">
             <a:normAutofit/>
           </a:bodyPr>
           <a:lstStyle/>
@@ -3365,8 +3365,8 @@
         </p:nvSpPr>
         <p:spPr>
           <a:xfrm>
-            <a:off x="3401568" y="3547872"/>
-            <a:ext cx="2340864" cy="950976"/>
+            <a:off x="3401568" y="3529965"/>
+            <a:ext cx="2340864" cy="996315"/>
           </a:xfrm>
           <a:prstGeom prst="rect">
             <a:avLst/>
@@ -4118,7 +4118,7 @@
         <p:spPr>
           <a:xfrm>
             <a:off x="512064" y="1197864"/>
-            <a:ext cx="3813048" cy="310896"/>
+            <a:ext cx="3813048" cy="311277"/>
           </a:xfrm>
           <a:prstGeom prst="rect">
             <a:avLst/>
@@ -4127,7 +4127,7 @@
           <a:ln/>
         </p:spPr>
         <p:txBody>
-          <a:bodyPr wrap="square" lIns="0" tIns="0" rIns="0" bIns="0" rtlCol="0" anchor="ctr">
+          <a:bodyPr wrap="square" lIns="0" tIns="0" rIns="0" bIns="0" rtlCol="0" anchor="t">
             <a:normAutofit/>
           </a:bodyPr>
           <a:lstStyle/>
@@ -4158,8 +4158,8 @@
         </p:nvSpPr>
         <p:spPr>
           <a:xfrm>
-            <a:off x="512064" y="1581912"/>
-            <a:ext cx="3813048" cy="1033272"/>
+            <a:off x="512064" y="1564005"/>
+            <a:ext cx="3813048" cy="1078611"/>
           </a:xfrm>
           <a:prstGeom prst="rect">
             <a:avLst/>
@@ -4227,7 +4227,7 @@
         <p:spPr>
           <a:xfrm>
             <a:off x="4818888" y="1197864"/>
-            <a:ext cx="3813048" cy="310896"/>
+            <a:ext cx="3813048" cy="311277"/>
           </a:xfrm>
           <a:prstGeom prst="rect">
             <a:avLst/>
@@ -4236,7 +4236,7 @@
           <a:ln/>
         </p:spPr>
         <p:txBody>
-          <a:bodyPr wrap="square" lIns="0" tIns="0" rIns="0" bIns="0" rtlCol="0" anchor="ctr">
+          <a:bodyPr wrap="square" lIns="0" tIns="0" rIns="0" bIns="0" rtlCol="0" anchor="t">
             <a:normAutofit/>
           </a:bodyPr>
           <a:lstStyle/>
@@ -4267,8 +4267,8 @@
         </p:nvSpPr>
         <p:spPr>
           <a:xfrm>
-            <a:off x="4818888" y="1581912"/>
-            <a:ext cx="3813048" cy="1033272"/>
+            <a:off x="4818888" y="1564005"/>
+            <a:ext cx="3813048" cy="1078611"/>
           </a:xfrm>
           <a:prstGeom prst="rect">
             <a:avLst/>
@@ -4336,7 +4336,7 @@
         <p:spPr>
           <a:xfrm>
             <a:off x="512064" y="3054096"/>
-            <a:ext cx="3813048" cy="310896"/>
+            <a:ext cx="3813048" cy="311277"/>
           </a:xfrm>
           <a:prstGeom prst="rect">
             <a:avLst/>
@@ -4345,7 +4345,7 @@
           <a:ln/>
         </p:spPr>
         <p:txBody>
-          <a:bodyPr wrap="square" lIns="0" tIns="0" rIns="0" bIns="0" rtlCol="0" anchor="ctr">
+          <a:bodyPr wrap="square" lIns="0" tIns="0" rIns="0" bIns="0" rtlCol="0" anchor="t">
             <a:normAutofit/>
           </a:bodyPr>
           <a:lstStyle/>
@@ -4376,8 +4376,8 @@
         </p:nvSpPr>
         <p:spPr>
           <a:xfrm>
-            <a:off x="512064" y="3438144"/>
-            <a:ext cx="3813048" cy="1033272"/>
+            <a:off x="512064" y="3420237"/>
+            <a:ext cx="3813048" cy="1078611"/>
           </a:xfrm>
           <a:prstGeom prst="rect">
             <a:avLst/>
@@ -4445,7 +4445,7 @@
         <p:spPr>
           <a:xfrm>
             <a:off x="4818888" y="3054096"/>
-            <a:ext cx="3813048" cy="310896"/>
+            <a:ext cx="3813048" cy="311277"/>
           </a:xfrm>
           <a:prstGeom prst="rect">
             <a:avLst/>
@@ -4454,7 +4454,7 @@
           <a:ln/>
         </p:spPr>
         <p:txBody>
-          <a:bodyPr wrap="square" lIns="0" tIns="0" rIns="0" bIns="0" rtlCol="0" anchor="ctr">
+          <a:bodyPr wrap="square" lIns="0" tIns="0" rIns="0" bIns="0" rtlCol="0" anchor="t">
             <a:normAutofit/>
           </a:bodyPr>
           <a:lstStyle/>
@@ -4485,8 +4485,8 @@
         </p:nvSpPr>
         <p:spPr>
           <a:xfrm>
-            <a:off x="4818888" y="3438144"/>
-            <a:ext cx="3813048" cy="1033272"/>
+            <a:off x="4818888" y="3420237"/>
+            <a:ext cx="3813048" cy="1078611"/>
           </a:xfrm>
           <a:prstGeom prst="rect">
             <a:avLst/>
@@ -5808,7 +5808,7 @@
         <p:spPr>
           <a:xfrm>
             <a:off x="512064" y="1197864"/>
-            <a:ext cx="3813048" cy="310896"/>
+            <a:ext cx="3813048" cy="311277"/>
           </a:xfrm>
           <a:prstGeom prst="rect">
             <a:avLst/>
@@ -5817,7 +5817,7 @@
           <a:ln/>
         </p:spPr>
         <p:txBody>
-          <a:bodyPr wrap="square" lIns="0" tIns="0" rIns="0" bIns="0" rtlCol="0" anchor="ctr">
+          <a:bodyPr wrap="square" lIns="0" tIns="0" rIns="0" bIns="0" rtlCol="0" anchor="t">
             <a:normAutofit/>
           </a:bodyPr>
           <a:lstStyle/>
@@ -5848,8 +5848,8 @@
         </p:nvSpPr>
         <p:spPr>
           <a:xfrm>
-            <a:off x="512064" y="1581912"/>
-            <a:ext cx="3813048" cy="1033272"/>
+            <a:off x="512064" y="1564005"/>
+            <a:ext cx="3813048" cy="1078611"/>
           </a:xfrm>
           <a:prstGeom prst="rect">
             <a:avLst/>
@@ -5917,7 +5917,7 @@
         <p:spPr>
           <a:xfrm>
             <a:off x="4818888" y="1197864"/>
-            <a:ext cx="3813048" cy="310896"/>
+            <a:ext cx="3813048" cy="311277"/>
           </a:xfrm>
           <a:prstGeom prst="rect">
             <a:avLst/>
@@ -5926,7 +5926,7 @@
           <a:ln/>
         </p:spPr>
         <p:txBody>
-          <a:bodyPr wrap="square" lIns="0" tIns="0" rIns="0" bIns="0" rtlCol="0" anchor="ctr">
+          <a:bodyPr wrap="square" lIns="0" tIns="0" rIns="0" bIns="0" rtlCol="0" anchor="t">
             <a:normAutofit/>
           </a:bodyPr>
           <a:lstStyle/>
@@ -5957,8 +5957,8 @@
         </p:nvSpPr>
         <p:spPr>
           <a:xfrm>
-            <a:off x="4818888" y="1581912"/>
-            <a:ext cx="3813048" cy="1033272"/>
+            <a:off x="4818888" y="1564005"/>
+            <a:ext cx="3813048" cy="1078611"/>
           </a:xfrm>
           <a:prstGeom prst="rect">
             <a:avLst/>
@@ -6026,7 +6026,7 @@
         <p:spPr>
           <a:xfrm>
             <a:off x="512064" y="3054096"/>
-            <a:ext cx="3813048" cy="310896"/>
+            <a:ext cx="3813048" cy="311277"/>
           </a:xfrm>
           <a:prstGeom prst="rect">
             <a:avLst/>
@@ -6035,7 +6035,7 @@
           <a:ln/>
         </p:spPr>
         <p:txBody>
-          <a:bodyPr wrap="square" lIns="0" tIns="0" rIns="0" bIns="0" rtlCol="0" anchor="ctr">
+          <a:bodyPr wrap="square" lIns="0" tIns="0" rIns="0" bIns="0" rtlCol="0" anchor="t">
             <a:normAutofit/>
           </a:bodyPr>
           <a:lstStyle/>
@@ -6066,8 +6066,8 @@
         </p:nvSpPr>
         <p:spPr>
           <a:xfrm>
-            <a:off x="512064" y="3438144"/>
-            <a:ext cx="3813048" cy="1033272"/>
+            <a:off x="512064" y="3420237"/>
+            <a:ext cx="3813048" cy="1078611"/>
           </a:xfrm>
           <a:prstGeom prst="rect">
             <a:avLst/>
@@ -6135,7 +6135,7 @@
         <p:spPr>
           <a:xfrm>
             <a:off x="4818888" y="3054096"/>
-            <a:ext cx="3813048" cy="310896"/>
+            <a:ext cx="3813048" cy="311277"/>
           </a:xfrm>
           <a:prstGeom prst="rect">
             <a:avLst/>
@@ -6144,7 +6144,7 @@
           <a:ln/>
         </p:spPr>
         <p:txBody>
-          <a:bodyPr wrap="square" lIns="0" tIns="0" rIns="0" bIns="0" rtlCol="0" anchor="ctr">
+          <a:bodyPr wrap="square" lIns="0" tIns="0" rIns="0" bIns="0" rtlCol="0" anchor="t">
             <a:normAutofit/>
           </a:bodyPr>
           <a:lstStyle/>
@@ -6175,8 +6175,8 @@
         </p:nvSpPr>
         <p:spPr>
           <a:xfrm>
-            <a:off x="4818888" y="3438144"/>
-            <a:ext cx="3813048" cy="1033272"/>
+            <a:off x="4818888" y="3420237"/>
+            <a:ext cx="3813048" cy="1078611"/>
           </a:xfrm>
           <a:prstGeom prst="rect">
             <a:avLst/>
